--- a/plugins/gradient-cio/assets/examples/internal-gips-review-asset-owner.pptx
+++ b/plugins/gradient-cio/assets/examples/internal-gips-review-asset-owner.pptx
@@ -3638,7 +3638,7 @@
               <a:rPr>
                 <a:latin typeface="Inter"/>
               </a:rPr>
-              <a:t>SUBJECT</a:t>
+              <a:t>ASSET OWNER</a:t>
             </a:r>
           </a:p>
         </p:txBody>
@@ -3939,224 +3939,7 @@
       </p:sp>
       <p:sp>
         <p:nvSpPr>
-          <p:cNvPr id="17" name="Rectangle 16"/>
-          <p:cNvSpPr/>
-          <p:nvPr/>
-        </p:nvSpPr>
-        <p:spPr>
-          <a:xfrm>
-            <a:off x="685800" y="5687568"/>
-            <a:ext cx="3337560" cy="530352"/>
-          </a:xfrm>
-          <a:prstGeom prst="rect">
-            <a:avLst/>
-          </a:prstGeom>
-          <a:solidFill>
-            <a:srgbClr val="F2A93B"/>
-          </a:solidFill>
-          <a:ln>
-            <a:solidFill>
-              <a:srgbClr val="F2A93B"/>
-            </a:solidFill>
-          </a:ln>
-        </p:spPr>
-        <p:style>
-          <a:lnRef idx="1">
-            <a:schemeClr val="accent1"/>
-          </a:lnRef>
-          <a:fillRef idx="3">
-            <a:schemeClr val="accent1"/>
-          </a:fillRef>
-          <a:effectRef idx="2">
-            <a:schemeClr val="accent1"/>
-          </a:effectRef>
-          <a:fontRef idx="minor">
-            <a:schemeClr val="lt1"/>
-          </a:fontRef>
-        </p:style>
-        <p:txBody>
-          <a:bodyPr rtlCol="0" anchor="ctr"/>
-          <a:lstStyle/>
-          <a:p>
-            <a:pPr algn="ctr">
-              <a:defRPr>
-                <a:latin typeface="Inter"/>
-              </a:defRPr>
-            </a:pPr>
-          </a:p>
-        </p:txBody>
-      </p:sp>
-      <p:sp>
-        <p:nvSpPr>
-          <p:cNvPr id="18" name="TextBox 17"/>
-          <p:cNvSpPr txBox="1"/>
-          <p:nvPr/>
-        </p:nvSpPr>
-        <p:spPr>
-          <a:xfrm>
-            <a:off x="822960" y="5760720"/>
-            <a:ext cx="3063240" cy="128016"/>
-          </a:xfrm>
-          <a:prstGeom prst="rect">
-            <a:avLst/>
-          </a:prstGeom>
-          <a:noFill/>
-        </p:spPr>
-        <p:txBody>
-          <a:bodyPr wrap="none" lIns="9144" rIns="9144" tIns="9144" bIns="9144" anchor="t">
-            <a:spAutoFit/>
-          </a:bodyPr>
-          <a:lstStyle/>
-          <a:p>
-            <a:pPr algn="l">
-              <a:spcAft>
-                <a:spcPts val="0"/>
-              </a:spcAft>
-              <a:defRPr sz="620" b="1">
-                <a:solidFill>
-                  <a:srgbClr val="0D1117"/>
-                </a:solidFill>
-                <a:latin typeface="Inter"/>
-              </a:defRPr>
-            </a:pPr>
-            <a:r>
-              <a:rPr>
-                <a:latin typeface="Inter"/>
-              </a:rPr>
-              <a:t>OVERALL VIEW</a:t>
-            </a:r>
-          </a:p>
-        </p:txBody>
-      </p:sp>
-      <p:sp>
-        <p:nvSpPr>
-          <p:cNvPr id="19" name="TextBox 18"/>
-          <p:cNvSpPr txBox="1"/>
-          <p:nvPr/>
-        </p:nvSpPr>
-        <p:spPr>
-          <a:xfrm>
-            <a:off x="822960" y="5916168"/>
-            <a:ext cx="3063240" cy="182880"/>
-          </a:xfrm>
-          <a:prstGeom prst="rect">
-            <a:avLst/>
-          </a:prstGeom>
-          <a:noFill/>
-        </p:spPr>
-        <p:txBody>
-          <a:bodyPr wrap="none" lIns="9144" rIns="9144" tIns="9144" bIns="9144" anchor="t">
-            <a:spAutoFit/>
-          </a:bodyPr>
-          <a:lstStyle/>
-          <a:p>
-            <a:pPr algn="l">
-              <a:spcAft>
-                <a:spcPts val="0"/>
-              </a:spcAft>
-              <a:defRPr sz="900" b="1">
-                <a:solidFill>
-                  <a:srgbClr val="0D1117"/>
-                </a:solidFill>
-                <a:latin typeface="Inter"/>
-              </a:defRPr>
-            </a:pPr>
-            <a:r>
-              <a:rPr>
-                <a:latin typeface="Inter"/>
-              </a:rPr>
-              <a:t>Satisfactory with follow-ups</a:t>
-            </a:r>
-          </a:p>
-        </p:txBody>
-      </p:sp>
-      <p:sp>
-        <p:nvSpPr>
-          <p:cNvPr id="20" name="TextBox 19"/>
-          <p:cNvSpPr txBox="1"/>
-          <p:nvPr/>
-        </p:nvSpPr>
-        <p:spPr>
-          <a:xfrm>
-            <a:off x="4297680" y="5733288"/>
-            <a:ext cx="3108960" cy="164592"/>
-          </a:xfrm>
-          <a:prstGeom prst="rect">
-            <a:avLst/>
-          </a:prstGeom>
-          <a:noFill/>
-        </p:spPr>
-        <p:txBody>
-          <a:bodyPr wrap="none" lIns="9144" rIns="9144" tIns="9144" bIns="9144" anchor="t">
-            <a:spAutoFit/>
-          </a:bodyPr>
-          <a:lstStyle/>
-          <a:p>
-            <a:pPr algn="l">
-              <a:spcAft>
-                <a:spcPts val="0"/>
-              </a:spcAft>
-              <a:defRPr sz="650" b="1">
-                <a:solidFill>
-                  <a:srgbClr val="8A94A1"/>
-                </a:solidFill>
-                <a:latin typeface="Inter"/>
-              </a:defRPr>
-            </a:pPr>
-            <a:r>
-              <a:rPr>
-                <a:latin typeface="Inter"/>
-              </a:rPr>
-              <a:t>SCOPE REVIEWED</a:t>
-            </a:r>
-          </a:p>
-        </p:txBody>
-      </p:sp>
-      <p:sp>
-        <p:nvSpPr>
-          <p:cNvPr id="21" name="TextBox 20"/>
-          <p:cNvSpPr txBox="1"/>
-          <p:nvPr/>
-        </p:nvSpPr>
-        <p:spPr>
-          <a:xfrm>
-            <a:off x="4297680" y="5934456"/>
-            <a:ext cx="3108960" cy="201168"/>
-          </a:xfrm>
-          <a:prstGeom prst="rect">
-            <a:avLst/>
-          </a:prstGeom>
-          <a:noFill/>
-        </p:spPr>
-        <p:txBody>
-          <a:bodyPr wrap="none" lIns="9144" rIns="9144" tIns="9144" bIns="9144" anchor="t">
-            <a:spAutoFit/>
-          </a:bodyPr>
-          <a:lstStyle/>
-          <a:p>
-            <a:pPr algn="l">
-              <a:spcAft>
-                <a:spcPts val="0"/>
-              </a:spcAft>
-              <a:defRPr sz="800" b="1">
-                <a:solidFill>
-                  <a:srgbClr val="FFFFFF"/>
-                </a:solidFill>
-                <a:latin typeface="Inter"/>
-              </a:defRPr>
-            </a:pPr>
-            <a:r>
-              <a:rPr>
-                <a:latin typeface="Inter"/>
-              </a:rPr>
-              <a:t>4 of 5 · Partial</a:t>
-            </a:r>
-          </a:p>
-        </p:txBody>
-      </p:sp>
-      <p:sp>
-        <p:nvSpPr>
-          <p:cNvPr id="22" name="TextBox 21"/>
+          <p:cNvPr id="17" name="TextBox 16"/>
           <p:cNvSpPr txBox="1"/>
           <p:nvPr/>
         </p:nvSpPr>
@@ -4198,7 +3981,7 @@
       </p:sp>
       <p:sp>
         <p:nvSpPr>
-          <p:cNvPr id="23" name="TextBox 22"/>
+          <p:cNvPr id="18" name="TextBox 17"/>
           <p:cNvSpPr txBox="1"/>
           <p:nvPr/>
         </p:nvSpPr>
@@ -4240,7 +4023,7 @@
       </p:sp>
       <p:sp>
         <p:nvSpPr>
-          <p:cNvPr id="24" name="TextBox 23"/>
+          <p:cNvPr id="19" name="TextBox 18"/>
           <p:cNvSpPr txBox="1"/>
           <p:nvPr/>
         </p:nvSpPr>
@@ -4355,48 +4138,6 @@
         </p:nvSpPr>
         <p:spPr>
           <a:xfrm>
-            <a:off x="5897880" y="310896"/>
-            <a:ext cx="4800600" cy="256032"/>
-          </a:xfrm>
-          <a:prstGeom prst="rect">
-            <a:avLst/>
-          </a:prstGeom>
-          <a:noFill/>
-        </p:spPr>
-        <p:txBody>
-          <a:bodyPr wrap="none" lIns="9144" rIns="9144" tIns="9144" bIns="9144" anchor="t">
-            <a:spAutoFit/>
-          </a:bodyPr>
-          <a:lstStyle/>
-          <a:p>
-            <a:pPr algn="r">
-              <a:spcAft>
-                <a:spcPts val="0"/>
-              </a:spcAft>
-              <a:defRPr sz="680" b="1">
-                <a:solidFill>
-                  <a:srgbClr val="4F6B00"/>
-                </a:solidFill>
-                <a:latin typeface="Inter"/>
-              </a:defRPr>
-            </a:pPr>
-            <a:r>
-              <a:rPr>
-                <a:latin typeface="Inter"/>
-              </a:rPr>
-              <a:t>Illustrative, Gradient Maintained — demo data, not the client's holdings or managers</a:t>
-            </a:r>
-          </a:p>
-        </p:txBody>
-      </p:sp>
-      <p:sp>
-        <p:nvSpPr>
-          <p:cNvPr id="4" name="TextBox 3"/>
-          <p:cNvSpPr txBox="1"/>
-          <p:nvPr/>
-        </p:nvSpPr>
-        <p:spPr>
-          <a:xfrm>
             <a:off x="640080" y="566928"/>
             <a:ext cx="10058400" cy="530352"/>
           </a:xfrm>
@@ -4433,7 +4174,7 @@
       </p:sp>
       <p:sp>
         <p:nvSpPr>
-          <p:cNvPr id="5" name="Rectangle 4"/>
+          <p:cNvPr id="4" name="Rectangle 3"/>
           <p:cNvSpPr/>
           <p:nvPr/>
         </p:nvSpPr>
@@ -4482,7 +4223,7 @@
       </p:sp>
       <p:sp>
         <p:nvSpPr>
-          <p:cNvPr id="6" name="Rectangle 5"/>
+          <p:cNvPr id="5" name="Rectangle 4"/>
           <p:cNvSpPr/>
           <p:nvPr/>
         </p:nvSpPr>
@@ -4531,7 +4272,7 @@
       </p:sp>
       <p:sp>
         <p:nvSpPr>
-          <p:cNvPr id="7" name="TextBox 6"/>
+          <p:cNvPr id="6" name="TextBox 5"/>
           <p:cNvSpPr txBox="1"/>
           <p:nvPr/>
         </p:nvSpPr>
@@ -4573,7 +4314,7 @@
       </p:sp>
       <p:sp>
         <p:nvSpPr>
-          <p:cNvPr id="8" name="TextBox 7"/>
+          <p:cNvPr id="7" name="TextBox 6"/>
           <p:cNvSpPr txBox="1"/>
           <p:nvPr/>
         </p:nvSpPr>
@@ -4639,7 +4380,7 @@
       </p:sp>
       <p:sp>
         <p:nvSpPr>
-          <p:cNvPr id="9" name="Rectangle 8"/>
+          <p:cNvPr id="8" name="Rectangle 7"/>
           <p:cNvSpPr/>
           <p:nvPr/>
         </p:nvSpPr>
@@ -4688,7 +4429,7 @@
       </p:sp>
       <p:sp>
         <p:nvSpPr>
-          <p:cNvPr id="10" name="TextBox 9"/>
+          <p:cNvPr id="9" name="TextBox 8"/>
           <p:cNvSpPr txBox="1"/>
           <p:nvPr/>
         </p:nvSpPr>
@@ -4730,7 +4471,7 @@
       </p:sp>
       <p:sp>
         <p:nvSpPr>
-          <p:cNvPr id="11" name="TextBox 10"/>
+          <p:cNvPr id="10" name="TextBox 9"/>
           <p:cNvSpPr txBox="1"/>
           <p:nvPr/>
         </p:nvSpPr>
@@ -4772,7 +4513,7 @@
       </p:sp>
       <p:sp>
         <p:nvSpPr>
-          <p:cNvPr id="12" name="TextBox 11"/>
+          <p:cNvPr id="11" name="TextBox 10"/>
           <p:cNvSpPr txBox="1"/>
           <p:nvPr/>
         </p:nvSpPr>
@@ -4887,48 +4628,6 @@
         </p:nvSpPr>
         <p:spPr>
           <a:xfrm>
-            <a:off x="5897880" y="310896"/>
-            <a:ext cx="4800600" cy="256032"/>
-          </a:xfrm>
-          <a:prstGeom prst="rect">
-            <a:avLst/>
-          </a:prstGeom>
-          <a:noFill/>
-        </p:spPr>
-        <p:txBody>
-          <a:bodyPr wrap="none" lIns="9144" rIns="9144" tIns="9144" bIns="9144" anchor="t">
-            <a:spAutoFit/>
-          </a:bodyPr>
-          <a:lstStyle/>
-          <a:p>
-            <a:pPr algn="r">
-              <a:spcAft>
-                <a:spcPts val="0"/>
-              </a:spcAft>
-              <a:defRPr sz="680" b="1">
-                <a:solidFill>
-                  <a:srgbClr val="4F6B00"/>
-                </a:solidFill>
-                <a:latin typeface="Inter"/>
-              </a:defRPr>
-            </a:pPr>
-            <a:r>
-              <a:rPr>
-                <a:latin typeface="Inter"/>
-              </a:rPr>
-              <a:t>Illustrative, Gradient Maintained — demo data, not the client's holdings or managers</a:t>
-            </a:r>
-          </a:p>
-        </p:txBody>
-      </p:sp>
-      <p:sp>
-        <p:nvSpPr>
-          <p:cNvPr id="4" name="TextBox 3"/>
-          <p:cNvSpPr txBox="1"/>
-          <p:nvPr/>
-        </p:nvSpPr>
-        <p:spPr>
-          <a:xfrm>
             <a:off x="640080" y="566928"/>
             <a:ext cx="10058400" cy="530352"/>
           </a:xfrm>
@@ -4965,7 +4664,7 @@
       </p:sp>
       <p:sp>
         <p:nvSpPr>
-          <p:cNvPr id="5" name="Rectangle 4"/>
+          <p:cNvPr id="4" name="Rectangle 3"/>
           <p:cNvSpPr/>
           <p:nvPr/>
         </p:nvSpPr>
@@ -5014,7 +4713,7 @@
       </p:sp>
       <p:sp>
         <p:nvSpPr>
-          <p:cNvPr id="6" name="Rectangle 5"/>
+          <p:cNvPr id="5" name="Rectangle 4"/>
           <p:cNvSpPr/>
           <p:nvPr/>
         </p:nvSpPr>
@@ -5063,7 +4762,7 @@
       </p:sp>
       <p:sp>
         <p:nvSpPr>
-          <p:cNvPr id="7" name="TextBox 6"/>
+          <p:cNvPr id="6" name="TextBox 5"/>
           <p:cNvSpPr txBox="1"/>
           <p:nvPr/>
         </p:nvSpPr>
@@ -5105,7 +4804,7 @@
       </p:sp>
       <p:sp>
         <p:nvSpPr>
-          <p:cNvPr id="8" name="TextBox 7"/>
+          <p:cNvPr id="7" name="TextBox 6"/>
           <p:cNvSpPr txBox="1"/>
           <p:nvPr/>
         </p:nvSpPr>
@@ -5180,7 +4879,7 @@
       </p:sp>
       <p:sp>
         <p:nvSpPr>
-          <p:cNvPr id="9" name="TextBox 8"/>
+          <p:cNvPr id="8" name="TextBox 7"/>
           <p:cNvSpPr txBox="1"/>
           <p:nvPr/>
         </p:nvSpPr>
@@ -5241,7 +4940,7 @@
       </p:sp>
       <p:sp>
         <p:nvSpPr>
-          <p:cNvPr id="10" name="Rectangle 9"/>
+          <p:cNvPr id="9" name="Rectangle 8"/>
           <p:cNvSpPr/>
           <p:nvPr/>
         </p:nvSpPr>
@@ -5290,7 +4989,7 @@
       </p:sp>
       <p:sp>
         <p:nvSpPr>
-          <p:cNvPr id="11" name="TextBox 10"/>
+          <p:cNvPr id="10" name="TextBox 9"/>
           <p:cNvSpPr txBox="1"/>
           <p:nvPr/>
         </p:nvSpPr>
@@ -5332,7 +5031,7 @@
       </p:sp>
       <p:sp>
         <p:nvSpPr>
-          <p:cNvPr id="12" name="TextBox 11"/>
+          <p:cNvPr id="11" name="TextBox 10"/>
           <p:cNvSpPr txBox="1"/>
           <p:nvPr/>
         </p:nvSpPr>
@@ -5374,7 +5073,7 @@
       </p:sp>
       <p:sp>
         <p:nvSpPr>
-          <p:cNvPr id="13" name="TextBox 12"/>
+          <p:cNvPr id="12" name="TextBox 11"/>
           <p:cNvSpPr txBox="1"/>
           <p:nvPr/>
         </p:nvSpPr>
@@ -5489,48 +5188,6 @@
         </p:nvSpPr>
         <p:spPr>
           <a:xfrm>
-            <a:off x="5897880" y="310896"/>
-            <a:ext cx="4800600" cy="256032"/>
-          </a:xfrm>
-          <a:prstGeom prst="rect">
-            <a:avLst/>
-          </a:prstGeom>
-          <a:noFill/>
-        </p:spPr>
-        <p:txBody>
-          <a:bodyPr wrap="none" lIns="9144" rIns="9144" tIns="9144" bIns="9144" anchor="t">
-            <a:spAutoFit/>
-          </a:bodyPr>
-          <a:lstStyle/>
-          <a:p>
-            <a:pPr algn="r">
-              <a:spcAft>
-                <a:spcPts val="0"/>
-              </a:spcAft>
-              <a:defRPr sz="680" b="1">
-                <a:solidFill>
-                  <a:srgbClr val="4F6B00"/>
-                </a:solidFill>
-                <a:latin typeface="Inter"/>
-              </a:defRPr>
-            </a:pPr>
-            <a:r>
-              <a:rPr>
-                <a:latin typeface="Inter"/>
-              </a:rPr>
-              <a:t>Illustrative, Gradient Maintained — demo data, not the client's holdings or managers</a:t>
-            </a:r>
-          </a:p>
-        </p:txBody>
-      </p:sp>
-      <p:sp>
-        <p:nvSpPr>
-          <p:cNvPr id="4" name="TextBox 3"/>
-          <p:cNvSpPr txBox="1"/>
-          <p:nvPr/>
-        </p:nvSpPr>
-        <p:spPr>
-          <a:xfrm>
             <a:off x="640080" y="566928"/>
             <a:ext cx="10058400" cy="530352"/>
           </a:xfrm>
@@ -5567,7 +5224,7 @@
       </p:sp>
       <p:sp>
         <p:nvSpPr>
-          <p:cNvPr id="5" name="Rectangle 4"/>
+          <p:cNvPr id="4" name="Rectangle 3"/>
           <p:cNvSpPr/>
           <p:nvPr/>
         </p:nvSpPr>
@@ -5616,7 +5273,7 @@
       </p:sp>
       <p:sp>
         <p:nvSpPr>
-          <p:cNvPr id="6" name="Rectangle 5"/>
+          <p:cNvPr id="5" name="Rectangle 4"/>
           <p:cNvSpPr/>
           <p:nvPr/>
         </p:nvSpPr>
@@ -5665,7 +5322,7 @@
       </p:sp>
       <p:sp>
         <p:nvSpPr>
-          <p:cNvPr id="7" name="TextBox 6"/>
+          <p:cNvPr id="6" name="TextBox 5"/>
           <p:cNvSpPr txBox="1"/>
           <p:nvPr/>
         </p:nvSpPr>
@@ -5707,7 +5364,7 @@
       </p:sp>
       <p:sp>
         <p:nvSpPr>
-          <p:cNvPr id="8" name="TextBox 7"/>
+          <p:cNvPr id="7" name="TextBox 6"/>
           <p:cNvSpPr txBox="1"/>
           <p:nvPr/>
         </p:nvSpPr>
@@ -5789,7 +5446,7 @@
       </p:sp>
       <p:sp>
         <p:nvSpPr>
-          <p:cNvPr id="9" name="Rectangle 8"/>
+          <p:cNvPr id="8" name="Rectangle 7"/>
           <p:cNvSpPr/>
           <p:nvPr/>
         </p:nvSpPr>
@@ -5838,7 +5495,7 @@
       </p:sp>
       <p:sp>
         <p:nvSpPr>
-          <p:cNvPr id="10" name="TextBox 9"/>
+          <p:cNvPr id="9" name="TextBox 8"/>
           <p:cNvSpPr txBox="1"/>
           <p:nvPr/>
         </p:nvSpPr>
@@ -5880,7 +5537,7 @@
       </p:sp>
       <p:sp>
         <p:nvSpPr>
-          <p:cNvPr id="11" name="TextBox 10"/>
+          <p:cNvPr id="10" name="TextBox 9"/>
           <p:cNvSpPr txBox="1"/>
           <p:nvPr/>
         </p:nvSpPr>
@@ -5922,7 +5579,7 @@
       </p:sp>
       <p:sp>
         <p:nvSpPr>
-          <p:cNvPr id="12" name="TextBox 11"/>
+          <p:cNvPr id="11" name="TextBox 10"/>
           <p:cNvSpPr txBox="1"/>
           <p:nvPr/>
         </p:nvSpPr>
@@ -6037,48 +5694,6 @@
         </p:nvSpPr>
         <p:spPr>
           <a:xfrm>
-            <a:off x="5897880" y="310896"/>
-            <a:ext cx="4800600" cy="256032"/>
-          </a:xfrm>
-          <a:prstGeom prst="rect">
-            <a:avLst/>
-          </a:prstGeom>
-          <a:noFill/>
-        </p:spPr>
-        <p:txBody>
-          <a:bodyPr wrap="none" lIns="9144" rIns="9144" tIns="9144" bIns="9144" anchor="t">
-            <a:spAutoFit/>
-          </a:bodyPr>
-          <a:lstStyle/>
-          <a:p>
-            <a:pPr algn="r">
-              <a:spcAft>
-                <a:spcPts val="0"/>
-              </a:spcAft>
-              <a:defRPr sz="680" b="1">
-                <a:solidFill>
-                  <a:srgbClr val="4F6B00"/>
-                </a:solidFill>
-                <a:latin typeface="Inter"/>
-              </a:defRPr>
-            </a:pPr>
-            <a:r>
-              <a:rPr>
-                <a:latin typeface="Inter"/>
-              </a:rPr>
-              <a:t>Illustrative, Gradient Maintained — demo data, not the client's holdings or managers</a:t>
-            </a:r>
-          </a:p>
-        </p:txBody>
-      </p:sp>
-      <p:sp>
-        <p:nvSpPr>
-          <p:cNvPr id="4" name="TextBox 3"/>
-          <p:cNvSpPr txBox="1"/>
-          <p:nvPr/>
-        </p:nvSpPr>
-        <p:spPr>
-          <a:xfrm>
             <a:off x="640080" y="566928"/>
             <a:ext cx="10058400" cy="530352"/>
           </a:xfrm>
@@ -6115,7 +5730,7 @@
       </p:sp>
       <p:sp>
         <p:nvSpPr>
-          <p:cNvPr id="5" name="Rectangle 4"/>
+          <p:cNvPr id="4" name="Rectangle 3"/>
           <p:cNvSpPr/>
           <p:nvPr/>
         </p:nvSpPr>
@@ -6164,7 +5779,7 @@
       </p:sp>
       <p:sp>
         <p:nvSpPr>
-          <p:cNvPr id="6" name="Rectangle 5"/>
+          <p:cNvPr id="5" name="Rectangle 4"/>
           <p:cNvSpPr/>
           <p:nvPr/>
         </p:nvSpPr>
@@ -6213,7 +5828,7 @@
       </p:sp>
       <p:sp>
         <p:nvSpPr>
-          <p:cNvPr id="7" name="TextBox 6"/>
+          <p:cNvPr id="6" name="TextBox 5"/>
           <p:cNvSpPr txBox="1"/>
           <p:nvPr/>
         </p:nvSpPr>
@@ -6255,7 +5870,7 @@
       </p:sp>
       <p:sp>
         <p:nvSpPr>
-          <p:cNvPr id="8" name="TextBox 7"/>
+          <p:cNvPr id="7" name="TextBox 6"/>
           <p:cNvSpPr txBox="1"/>
           <p:nvPr/>
         </p:nvSpPr>
@@ -6337,7 +5952,7 @@
       </p:sp>
       <p:sp>
         <p:nvSpPr>
-          <p:cNvPr id="9" name="Rectangle 8"/>
+          <p:cNvPr id="8" name="Rectangle 7"/>
           <p:cNvSpPr/>
           <p:nvPr/>
         </p:nvSpPr>
@@ -6386,7 +6001,7 @@
       </p:sp>
       <p:sp>
         <p:nvSpPr>
-          <p:cNvPr id="10" name="TextBox 9"/>
+          <p:cNvPr id="9" name="TextBox 8"/>
           <p:cNvSpPr txBox="1"/>
           <p:nvPr/>
         </p:nvSpPr>
@@ -6428,7 +6043,7 @@
       </p:sp>
       <p:sp>
         <p:nvSpPr>
-          <p:cNvPr id="11" name="TextBox 10"/>
+          <p:cNvPr id="10" name="TextBox 9"/>
           <p:cNvSpPr txBox="1"/>
           <p:nvPr/>
         </p:nvSpPr>
@@ -6470,7 +6085,7 @@
       </p:sp>
       <p:sp>
         <p:nvSpPr>
-          <p:cNvPr id="12" name="TextBox 11"/>
+          <p:cNvPr id="11" name="TextBox 10"/>
           <p:cNvSpPr txBox="1"/>
           <p:nvPr/>
         </p:nvSpPr>
@@ -6585,48 +6200,6 @@
         </p:nvSpPr>
         <p:spPr>
           <a:xfrm>
-            <a:off x="5897880" y="310896"/>
-            <a:ext cx="4800600" cy="256032"/>
-          </a:xfrm>
-          <a:prstGeom prst="rect">
-            <a:avLst/>
-          </a:prstGeom>
-          <a:noFill/>
-        </p:spPr>
-        <p:txBody>
-          <a:bodyPr wrap="none" lIns="9144" rIns="9144" tIns="9144" bIns="9144" anchor="t">
-            <a:spAutoFit/>
-          </a:bodyPr>
-          <a:lstStyle/>
-          <a:p>
-            <a:pPr algn="r">
-              <a:spcAft>
-                <a:spcPts val="0"/>
-              </a:spcAft>
-              <a:defRPr sz="680" b="1">
-                <a:solidFill>
-                  <a:srgbClr val="4F6B00"/>
-                </a:solidFill>
-                <a:latin typeface="Inter"/>
-              </a:defRPr>
-            </a:pPr>
-            <a:r>
-              <a:rPr>
-                <a:latin typeface="Inter"/>
-              </a:rPr>
-              <a:t>Illustrative, Gradient Maintained — demo data, not the client's holdings or managers</a:t>
-            </a:r>
-          </a:p>
-        </p:txBody>
-      </p:sp>
-      <p:sp>
-        <p:nvSpPr>
-          <p:cNvPr id="4" name="TextBox 3"/>
-          <p:cNvSpPr txBox="1"/>
-          <p:nvPr/>
-        </p:nvSpPr>
-        <p:spPr>
-          <a:xfrm>
             <a:off x="640080" y="566928"/>
             <a:ext cx="10058400" cy="530352"/>
           </a:xfrm>
@@ -6663,7 +6236,7 @@
       </p:sp>
       <p:sp>
         <p:nvSpPr>
-          <p:cNvPr id="5" name="Rectangle 4"/>
+          <p:cNvPr id="4" name="Rectangle 3"/>
           <p:cNvSpPr/>
           <p:nvPr/>
         </p:nvSpPr>
@@ -6712,7 +6285,7 @@
       </p:sp>
       <p:sp>
         <p:nvSpPr>
-          <p:cNvPr id="6" name="Rectangle 5"/>
+          <p:cNvPr id="5" name="Rectangle 4"/>
           <p:cNvSpPr/>
           <p:nvPr/>
         </p:nvSpPr>
@@ -6761,7 +6334,7 @@
       </p:sp>
       <p:sp>
         <p:nvSpPr>
-          <p:cNvPr id="7" name="TextBox 6"/>
+          <p:cNvPr id="6" name="TextBox 5"/>
           <p:cNvSpPr txBox="1"/>
           <p:nvPr/>
         </p:nvSpPr>
@@ -6803,7 +6376,7 @@
       </p:sp>
       <p:sp>
         <p:nvSpPr>
-          <p:cNvPr id="8" name="TextBox 7"/>
+          <p:cNvPr id="7" name="TextBox 6"/>
           <p:cNvSpPr txBox="1"/>
           <p:nvPr/>
         </p:nvSpPr>
@@ -6845,7 +6418,7 @@
       </p:sp>
       <p:sp>
         <p:nvSpPr>
-          <p:cNvPr id="9" name="Rectangle 8"/>
+          <p:cNvPr id="8" name="Rectangle 7"/>
           <p:cNvSpPr/>
           <p:nvPr/>
         </p:nvSpPr>
@@ -6894,7 +6467,7 @@
       </p:sp>
       <p:sp>
         <p:nvSpPr>
-          <p:cNvPr id="10" name="TextBox 9"/>
+          <p:cNvPr id="9" name="TextBox 8"/>
           <p:cNvSpPr txBox="1"/>
           <p:nvPr/>
         </p:nvSpPr>
@@ -6936,7 +6509,7 @@
       </p:sp>
       <p:sp>
         <p:nvSpPr>
-          <p:cNvPr id="11" name="TextBox 10"/>
+          <p:cNvPr id="10" name="TextBox 9"/>
           <p:cNvSpPr txBox="1"/>
           <p:nvPr/>
         </p:nvSpPr>
@@ -6978,7 +6551,7 @@
       </p:sp>
       <p:sp>
         <p:nvSpPr>
-          <p:cNvPr id="12" name="TextBox 11"/>
+          <p:cNvPr id="11" name="TextBox 10"/>
           <p:cNvSpPr txBox="1"/>
           <p:nvPr/>
         </p:nvSpPr>
@@ -7093,48 +6666,6 @@
         </p:nvSpPr>
         <p:spPr>
           <a:xfrm>
-            <a:off x="5897880" y="310896"/>
-            <a:ext cx="4800600" cy="256032"/>
-          </a:xfrm>
-          <a:prstGeom prst="rect">
-            <a:avLst/>
-          </a:prstGeom>
-          <a:noFill/>
-        </p:spPr>
-        <p:txBody>
-          <a:bodyPr wrap="none" lIns="9144" rIns="9144" tIns="9144" bIns="9144" anchor="t">
-            <a:spAutoFit/>
-          </a:bodyPr>
-          <a:lstStyle/>
-          <a:p>
-            <a:pPr algn="r">
-              <a:spcAft>
-                <a:spcPts val="0"/>
-              </a:spcAft>
-              <a:defRPr sz="680" b="1">
-                <a:solidFill>
-                  <a:srgbClr val="4F6B00"/>
-                </a:solidFill>
-                <a:latin typeface="Inter"/>
-              </a:defRPr>
-            </a:pPr>
-            <a:r>
-              <a:rPr>
-                <a:latin typeface="Inter"/>
-              </a:rPr>
-              <a:t>Illustrative, Gradient Maintained — demo data, not the client's holdings or managers</a:t>
-            </a:r>
-          </a:p>
-        </p:txBody>
-      </p:sp>
-      <p:sp>
-        <p:nvSpPr>
-          <p:cNvPr id="4" name="TextBox 3"/>
-          <p:cNvSpPr txBox="1"/>
-          <p:nvPr/>
-        </p:nvSpPr>
-        <p:spPr>
-          <a:xfrm>
             <a:off x="640080" y="566928"/>
             <a:ext cx="10058400" cy="530352"/>
           </a:xfrm>
@@ -7171,7 +6702,7 @@
       </p:sp>
       <p:sp>
         <p:nvSpPr>
-          <p:cNvPr id="5" name="Rectangle 4"/>
+          <p:cNvPr id="4" name="Rectangle 3"/>
           <p:cNvSpPr/>
           <p:nvPr/>
         </p:nvSpPr>
@@ -7220,7 +6751,7 @@
       </p:sp>
       <p:sp>
         <p:nvSpPr>
-          <p:cNvPr id="6" name="Rectangle 5"/>
+          <p:cNvPr id="5" name="Rectangle 4"/>
           <p:cNvSpPr/>
           <p:nvPr/>
         </p:nvSpPr>
@@ -7269,7 +6800,7 @@
       </p:sp>
       <p:sp>
         <p:nvSpPr>
-          <p:cNvPr id="7" name="TextBox 6"/>
+          <p:cNvPr id="6" name="TextBox 5"/>
           <p:cNvSpPr txBox="1"/>
           <p:nvPr/>
         </p:nvSpPr>
@@ -7311,14 +6842,105 @@
       </p:sp>
       <p:sp>
         <p:nvSpPr>
-          <p:cNvPr id="8" name="Rectangle 7"/>
+          <p:cNvPr id="7" name="Rectangle 6"/>
           <p:cNvSpPr/>
           <p:nvPr/>
         </p:nvSpPr>
         <p:spPr>
           <a:xfrm>
-            <a:off x="640080" y="1325880"/>
-            <a:ext cx="10908792" cy="1866268"/>
+            <a:off x="640080" y="1399032"/>
+            <a:ext cx="73152" cy="1165298"/>
+          </a:xfrm>
+          <a:prstGeom prst="rect">
+            <a:avLst/>
+          </a:prstGeom>
+          <a:solidFill>
+            <a:srgbClr val="F2A93B"/>
+          </a:solidFill>
+          <a:ln>
+            <a:solidFill>
+              <a:srgbClr val="F2A93B"/>
+            </a:solidFill>
+          </a:ln>
+        </p:spPr>
+        <p:style>
+          <a:lnRef idx="1">
+            <a:schemeClr val="accent1"/>
+          </a:lnRef>
+          <a:fillRef idx="3">
+            <a:schemeClr val="accent1"/>
+          </a:fillRef>
+          <a:effectRef idx="2">
+            <a:schemeClr val="accent1"/>
+          </a:effectRef>
+          <a:fontRef idx="minor">
+            <a:schemeClr val="lt1"/>
+          </a:fontRef>
+        </p:style>
+        <p:txBody>
+          <a:bodyPr rtlCol="0" anchor="ctr"/>
+          <a:lstStyle/>
+          <a:p>
+            <a:pPr algn="ctr">
+              <a:defRPr>
+                <a:latin typeface="Inter"/>
+              </a:defRPr>
+            </a:pPr>
+          </a:p>
+        </p:txBody>
+      </p:sp>
+      <p:sp>
+        <p:nvSpPr>
+          <p:cNvPr id="8" name="TextBox 7"/>
+          <p:cNvSpPr txBox="1"/>
+          <p:nvPr/>
+        </p:nvSpPr>
+        <p:spPr>
+          <a:xfrm>
+            <a:off x="896112" y="1371600"/>
+            <a:ext cx="10588752" cy="760729"/>
+          </a:xfrm>
+          <a:prstGeom prst="rect">
+            <a:avLst/>
+          </a:prstGeom>
+          <a:noFill/>
+        </p:spPr>
+        <p:txBody>
+          <a:bodyPr wrap="none" lIns="9144" rIns="9144" tIns="9144" bIns="9144" anchor="t">
+            <a:spAutoFit/>
+          </a:bodyPr>
+          <a:lstStyle/>
+          <a:p>
+            <a:pPr algn="l">
+              <a:spcAft>
+                <a:spcPts val="0"/>
+              </a:spcAft>
+              <a:defRPr sz="1800" b="1">
+                <a:solidFill>
+                  <a:srgbClr val="0D1117"/>
+                </a:solidFill>
+                <a:latin typeface="Inter"/>
+              </a:defRPr>
+            </a:pPr>
+            <a:r>
+              <a:rPr>
+                <a:latin typeface="Inter"/>
+              </a:rPr>
+              <a:t>Satisfactory with follow-ups</a:t>
+            </a:r>
+          </a:p>
+        </p:txBody>
+      </p:sp>
+      <p:sp>
+        <p:nvSpPr>
+          <p:cNvPr id="9" name="Rectangle 8"/>
+          <p:cNvSpPr/>
+          <p:nvPr/>
+        </p:nvSpPr>
+        <p:spPr>
+          <a:xfrm>
+            <a:off x="640080" y="2747210"/>
+            <a:ext cx="10908792" cy="1311602"/>
           </a:xfrm>
           <a:prstGeom prst="rect">
             <a:avLst/>
@@ -7360,14 +6982,14 @@
       </p:sp>
       <p:sp>
         <p:nvSpPr>
-          <p:cNvPr id="9" name="Rectangle 8"/>
+          <p:cNvPr id="10" name="Rectangle 9"/>
           <p:cNvSpPr/>
           <p:nvPr/>
         </p:nvSpPr>
         <p:spPr>
           <a:xfrm>
-            <a:off x="640080" y="1325880"/>
-            <a:ext cx="54864" cy="1866268"/>
+            <a:off x="640080" y="2747210"/>
+            <a:ext cx="54864" cy="1311602"/>
           </a:xfrm>
           <a:prstGeom prst="rect">
             <a:avLst/>
@@ -7409,13 +7031,13 @@
       </p:sp>
       <p:sp>
         <p:nvSpPr>
-          <p:cNvPr id="10" name="TextBox 9"/>
+          <p:cNvPr id="11" name="TextBox 10"/>
           <p:cNvSpPr txBox="1"/>
           <p:nvPr/>
         </p:nvSpPr>
         <p:spPr>
           <a:xfrm>
-            <a:off x="804671" y="1435607"/>
+            <a:off x="804671" y="2856938"/>
             <a:ext cx="10616184" cy="228600"/>
           </a:xfrm>
           <a:prstGeom prst="rect">
@@ -7451,14 +7073,14 @@
       </p:sp>
       <p:sp>
         <p:nvSpPr>
-          <p:cNvPr id="11" name="TextBox 10"/>
+          <p:cNvPr id="12" name="TextBox 11"/>
           <p:cNvSpPr txBox="1"/>
           <p:nvPr/>
         </p:nvSpPr>
         <p:spPr>
           <a:xfrm>
-            <a:off x="804671" y="1719072"/>
-            <a:ext cx="10616184" cy="1381636"/>
+            <a:off x="804671" y="3140402"/>
+            <a:ext cx="10616184" cy="826970"/>
           </a:xfrm>
           <a:prstGeom prst="rect">
             <a:avLst/>
@@ -7493,14 +7115,14 @@
       </p:sp>
       <p:sp>
         <p:nvSpPr>
-          <p:cNvPr id="12" name="Rectangle 11"/>
+          <p:cNvPr id="13" name="Rectangle 12"/>
           <p:cNvSpPr/>
           <p:nvPr/>
         </p:nvSpPr>
         <p:spPr>
           <a:xfrm>
-            <a:off x="640080" y="3301876"/>
-            <a:ext cx="2644902" cy="2916043"/>
+            <a:off x="640080" y="4168541"/>
+            <a:ext cx="2644902" cy="2049378"/>
           </a:xfrm>
           <a:prstGeom prst="rect">
             <a:avLst/>
@@ -7542,13 +7164,13 @@
       </p:sp>
       <p:sp>
         <p:nvSpPr>
-          <p:cNvPr id="13" name="Rectangle 12"/>
+          <p:cNvPr id="14" name="Rectangle 13"/>
           <p:cNvSpPr/>
           <p:nvPr/>
         </p:nvSpPr>
         <p:spPr>
           <a:xfrm>
-            <a:off x="640080" y="3301876"/>
+            <a:off x="640080" y="4168541"/>
             <a:ext cx="2644902" cy="45720"/>
           </a:xfrm>
           <a:prstGeom prst="rect">
@@ -7591,13 +7213,13 @@
       </p:sp>
       <p:sp>
         <p:nvSpPr>
-          <p:cNvPr id="14" name="TextBox 13"/>
+          <p:cNvPr id="15" name="TextBox 14"/>
           <p:cNvSpPr txBox="1"/>
           <p:nvPr/>
         </p:nvSpPr>
         <p:spPr>
           <a:xfrm>
-            <a:off x="749808" y="3429892"/>
+            <a:off x="749808" y="4296557"/>
             <a:ext cx="2425446" cy="201168"/>
           </a:xfrm>
           <a:prstGeom prst="rect">
@@ -7633,13 +7255,13 @@
       </p:sp>
       <p:sp>
         <p:nvSpPr>
-          <p:cNvPr id="15" name="TextBox 14"/>
+          <p:cNvPr id="16" name="TextBox 15"/>
           <p:cNvSpPr txBox="1"/>
           <p:nvPr/>
         </p:nvSpPr>
         <p:spPr>
           <a:xfrm>
-            <a:off x="749808" y="3685924"/>
+            <a:off x="749808" y="4552589"/>
             <a:ext cx="2425446" cy="475488"/>
           </a:xfrm>
           <a:prstGeom prst="rect">
@@ -7675,7 +7297,7 @@
       </p:sp>
       <p:sp>
         <p:nvSpPr>
-          <p:cNvPr id="16" name="TextBox 15"/>
+          <p:cNvPr id="17" name="TextBox 16"/>
           <p:cNvSpPr txBox="1"/>
           <p:nvPr/>
         </p:nvSpPr>
@@ -7717,14 +7339,14 @@
       </p:sp>
       <p:sp>
         <p:nvSpPr>
-          <p:cNvPr id="17" name="Rectangle 16"/>
+          <p:cNvPr id="18" name="Rectangle 17"/>
           <p:cNvSpPr/>
           <p:nvPr/>
         </p:nvSpPr>
         <p:spPr>
           <a:xfrm>
-            <a:off x="3394710" y="3301876"/>
-            <a:ext cx="2644902" cy="2916043"/>
+            <a:off x="3394710" y="4168541"/>
+            <a:ext cx="2644902" cy="2049378"/>
           </a:xfrm>
           <a:prstGeom prst="rect">
             <a:avLst/>
@@ -7766,13 +7388,13 @@
       </p:sp>
       <p:sp>
         <p:nvSpPr>
-          <p:cNvPr id="18" name="Rectangle 17"/>
+          <p:cNvPr id="19" name="Rectangle 18"/>
           <p:cNvSpPr/>
           <p:nvPr/>
         </p:nvSpPr>
         <p:spPr>
           <a:xfrm>
-            <a:off x="3394710" y="3301876"/>
+            <a:off x="3394710" y="4168541"/>
             <a:ext cx="2644902" cy="45720"/>
           </a:xfrm>
           <a:prstGeom prst="rect">
@@ -7815,13 +7437,13 @@
       </p:sp>
       <p:sp>
         <p:nvSpPr>
-          <p:cNvPr id="19" name="TextBox 18"/>
+          <p:cNvPr id="20" name="TextBox 19"/>
           <p:cNvSpPr txBox="1"/>
           <p:nvPr/>
         </p:nvSpPr>
         <p:spPr>
           <a:xfrm>
-            <a:off x="3504438" y="3429892"/>
+            <a:off x="3504438" y="4296557"/>
             <a:ext cx="2425446" cy="201168"/>
           </a:xfrm>
           <a:prstGeom prst="rect">
@@ -7857,13 +7479,13 @@
       </p:sp>
       <p:sp>
         <p:nvSpPr>
-          <p:cNvPr id="20" name="TextBox 19"/>
+          <p:cNvPr id="21" name="TextBox 20"/>
           <p:cNvSpPr txBox="1"/>
           <p:nvPr/>
         </p:nvSpPr>
         <p:spPr>
           <a:xfrm>
-            <a:off x="3504438" y="3685924"/>
+            <a:off x="3504438" y="4552589"/>
             <a:ext cx="2425446" cy="475488"/>
           </a:xfrm>
           <a:prstGeom prst="rect">
@@ -7899,7 +7521,7 @@
       </p:sp>
       <p:sp>
         <p:nvSpPr>
-          <p:cNvPr id="21" name="TextBox 20"/>
+          <p:cNvPr id="22" name="TextBox 21"/>
           <p:cNvSpPr txBox="1"/>
           <p:nvPr/>
         </p:nvSpPr>
@@ -7941,14 +7563,14 @@
       </p:sp>
       <p:sp>
         <p:nvSpPr>
-          <p:cNvPr id="22" name="Rectangle 21"/>
+          <p:cNvPr id="23" name="Rectangle 22"/>
           <p:cNvSpPr/>
           <p:nvPr/>
         </p:nvSpPr>
         <p:spPr>
           <a:xfrm>
-            <a:off x="6149340" y="3301876"/>
-            <a:ext cx="2644902" cy="2916043"/>
+            <a:off x="6149340" y="4168541"/>
+            <a:ext cx="2644902" cy="2049378"/>
           </a:xfrm>
           <a:prstGeom prst="rect">
             <a:avLst/>
@@ -7990,13 +7612,13 @@
       </p:sp>
       <p:sp>
         <p:nvSpPr>
-          <p:cNvPr id="23" name="Rectangle 22"/>
+          <p:cNvPr id="24" name="Rectangle 23"/>
           <p:cNvSpPr/>
           <p:nvPr/>
         </p:nvSpPr>
         <p:spPr>
           <a:xfrm>
-            <a:off x="6149340" y="3301876"/>
+            <a:off x="6149340" y="4168541"/>
             <a:ext cx="2644902" cy="45720"/>
           </a:xfrm>
           <a:prstGeom prst="rect">
@@ -8039,13 +7661,13 @@
       </p:sp>
       <p:sp>
         <p:nvSpPr>
-          <p:cNvPr id="24" name="TextBox 23"/>
+          <p:cNvPr id="25" name="TextBox 24"/>
           <p:cNvSpPr txBox="1"/>
           <p:nvPr/>
         </p:nvSpPr>
         <p:spPr>
           <a:xfrm>
-            <a:off x="6259068" y="3429892"/>
+            <a:off x="6259068" y="4296557"/>
             <a:ext cx="2425446" cy="201168"/>
           </a:xfrm>
           <a:prstGeom prst="rect">
@@ -8081,13 +7703,13 @@
       </p:sp>
       <p:sp>
         <p:nvSpPr>
-          <p:cNvPr id="25" name="TextBox 24"/>
+          <p:cNvPr id="26" name="TextBox 25"/>
           <p:cNvSpPr txBox="1"/>
           <p:nvPr/>
         </p:nvSpPr>
         <p:spPr>
           <a:xfrm>
-            <a:off x="6259068" y="3685924"/>
+            <a:off x="6259068" y="4552589"/>
             <a:ext cx="2425446" cy="475488"/>
           </a:xfrm>
           <a:prstGeom prst="rect">
@@ -8123,7 +7745,7 @@
       </p:sp>
       <p:sp>
         <p:nvSpPr>
-          <p:cNvPr id="26" name="TextBox 25"/>
+          <p:cNvPr id="27" name="TextBox 26"/>
           <p:cNvSpPr txBox="1"/>
           <p:nvPr/>
         </p:nvSpPr>
@@ -8165,14 +7787,14 @@
       </p:sp>
       <p:sp>
         <p:nvSpPr>
-          <p:cNvPr id="27" name="Rectangle 26"/>
+          <p:cNvPr id="28" name="Rectangle 27"/>
           <p:cNvSpPr/>
           <p:nvPr/>
         </p:nvSpPr>
         <p:spPr>
           <a:xfrm>
-            <a:off x="8903970" y="3301876"/>
-            <a:ext cx="2644902" cy="2916043"/>
+            <a:off x="8903970" y="4168541"/>
+            <a:ext cx="2644902" cy="2049378"/>
           </a:xfrm>
           <a:prstGeom prst="rect">
             <a:avLst/>
@@ -8214,13 +7836,13 @@
       </p:sp>
       <p:sp>
         <p:nvSpPr>
-          <p:cNvPr id="28" name="Rectangle 27"/>
+          <p:cNvPr id="29" name="Rectangle 28"/>
           <p:cNvSpPr/>
           <p:nvPr/>
         </p:nvSpPr>
         <p:spPr>
           <a:xfrm>
-            <a:off x="8903970" y="3301876"/>
+            <a:off x="8903970" y="4168541"/>
             <a:ext cx="2644902" cy="45720"/>
           </a:xfrm>
           <a:prstGeom prst="rect">
@@ -8263,13 +7885,13 @@
       </p:sp>
       <p:sp>
         <p:nvSpPr>
-          <p:cNvPr id="29" name="TextBox 28"/>
+          <p:cNvPr id="30" name="TextBox 29"/>
           <p:cNvSpPr txBox="1"/>
           <p:nvPr/>
         </p:nvSpPr>
         <p:spPr>
           <a:xfrm>
-            <a:off x="9013698" y="3429892"/>
+            <a:off x="9013698" y="4296557"/>
             <a:ext cx="2425446" cy="201168"/>
           </a:xfrm>
           <a:prstGeom prst="rect">
@@ -8305,13 +7927,13 @@
       </p:sp>
       <p:sp>
         <p:nvSpPr>
-          <p:cNvPr id="30" name="TextBox 29"/>
+          <p:cNvPr id="31" name="TextBox 30"/>
           <p:cNvSpPr txBox="1"/>
           <p:nvPr/>
         </p:nvSpPr>
         <p:spPr>
           <a:xfrm>
-            <a:off x="9013698" y="3685924"/>
+            <a:off x="9013698" y="4552589"/>
             <a:ext cx="2425446" cy="475488"/>
           </a:xfrm>
           <a:prstGeom prst="rect">
@@ -8347,7 +7969,7 @@
       </p:sp>
       <p:sp>
         <p:nvSpPr>
-          <p:cNvPr id="31" name="TextBox 30"/>
+          <p:cNvPr id="32" name="TextBox 31"/>
           <p:cNvSpPr txBox="1"/>
           <p:nvPr/>
         </p:nvSpPr>
@@ -8389,7 +8011,7 @@
       </p:sp>
       <p:sp>
         <p:nvSpPr>
-          <p:cNvPr id="32" name="Rectangle 31"/>
+          <p:cNvPr id="33" name="Rectangle 32"/>
           <p:cNvSpPr/>
           <p:nvPr/>
         </p:nvSpPr>
@@ -8438,7 +8060,7 @@
       </p:sp>
       <p:sp>
         <p:nvSpPr>
-          <p:cNvPr id="33" name="TextBox 32"/>
+          <p:cNvPr id="34" name="TextBox 33"/>
           <p:cNvSpPr txBox="1"/>
           <p:nvPr/>
         </p:nvSpPr>
@@ -8480,7 +8102,7 @@
       </p:sp>
       <p:sp>
         <p:nvSpPr>
-          <p:cNvPr id="34" name="TextBox 33"/>
+          <p:cNvPr id="35" name="TextBox 34"/>
           <p:cNvSpPr txBox="1"/>
           <p:nvPr/>
         </p:nvSpPr>
@@ -8522,7 +8144,7 @@
       </p:sp>
       <p:sp>
         <p:nvSpPr>
-          <p:cNvPr id="35" name="TextBox 34"/>
+          <p:cNvPr id="36" name="TextBox 35"/>
           <p:cNvSpPr txBox="1"/>
           <p:nvPr/>
         </p:nvSpPr>
@@ -8637,48 +8259,6 @@
         </p:nvSpPr>
         <p:spPr>
           <a:xfrm>
-            <a:off x="5897880" y="310896"/>
-            <a:ext cx="4800600" cy="256032"/>
-          </a:xfrm>
-          <a:prstGeom prst="rect">
-            <a:avLst/>
-          </a:prstGeom>
-          <a:noFill/>
-        </p:spPr>
-        <p:txBody>
-          <a:bodyPr wrap="none" lIns="9144" rIns="9144" tIns="9144" bIns="9144" anchor="t">
-            <a:spAutoFit/>
-          </a:bodyPr>
-          <a:lstStyle/>
-          <a:p>
-            <a:pPr algn="r">
-              <a:spcAft>
-                <a:spcPts val="0"/>
-              </a:spcAft>
-              <a:defRPr sz="680" b="1">
-                <a:solidFill>
-                  <a:srgbClr val="4F6B00"/>
-                </a:solidFill>
-                <a:latin typeface="Inter"/>
-              </a:defRPr>
-            </a:pPr>
-            <a:r>
-              <a:rPr>
-                <a:latin typeface="Inter"/>
-              </a:rPr>
-              <a:t>Illustrative, Gradient Maintained — demo data, not the client's holdings or managers</a:t>
-            </a:r>
-          </a:p>
-        </p:txBody>
-      </p:sp>
-      <p:sp>
-        <p:nvSpPr>
-          <p:cNvPr id="4" name="TextBox 3"/>
-          <p:cNvSpPr txBox="1"/>
-          <p:nvPr/>
-        </p:nvSpPr>
-        <p:spPr>
-          <a:xfrm>
             <a:off x="640080" y="566928"/>
             <a:ext cx="10058400" cy="530352"/>
           </a:xfrm>
@@ -8715,7 +8295,7 @@
       </p:sp>
       <p:sp>
         <p:nvSpPr>
-          <p:cNvPr id="5" name="Rectangle 4"/>
+          <p:cNvPr id="4" name="Rectangle 3"/>
           <p:cNvSpPr/>
           <p:nvPr/>
         </p:nvSpPr>
@@ -8764,7 +8344,7 @@
       </p:sp>
       <p:sp>
         <p:nvSpPr>
-          <p:cNvPr id="6" name="Rectangle 5"/>
+          <p:cNvPr id="5" name="Rectangle 4"/>
           <p:cNvSpPr/>
           <p:nvPr/>
         </p:nvSpPr>
@@ -8813,7 +8393,7 @@
       </p:sp>
       <p:sp>
         <p:nvSpPr>
-          <p:cNvPr id="7" name="TextBox 6"/>
+          <p:cNvPr id="6" name="TextBox 5"/>
           <p:cNvSpPr txBox="1"/>
           <p:nvPr/>
         </p:nvSpPr>
@@ -8855,7 +8435,7 @@
       </p:sp>
       <p:sp>
         <p:nvSpPr>
-          <p:cNvPr id="8" name="TextBox 7"/>
+          <p:cNvPr id="7" name="TextBox 6"/>
           <p:cNvSpPr txBox="1"/>
           <p:nvPr/>
         </p:nvSpPr>
@@ -8897,7 +8477,7 @@
       </p:sp>
       <p:graphicFrame>
         <p:nvGraphicFramePr>
-          <p:cNvPr id="9" name="Table 8"/>
+          <p:cNvPr id="8" name="Table 7"/>
           <p:cNvGraphicFramePr>
             <a:graphicFrameLocks noGrp="1"/>
           </p:cNvGraphicFramePr>
@@ -9046,7 +8626,7 @@
                         <a:rPr>
                           <a:latin typeface="Inter"/>
                         </a:rPr>
-                        <a:t>● available</a:t>
+                        <a:t>● Available</a:t>
                       </a:r>
                     </a:p>
                   </a:txBody>
@@ -9129,7 +8709,7 @@
                         <a:rPr>
                           <a:latin typeface="Inter"/>
                         </a:rPr>
-                        <a:t>● available</a:t>
+                        <a:t>● Available</a:t>
                       </a:r>
                     </a:p>
                   </a:txBody>
@@ -9212,7 +8792,7 @@
                         <a:rPr>
                           <a:latin typeface="Inter"/>
                         </a:rPr>
-                        <a:t>● degraded</a:t>
+                        <a:t>● Incomplete</a:t>
                       </a:r>
                     </a:p>
                   </a:txBody>
@@ -9256,7 +8836,7 @@
       </p:graphicFrame>
       <p:sp>
         <p:nvSpPr>
-          <p:cNvPr id="10" name="TextBox 9"/>
+          <p:cNvPr id="9" name="TextBox 8"/>
           <p:cNvSpPr txBox="1"/>
           <p:nvPr/>
         </p:nvSpPr>
@@ -9298,7 +8878,7 @@
       </p:sp>
       <p:sp>
         <p:nvSpPr>
-          <p:cNvPr id="11" name="Rectangle 10"/>
+          <p:cNvPr id="10" name="Rectangle 9"/>
           <p:cNvSpPr/>
           <p:nvPr/>
         </p:nvSpPr>
@@ -9347,7 +8927,7 @@
       </p:sp>
       <p:sp>
         <p:nvSpPr>
-          <p:cNvPr id="12" name="Rectangle 11"/>
+          <p:cNvPr id="11" name="Rectangle 10"/>
           <p:cNvSpPr/>
           <p:nvPr/>
         </p:nvSpPr>
@@ -9396,7 +8976,7 @@
       </p:sp>
       <p:sp>
         <p:nvSpPr>
-          <p:cNvPr id="13" name="TextBox 12"/>
+          <p:cNvPr id="12" name="TextBox 11"/>
           <p:cNvSpPr txBox="1"/>
           <p:nvPr/>
         </p:nvSpPr>
@@ -9438,7 +9018,7 @@
       </p:sp>
       <p:sp>
         <p:nvSpPr>
-          <p:cNvPr id="14" name="TextBox 13"/>
+          <p:cNvPr id="13" name="TextBox 12"/>
           <p:cNvSpPr txBox="1"/>
           <p:nvPr/>
         </p:nvSpPr>
@@ -9480,7 +9060,7 @@
       </p:sp>
       <p:sp>
         <p:nvSpPr>
-          <p:cNvPr id="15" name="Rectangle 14"/>
+          <p:cNvPr id="14" name="Rectangle 13"/>
           <p:cNvSpPr/>
           <p:nvPr/>
         </p:nvSpPr>
@@ -9529,7 +9109,7 @@
       </p:sp>
       <p:sp>
         <p:nvSpPr>
-          <p:cNvPr id="16" name="TextBox 15"/>
+          <p:cNvPr id="15" name="TextBox 14"/>
           <p:cNvSpPr txBox="1"/>
           <p:nvPr/>
         </p:nvSpPr>
@@ -9571,7 +9151,7 @@
       </p:sp>
       <p:sp>
         <p:nvSpPr>
-          <p:cNvPr id="17" name="TextBox 16"/>
+          <p:cNvPr id="16" name="TextBox 15"/>
           <p:cNvSpPr txBox="1"/>
           <p:nvPr/>
         </p:nvSpPr>
@@ -9613,7 +9193,7 @@
       </p:sp>
       <p:sp>
         <p:nvSpPr>
-          <p:cNvPr id="18" name="TextBox 17"/>
+          <p:cNvPr id="17" name="TextBox 16"/>
           <p:cNvSpPr txBox="1"/>
           <p:nvPr/>
         </p:nvSpPr>
@@ -9728,48 +9308,6 @@
         </p:nvSpPr>
         <p:spPr>
           <a:xfrm>
-            <a:off x="5897880" y="310896"/>
-            <a:ext cx="4800600" cy="256032"/>
-          </a:xfrm>
-          <a:prstGeom prst="rect">
-            <a:avLst/>
-          </a:prstGeom>
-          <a:noFill/>
-        </p:spPr>
-        <p:txBody>
-          <a:bodyPr wrap="none" lIns="9144" rIns="9144" tIns="9144" bIns="9144" anchor="t">
-            <a:spAutoFit/>
-          </a:bodyPr>
-          <a:lstStyle/>
-          <a:p>
-            <a:pPr algn="r">
-              <a:spcAft>
-                <a:spcPts val="0"/>
-              </a:spcAft>
-              <a:defRPr sz="680" b="1">
-                <a:solidFill>
-                  <a:srgbClr val="4F6B00"/>
-                </a:solidFill>
-                <a:latin typeface="Inter"/>
-              </a:defRPr>
-            </a:pPr>
-            <a:r>
-              <a:rPr>
-                <a:latin typeface="Inter"/>
-              </a:rPr>
-              <a:t>Illustrative, Gradient Maintained — demo data, not the client's holdings or managers</a:t>
-            </a:r>
-          </a:p>
-        </p:txBody>
-      </p:sp>
-      <p:sp>
-        <p:nvSpPr>
-          <p:cNvPr id="4" name="TextBox 3"/>
-          <p:cNvSpPr txBox="1"/>
-          <p:nvPr/>
-        </p:nvSpPr>
-        <p:spPr>
-          <a:xfrm>
             <a:off x="640080" y="566928"/>
             <a:ext cx="10058400" cy="530352"/>
           </a:xfrm>
@@ -9806,7 +9344,7 @@
       </p:sp>
       <p:sp>
         <p:nvSpPr>
-          <p:cNvPr id="5" name="Rectangle 4"/>
+          <p:cNvPr id="4" name="Rectangle 3"/>
           <p:cNvSpPr/>
           <p:nvPr/>
         </p:nvSpPr>
@@ -9855,7 +9393,7 @@
       </p:sp>
       <p:sp>
         <p:nvSpPr>
-          <p:cNvPr id="6" name="Rectangle 5"/>
+          <p:cNvPr id="5" name="Rectangle 4"/>
           <p:cNvSpPr/>
           <p:nvPr/>
         </p:nvSpPr>
@@ -9904,7 +9442,7 @@
       </p:sp>
       <p:sp>
         <p:nvSpPr>
-          <p:cNvPr id="7" name="TextBox 6"/>
+          <p:cNvPr id="6" name="TextBox 5"/>
           <p:cNvSpPr txBox="1"/>
           <p:nvPr/>
         </p:nvSpPr>
@@ -9946,7 +9484,7 @@
       </p:sp>
       <p:sp>
         <p:nvSpPr>
-          <p:cNvPr id="8" name="Rectangle 7"/>
+          <p:cNvPr id="7" name="Rectangle 6"/>
           <p:cNvSpPr/>
           <p:nvPr/>
         </p:nvSpPr>
@@ -9995,7 +9533,7 @@
       </p:sp>
       <p:sp>
         <p:nvSpPr>
-          <p:cNvPr id="9" name="Rectangle 8"/>
+          <p:cNvPr id="8" name="Rectangle 7"/>
           <p:cNvSpPr/>
           <p:nvPr/>
         </p:nvSpPr>
@@ -10044,7 +9582,7 @@
       </p:sp>
       <p:sp>
         <p:nvSpPr>
-          <p:cNvPr id="10" name="TextBox 9"/>
+          <p:cNvPr id="9" name="TextBox 8"/>
           <p:cNvSpPr txBox="1"/>
           <p:nvPr/>
         </p:nvSpPr>
@@ -10086,7 +9624,7 @@
       </p:sp>
       <p:sp>
         <p:nvSpPr>
-          <p:cNvPr id="11" name="TextBox 10"/>
+          <p:cNvPr id="10" name="TextBox 9"/>
           <p:cNvSpPr txBox="1"/>
           <p:nvPr/>
         </p:nvSpPr>
@@ -10128,7 +9666,7 @@
       </p:sp>
       <p:sp>
         <p:nvSpPr>
-          <p:cNvPr id="12" name="Rectangle 11"/>
+          <p:cNvPr id="11" name="Rectangle 10"/>
           <p:cNvSpPr/>
           <p:nvPr/>
         </p:nvSpPr>
@@ -10177,7 +9715,7 @@
       </p:sp>
       <p:sp>
         <p:nvSpPr>
-          <p:cNvPr id="13" name="Rectangle 12"/>
+          <p:cNvPr id="12" name="Rectangle 11"/>
           <p:cNvSpPr/>
           <p:nvPr/>
         </p:nvSpPr>
@@ -10226,7 +9764,7 @@
       </p:sp>
       <p:sp>
         <p:nvSpPr>
-          <p:cNvPr id="14" name="TextBox 13"/>
+          <p:cNvPr id="13" name="TextBox 12"/>
           <p:cNvSpPr txBox="1"/>
           <p:nvPr/>
         </p:nvSpPr>
@@ -10268,7 +9806,7 @@
       </p:sp>
       <p:sp>
         <p:nvSpPr>
-          <p:cNvPr id="15" name="TextBox 14"/>
+          <p:cNvPr id="14" name="TextBox 13"/>
           <p:cNvSpPr txBox="1"/>
           <p:nvPr/>
         </p:nvSpPr>
@@ -10310,7 +9848,7 @@
       </p:sp>
       <p:sp>
         <p:nvSpPr>
-          <p:cNvPr id="16" name="Rectangle 15"/>
+          <p:cNvPr id="15" name="Rectangle 14"/>
           <p:cNvSpPr/>
           <p:nvPr/>
         </p:nvSpPr>
@@ -10359,7 +9897,7 @@
       </p:sp>
       <p:sp>
         <p:nvSpPr>
-          <p:cNvPr id="17" name="Rectangle 16"/>
+          <p:cNvPr id="16" name="Rectangle 15"/>
           <p:cNvSpPr/>
           <p:nvPr/>
         </p:nvSpPr>
@@ -10408,7 +9946,7 @@
       </p:sp>
       <p:sp>
         <p:nvSpPr>
-          <p:cNvPr id="18" name="TextBox 17"/>
+          <p:cNvPr id="17" name="TextBox 16"/>
           <p:cNvSpPr txBox="1"/>
           <p:nvPr/>
         </p:nvSpPr>
@@ -10450,7 +9988,7 @@
       </p:sp>
       <p:sp>
         <p:nvSpPr>
-          <p:cNvPr id="19" name="TextBox 18"/>
+          <p:cNvPr id="18" name="TextBox 17"/>
           <p:cNvSpPr txBox="1"/>
           <p:nvPr/>
         </p:nvSpPr>
@@ -10492,7 +10030,7 @@
       </p:sp>
       <p:sp>
         <p:nvSpPr>
-          <p:cNvPr id="20" name="Rectangle 19"/>
+          <p:cNvPr id="19" name="Rectangle 18"/>
           <p:cNvSpPr/>
           <p:nvPr/>
         </p:nvSpPr>
@@ -10541,7 +10079,7 @@
       </p:sp>
       <p:sp>
         <p:nvSpPr>
-          <p:cNvPr id="21" name="TextBox 20"/>
+          <p:cNvPr id="20" name="TextBox 19"/>
           <p:cNvSpPr txBox="1"/>
           <p:nvPr/>
         </p:nvSpPr>
@@ -10583,7 +10121,7 @@
       </p:sp>
       <p:sp>
         <p:nvSpPr>
-          <p:cNvPr id="22" name="TextBox 21"/>
+          <p:cNvPr id="21" name="TextBox 20"/>
           <p:cNvSpPr txBox="1"/>
           <p:nvPr/>
         </p:nvSpPr>
@@ -10625,7 +10163,7 @@
       </p:sp>
       <p:sp>
         <p:nvSpPr>
-          <p:cNvPr id="23" name="TextBox 22"/>
+          <p:cNvPr id="22" name="TextBox 21"/>
           <p:cNvSpPr txBox="1"/>
           <p:nvPr/>
         </p:nvSpPr>
@@ -10740,48 +10278,6 @@
         </p:nvSpPr>
         <p:spPr>
           <a:xfrm>
-            <a:off x="5897880" y="310896"/>
-            <a:ext cx="4800600" cy="256032"/>
-          </a:xfrm>
-          <a:prstGeom prst="rect">
-            <a:avLst/>
-          </a:prstGeom>
-          <a:noFill/>
-        </p:spPr>
-        <p:txBody>
-          <a:bodyPr wrap="none" lIns="9144" rIns="9144" tIns="9144" bIns="9144" anchor="t">
-            <a:spAutoFit/>
-          </a:bodyPr>
-          <a:lstStyle/>
-          <a:p>
-            <a:pPr algn="r">
-              <a:spcAft>
-                <a:spcPts val="0"/>
-              </a:spcAft>
-              <a:defRPr sz="680" b="1">
-                <a:solidFill>
-                  <a:srgbClr val="4F6B00"/>
-                </a:solidFill>
-                <a:latin typeface="Inter"/>
-              </a:defRPr>
-            </a:pPr>
-            <a:r>
-              <a:rPr>
-                <a:latin typeface="Inter"/>
-              </a:rPr>
-              <a:t>Illustrative, Gradient Maintained — demo data, not the client's holdings or managers</a:t>
-            </a:r>
-          </a:p>
-        </p:txBody>
-      </p:sp>
-      <p:sp>
-        <p:nvSpPr>
-          <p:cNvPr id="4" name="TextBox 3"/>
-          <p:cNvSpPr txBox="1"/>
-          <p:nvPr/>
-        </p:nvSpPr>
-        <p:spPr>
-          <a:xfrm>
             <a:off x="640080" y="566928"/>
             <a:ext cx="10058400" cy="530352"/>
           </a:xfrm>
@@ -10818,7 +10314,7 @@
       </p:sp>
       <p:sp>
         <p:nvSpPr>
-          <p:cNvPr id="5" name="Rectangle 4"/>
+          <p:cNvPr id="4" name="Rectangle 3"/>
           <p:cNvSpPr/>
           <p:nvPr/>
         </p:nvSpPr>
@@ -10867,7 +10363,7 @@
       </p:sp>
       <p:sp>
         <p:nvSpPr>
-          <p:cNvPr id="6" name="Rectangle 5"/>
+          <p:cNvPr id="5" name="Rectangle 4"/>
           <p:cNvSpPr/>
           <p:nvPr/>
         </p:nvSpPr>
@@ -10916,7 +10412,7 @@
       </p:sp>
       <p:sp>
         <p:nvSpPr>
-          <p:cNvPr id="7" name="TextBox 6"/>
+          <p:cNvPr id="6" name="TextBox 5"/>
           <p:cNvSpPr txBox="1"/>
           <p:nvPr/>
         </p:nvSpPr>
@@ -10958,7 +10454,7 @@
       </p:sp>
       <p:sp>
         <p:nvSpPr>
-          <p:cNvPr id="8" name="TextBox 7"/>
+          <p:cNvPr id="7" name="TextBox 6"/>
           <p:cNvSpPr txBox="1"/>
           <p:nvPr/>
         </p:nvSpPr>
@@ -11000,7 +10496,7 @@
       </p:sp>
       <p:graphicFrame>
         <p:nvGraphicFramePr>
-          <p:cNvPr id="9" name="Chart 8"/>
+          <p:cNvPr id="8" name="Chart 7"/>
           <p:cNvGraphicFramePr>
             <a:graphicFrameLocks noGrp="1"/>
           </p:cNvGraphicFramePr>
@@ -11018,7 +10514,7 @@
       </p:graphicFrame>
       <p:sp>
         <p:nvSpPr>
-          <p:cNvPr id="10" name="Rectangle 9"/>
+          <p:cNvPr id="9" name="Rectangle 8"/>
           <p:cNvSpPr/>
           <p:nvPr/>
         </p:nvSpPr>
@@ -11067,7 +10563,7 @@
       </p:sp>
       <p:sp>
         <p:nvSpPr>
-          <p:cNvPr id="11" name="TextBox 10"/>
+          <p:cNvPr id="10" name="TextBox 9"/>
           <p:cNvSpPr txBox="1"/>
           <p:nvPr/>
         </p:nvSpPr>
@@ -11109,7 +10605,7 @@
       </p:sp>
       <p:sp>
         <p:nvSpPr>
-          <p:cNvPr id="12" name="TextBox 11"/>
+          <p:cNvPr id="11" name="TextBox 10"/>
           <p:cNvSpPr txBox="1"/>
           <p:nvPr/>
         </p:nvSpPr>
@@ -11151,7 +10647,7 @@
       </p:sp>
       <p:sp>
         <p:nvSpPr>
-          <p:cNvPr id="13" name="TextBox 12"/>
+          <p:cNvPr id="12" name="TextBox 11"/>
           <p:cNvSpPr txBox="1"/>
           <p:nvPr/>
         </p:nvSpPr>
@@ -11266,48 +10762,6 @@
         </p:nvSpPr>
         <p:spPr>
           <a:xfrm>
-            <a:off x="5897880" y="310896"/>
-            <a:ext cx="4800600" cy="256032"/>
-          </a:xfrm>
-          <a:prstGeom prst="rect">
-            <a:avLst/>
-          </a:prstGeom>
-          <a:noFill/>
-        </p:spPr>
-        <p:txBody>
-          <a:bodyPr wrap="none" lIns="9144" rIns="9144" tIns="9144" bIns="9144" anchor="t">
-            <a:spAutoFit/>
-          </a:bodyPr>
-          <a:lstStyle/>
-          <a:p>
-            <a:pPr algn="r">
-              <a:spcAft>
-                <a:spcPts val="0"/>
-              </a:spcAft>
-              <a:defRPr sz="680" b="1">
-                <a:solidFill>
-                  <a:srgbClr val="4F6B00"/>
-                </a:solidFill>
-                <a:latin typeface="Inter"/>
-              </a:defRPr>
-            </a:pPr>
-            <a:r>
-              <a:rPr>
-                <a:latin typeface="Inter"/>
-              </a:rPr>
-              <a:t>Illustrative, Gradient Maintained — demo data, not the client's holdings or managers</a:t>
-            </a:r>
-          </a:p>
-        </p:txBody>
-      </p:sp>
-      <p:sp>
-        <p:nvSpPr>
-          <p:cNvPr id="4" name="TextBox 3"/>
-          <p:cNvSpPr txBox="1"/>
-          <p:nvPr/>
-        </p:nvSpPr>
-        <p:spPr>
-          <a:xfrm>
             <a:off x="640080" y="566928"/>
             <a:ext cx="10058400" cy="530352"/>
           </a:xfrm>
@@ -11344,7 +10798,7 @@
       </p:sp>
       <p:sp>
         <p:nvSpPr>
-          <p:cNvPr id="5" name="Rectangle 4"/>
+          <p:cNvPr id="4" name="Rectangle 3"/>
           <p:cNvSpPr/>
           <p:nvPr/>
         </p:nvSpPr>
@@ -11393,7 +10847,7 @@
       </p:sp>
       <p:sp>
         <p:nvSpPr>
-          <p:cNvPr id="6" name="Rectangle 5"/>
+          <p:cNvPr id="5" name="Rectangle 4"/>
           <p:cNvSpPr/>
           <p:nvPr/>
         </p:nvSpPr>
@@ -11442,7 +10896,7 @@
       </p:sp>
       <p:sp>
         <p:nvSpPr>
-          <p:cNvPr id="7" name="TextBox 6"/>
+          <p:cNvPr id="6" name="TextBox 5"/>
           <p:cNvSpPr txBox="1"/>
           <p:nvPr/>
         </p:nvSpPr>
@@ -11484,7 +10938,7 @@
       </p:sp>
       <p:sp>
         <p:nvSpPr>
-          <p:cNvPr id="8" name="TextBox 7"/>
+          <p:cNvPr id="7" name="TextBox 6"/>
           <p:cNvSpPr txBox="1"/>
           <p:nvPr/>
         </p:nvSpPr>
@@ -11526,7 +10980,7 @@
       </p:sp>
       <p:graphicFrame>
         <p:nvGraphicFramePr>
-          <p:cNvPr id="9" name="Chart 8"/>
+          <p:cNvPr id="8" name="Chart 7"/>
           <p:cNvGraphicFramePr>
             <a:graphicFrameLocks noGrp="1"/>
           </p:cNvGraphicFramePr>
@@ -11544,7 +10998,7 @@
       </p:graphicFrame>
       <p:sp>
         <p:nvSpPr>
-          <p:cNvPr id="10" name="Rectangle 9"/>
+          <p:cNvPr id="9" name="Rectangle 8"/>
           <p:cNvSpPr/>
           <p:nvPr/>
         </p:nvSpPr>
@@ -11593,7 +11047,7 @@
       </p:sp>
       <p:sp>
         <p:nvSpPr>
-          <p:cNvPr id="11" name="TextBox 10"/>
+          <p:cNvPr id="10" name="TextBox 9"/>
           <p:cNvSpPr txBox="1"/>
           <p:nvPr/>
         </p:nvSpPr>
@@ -11635,7 +11089,7 @@
       </p:sp>
       <p:sp>
         <p:nvSpPr>
-          <p:cNvPr id="12" name="TextBox 11"/>
+          <p:cNvPr id="11" name="TextBox 10"/>
           <p:cNvSpPr txBox="1"/>
           <p:nvPr/>
         </p:nvSpPr>
@@ -11677,7 +11131,7 @@
       </p:sp>
       <p:sp>
         <p:nvSpPr>
-          <p:cNvPr id="13" name="TextBox 12"/>
+          <p:cNvPr id="12" name="TextBox 11"/>
           <p:cNvSpPr txBox="1"/>
           <p:nvPr/>
         </p:nvSpPr>
@@ -11792,48 +11246,6 @@
         </p:nvSpPr>
         <p:spPr>
           <a:xfrm>
-            <a:off x="5897880" y="310896"/>
-            <a:ext cx="4800600" cy="256032"/>
-          </a:xfrm>
-          <a:prstGeom prst="rect">
-            <a:avLst/>
-          </a:prstGeom>
-          <a:noFill/>
-        </p:spPr>
-        <p:txBody>
-          <a:bodyPr wrap="none" lIns="9144" rIns="9144" tIns="9144" bIns="9144" anchor="t">
-            <a:spAutoFit/>
-          </a:bodyPr>
-          <a:lstStyle/>
-          <a:p>
-            <a:pPr algn="r">
-              <a:spcAft>
-                <a:spcPts val="0"/>
-              </a:spcAft>
-              <a:defRPr sz="680" b="1">
-                <a:solidFill>
-                  <a:srgbClr val="4F6B00"/>
-                </a:solidFill>
-                <a:latin typeface="Inter"/>
-              </a:defRPr>
-            </a:pPr>
-            <a:r>
-              <a:rPr>
-                <a:latin typeface="Inter"/>
-              </a:rPr>
-              <a:t>Illustrative, Gradient Maintained — demo data, not the client's holdings or managers</a:t>
-            </a:r>
-          </a:p>
-        </p:txBody>
-      </p:sp>
-      <p:sp>
-        <p:nvSpPr>
-          <p:cNvPr id="4" name="TextBox 3"/>
-          <p:cNvSpPr txBox="1"/>
-          <p:nvPr/>
-        </p:nvSpPr>
-        <p:spPr>
-          <a:xfrm>
             <a:off x="640080" y="566928"/>
             <a:ext cx="10058400" cy="530352"/>
           </a:xfrm>
@@ -11870,7 +11282,7 @@
       </p:sp>
       <p:sp>
         <p:nvSpPr>
-          <p:cNvPr id="5" name="Rectangle 4"/>
+          <p:cNvPr id="4" name="Rectangle 3"/>
           <p:cNvSpPr/>
           <p:nvPr/>
         </p:nvSpPr>
@@ -11919,7 +11331,7 @@
       </p:sp>
       <p:sp>
         <p:nvSpPr>
-          <p:cNvPr id="6" name="Rectangle 5"/>
+          <p:cNvPr id="5" name="Rectangle 4"/>
           <p:cNvSpPr/>
           <p:nvPr/>
         </p:nvSpPr>
@@ -11968,7 +11380,7 @@
       </p:sp>
       <p:sp>
         <p:nvSpPr>
-          <p:cNvPr id="7" name="TextBox 6"/>
+          <p:cNvPr id="6" name="TextBox 5"/>
           <p:cNvSpPr txBox="1"/>
           <p:nvPr/>
         </p:nvSpPr>
@@ -12010,7 +11422,7 @@
       </p:sp>
       <p:sp>
         <p:nvSpPr>
-          <p:cNvPr id="8" name="TextBox 7"/>
+          <p:cNvPr id="7" name="TextBox 6"/>
           <p:cNvSpPr txBox="1"/>
           <p:nvPr/>
         </p:nvSpPr>
@@ -12052,7 +11464,7 @@
       </p:sp>
       <p:graphicFrame>
         <p:nvGraphicFramePr>
-          <p:cNvPr id="9" name="Table 8"/>
+          <p:cNvPr id="8" name="Table 7"/>
           <p:cNvGraphicFramePr>
             <a:graphicFrameLocks noGrp="1"/>
           </p:cNvGraphicFramePr>
@@ -12174,7 +11586,7 @@
                         <a:rPr>
                           <a:latin typeface="Inter"/>
                         </a:rPr>
-                        <a:t>● MEDIUM</a:t>
+                        <a:t>● Medium</a:t>
                       </a:r>
                     </a:p>
                   </a:txBody>
@@ -12257,7 +11669,7 @@
                         <a:rPr>
                           <a:latin typeface="Inter"/>
                         </a:rPr>
-                        <a:t>● MEDIUM</a:t>
+                        <a:t>● Medium</a:t>
                       </a:r>
                     </a:p>
                   </a:txBody>
@@ -12340,7 +11752,7 @@
                         <a:rPr>
                           <a:latin typeface="Inter"/>
                         </a:rPr>
-                        <a:t>● LOW</a:t>
+                        <a:t>● Low</a:t>
                       </a:r>
                     </a:p>
                   </a:txBody>
@@ -12411,7 +11823,7 @@
       </p:graphicFrame>
       <p:sp>
         <p:nvSpPr>
-          <p:cNvPr id="10" name="TextBox 9"/>
+          <p:cNvPr id="9" name="TextBox 8"/>
           <p:cNvSpPr txBox="1"/>
           <p:nvPr/>
         </p:nvSpPr>
@@ -12461,7 +11873,7 @@
       </p:sp>
       <p:sp>
         <p:nvSpPr>
-          <p:cNvPr id="11" name="Rectangle 10"/>
+          <p:cNvPr id="10" name="Rectangle 9"/>
           <p:cNvSpPr/>
           <p:nvPr/>
         </p:nvSpPr>
@@ -12510,7 +11922,7 @@
       </p:sp>
       <p:sp>
         <p:nvSpPr>
-          <p:cNvPr id="12" name="Rectangle 11"/>
+          <p:cNvPr id="11" name="Rectangle 10"/>
           <p:cNvSpPr/>
           <p:nvPr/>
         </p:nvSpPr>
@@ -12559,7 +11971,7 @@
       </p:sp>
       <p:sp>
         <p:nvSpPr>
-          <p:cNvPr id="13" name="TextBox 12"/>
+          <p:cNvPr id="12" name="TextBox 11"/>
           <p:cNvSpPr txBox="1"/>
           <p:nvPr/>
         </p:nvSpPr>
@@ -12601,7 +12013,7 @@
       </p:sp>
       <p:sp>
         <p:nvSpPr>
-          <p:cNvPr id="14" name="TextBox 13"/>
+          <p:cNvPr id="13" name="TextBox 12"/>
           <p:cNvSpPr txBox="1"/>
           <p:nvPr/>
         </p:nvSpPr>
@@ -12643,7 +12055,7 @@
       </p:sp>
       <p:sp>
         <p:nvSpPr>
-          <p:cNvPr id="15" name="Rectangle 14"/>
+          <p:cNvPr id="14" name="Rectangle 13"/>
           <p:cNvSpPr/>
           <p:nvPr/>
         </p:nvSpPr>
@@ -12692,7 +12104,7 @@
       </p:sp>
       <p:sp>
         <p:nvSpPr>
-          <p:cNvPr id="16" name="TextBox 15"/>
+          <p:cNvPr id="15" name="TextBox 14"/>
           <p:cNvSpPr txBox="1"/>
           <p:nvPr/>
         </p:nvSpPr>
@@ -12734,7 +12146,7 @@
       </p:sp>
       <p:sp>
         <p:nvSpPr>
-          <p:cNvPr id="17" name="TextBox 16"/>
+          <p:cNvPr id="16" name="TextBox 15"/>
           <p:cNvSpPr txBox="1"/>
           <p:nvPr/>
         </p:nvSpPr>
@@ -12776,7 +12188,7 @@
       </p:sp>
       <p:sp>
         <p:nvSpPr>
-          <p:cNvPr id="18" name="TextBox 17"/>
+          <p:cNvPr id="17" name="TextBox 16"/>
           <p:cNvSpPr txBox="1"/>
           <p:nvPr/>
         </p:nvSpPr>
@@ -12891,48 +12303,6 @@
         </p:nvSpPr>
         <p:spPr>
           <a:xfrm>
-            <a:off x="5897880" y="310896"/>
-            <a:ext cx="4800600" cy="256032"/>
-          </a:xfrm>
-          <a:prstGeom prst="rect">
-            <a:avLst/>
-          </a:prstGeom>
-          <a:noFill/>
-        </p:spPr>
-        <p:txBody>
-          <a:bodyPr wrap="none" lIns="9144" rIns="9144" tIns="9144" bIns="9144" anchor="t">
-            <a:spAutoFit/>
-          </a:bodyPr>
-          <a:lstStyle/>
-          <a:p>
-            <a:pPr algn="r">
-              <a:spcAft>
-                <a:spcPts val="0"/>
-              </a:spcAft>
-              <a:defRPr sz="680" b="1">
-                <a:solidFill>
-                  <a:srgbClr val="4F6B00"/>
-                </a:solidFill>
-                <a:latin typeface="Inter"/>
-              </a:defRPr>
-            </a:pPr>
-            <a:r>
-              <a:rPr>
-                <a:latin typeface="Inter"/>
-              </a:rPr>
-              <a:t>Illustrative, Gradient Maintained — demo data, not the client's holdings or managers</a:t>
-            </a:r>
-          </a:p>
-        </p:txBody>
-      </p:sp>
-      <p:sp>
-        <p:nvSpPr>
-          <p:cNvPr id="4" name="TextBox 3"/>
-          <p:cNvSpPr txBox="1"/>
-          <p:nvPr/>
-        </p:nvSpPr>
-        <p:spPr>
-          <a:xfrm>
             <a:off x="640080" y="566928"/>
             <a:ext cx="10058400" cy="530352"/>
           </a:xfrm>
@@ -12969,7 +12339,7 @@
       </p:sp>
       <p:sp>
         <p:nvSpPr>
-          <p:cNvPr id="5" name="Rectangle 4"/>
+          <p:cNvPr id="4" name="Rectangle 3"/>
           <p:cNvSpPr/>
           <p:nvPr/>
         </p:nvSpPr>
@@ -13018,7 +12388,7 @@
       </p:sp>
       <p:sp>
         <p:nvSpPr>
-          <p:cNvPr id="6" name="Rectangle 5"/>
+          <p:cNvPr id="5" name="Rectangle 4"/>
           <p:cNvSpPr/>
           <p:nvPr/>
         </p:nvSpPr>
@@ -13067,7 +12437,7 @@
       </p:sp>
       <p:sp>
         <p:nvSpPr>
-          <p:cNvPr id="7" name="TextBox 6"/>
+          <p:cNvPr id="6" name="TextBox 5"/>
           <p:cNvSpPr txBox="1"/>
           <p:nvPr/>
         </p:nvSpPr>
@@ -13109,7 +12479,7 @@
       </p:sp>
       <p:sp>
         <p:nvSpPr>
-          <p:cNvPr id="8" name="Rectangle 7"/>
+          <p:cNvPr id="7" name="Rectangle 6"/>
           <p:cNvSpPr/>
           <p:nvPr/>
         </p:nvSpPr>
@@ -13158,7 +12528,7 @@
       </p:sp>
       <p:sp>
         <p:nvSpPr>
-          <p:cNvPr id="9" name="Rectangle 8"/>
+          <p:cNvPr id="8" name="Rectangle 7"/>
           <p:cNvSpPr/>
           <p:nvPr/>
         </p:nvSpPr>
@@ -13207,7 +12577,7 @@
       </p:sp>
       <p:sp>
         <p:nvSpPr>
-          <p:cNvPr id="10" name="TextBox 9"/>
+          <p:cNvPr id="9" name="TextBox 8"/>
           <p:cNvSpPr txBox="1"/>
           <p:nvPr/>
         </p:nvSpPr>
@@ -13249,7 +12619,7 @@
       </p:sp>
       <p:sp>
         <p:nvSpPr>
-          <p:cNvPr id="11" name="TextBox 10"/>
+          <p:cNvPr id="10" name="TextBox 9"/>
           <p:cNvSpPr txBox="1"/>
           <p:nvPr/>
         </p:nvSpPr>
@@ -13291,7 +12661,7 @@
       </p:sp>
       <p:sp>
         <p:nvSpPr>
-          <p:cNvPr id="12" name="Rectangle 11"/>
+          <p:cNvPr id="11" name="Rectangle 10"/>
           <p:cNvSpPr/>
           <p:nvPr/>
         </p:nvSpPr>
@@ -13340,7 +12710,7 @@
       </p:sp>
       <p:sp>
         <p:nvSpPr>
-          <p:cNvPr id="13" name="TextBox 12"/>
+          <p:cNvPr id="12" name="TextBox 11"/>
           <p:cNvSpPr txBox="1"/>
           <p:nvPr/>
         </p:nvSpPr>
@@ -13382,7 +12752,7 @@
       </p:sp>
       <p:sp>
         <p:nvSpPr>
-          <p:cNvPr id="14" name="TextBox 13"/>
+          <p:cNvPr id="13" name="TextBox 12"/>
           <p:cNvSpPr txBox="1"/>
           <p:nvPr/>
         </p:nvSpPr>
@@ -13424,7 +12794,7 @@
       </p:sp>
       <p:sp>
         <p:nvSpPr>
-          <p:cNvPr id="15" name="TextBox 14"/>
+          <p:cNvPr id="14" name="TextBox 13"/>
           <p:cNvSpPr txBox="1"/>
           <p:nvPr/>
         </p:nvSpPr>
@@ -13539,48 +12909,6 @@
         </p:nvSpPr>
         <p:spPr>
           <a:xfrm>
-            <a:off x="5897880" y="310896"/>
-            <a:ext cx="4800600" cy="256032"/>
-          </a:xfrm>
-          <a:prstGeom prst="rect">
-            <a:avLst/>
-          </a:prstGeom>
-          <a:noFill/>
-        </p:spPr>
-        <p:txBody>
-          <a:bodyPr wrap="none" lIns="9144" rIns="9144" tIns="9144" bIns="9144" anchor="t">
-            <a:spAutoFit/>
-          </a:bodyPr>
-          <a:lstStyle/>
-          <a:p>
-            <a:pPr algn="r">
-              <a:spcAft>
-                <a:spcPts val="0"/>
-              </a:spcAft>
-              <a:defRPr sz="680" b="1">
-                <a:solidFill>
-                  <a:srgbClr val="4F6B00"/>
-                </a:solidFill>
-                <a:latin typeface="Inter"/>
-              </a:defRPr>
-            </a:pPr>
-            <a:r>
-              <a:rPr>
-                <a:latin typeface="Inter"/>
-              </a:rPr>
-              <a:t>Illustrative, Gradient Maintained — demo data, not the client's holdings or managers</a:t>
-            </a:r>
-          </a:p>
-        </p:txBody>
-      </p:sp>
-      <p:sp>
-        <p:nvSpPr>
-          <p:cNvPr id="4" name="TextBox 3"/>
-          <p:cNvSpPr txBox="1"/>
-          <p:nvPr/>
-        </p:nvSpPr>
-        <p:spPr>
-          <a:xfrm>
             <a:off x="640080" y="566928"/>
             <a:ext cx="10058400" cy="530352"/>
           </a:xfrm>
@@ -13617,7 +12945,7 @@
       </p:sp>
       <p:sp>
         <p:nvSpPr>
-          <p:cNvPr id="5" name="Rectangle 4"/>
+          <p:cNvPr id="4" name="Rectangle 3"/>
           <p:cNvSpPr/>
           <p:nvPr/>
         </p:nvSpPr>
@@ -13666,7 +12994,7 @@
       </p:sp>
       <p:sp>
         <p:nvSpPr>
-          <p:cNvPr id="6" name="Rectangle 5"/>
+          <p:cNvPr id="5" name="Rectangle 4"/>
           <p:cNvSpPr/>
           <p:nvPr/>
         </p:nvSpPr>
@@ -13715,7 +13043,7 @@
       </p:sp>
       <p:sp>
         <p:nvSpPr>
-          <p:cNvPr id="7" name="TextBox 6"/>
+          <p:cNvPr id="6" name="TextBox 5"/>
           <p:cNvSpPr txBox="1"/>
           <p:nvPr/>
         </p:nvSpPr>
@@ -13757,7 +13085,7 @@
       </p:sp>
       <p:sp>
         <p:nvSpPr>
-          <p:cNvPr id="8" name="TextBox 7"/>
+          <p:cNvPr id="7" name="TextBox 6"/>
           <p:cNvSpPr txBox="1"/>
           <p:nvPr/>
         </p:nvSpPr>
@@ -13799,7 +13127,7 @@
       </p:sp>
       <p:graphicFrame>
         <p:nvGraphicFramePr>
-          <p:cNvPr id="9" name="Table 8"/>
+          <p:cNvPr id="8" name="Table 7"/>
           <p:cNvGraphicFramePr>
             <a:graphicFrameLocks noGrp="1"/>
           </p:cNvGraphicFramePr>
@@ -14481,7 +13809,7 @@
       </p:graphicFrame>
       <p:sp>
         <p:nvSpPr>
-          <p:cNvPr id="10" name="Rectangle 9"/>
+          <p:cNvPr id="9" name="Rectangle 8"/>
           <p:cNvSpPr/>
           <p:nvPr/>
         </p:nvSpPr>
@@ -14530,7 +13858,7 @@
       </p:sp>
       <p:sp>
         <p:nvSpPr>
-          <p:cNvPr id="11" name="TextBox 10"/>
+          <p:cNvPr id="10" name="TextBox 9"/>
           <p:cNvSpPr txBox="1"/>
           <p:nvPr/>
         </p:nvSpPr>
@@ -14572,7 +13900,7 @@
       </p:sp>
       <p:sp>
         <p:nvSpPr>
-          <p:cNvPr id="12" name="TextBox 11"/>
+          <p:cNvPr id="11" name="TextBox 10"/>
           <p:cNvSpPr txBox="1"/>
           <p:nvPr/>
         </p:nvSpPr>
@@ -14614,7 +13942,7 @@
       </p:sp>
       <p:sp>
         <p:nvSpPr>
-          <p:cNvPr id="13" name="TextBox 12"/>
+          <p:cNvPr id="12" name="TextBox 11"/>
           <p:cNvSpPr txBox="1"/>
           <p:nvPr/>
         </p:nvSpPr>

--- a/plugins/gradient-cio/assets/examples/internal-gips-review-asset-owner.pptx
+++ b/plugins/gradient-cio/assets/examples/internal-gips-review-asset-owner.pptx
@@ -16,9 +16,6 @@
     <ns0:sldId id="264" ns1:id="rId15"/>
     <ns0:sldId id="265" ns1:id="rId16"/>
     <ns0:sldId id="266" ns1:id="rId17"/>
-    <ns0:sldId id="267" ns1:id="rId18"/>
-    <ns0:sldId id="268" ns1:id="rId19"/>
-    <ns0:sldId id="269" ns1:id="rId20"/>
   </ns0:sldIdLst>
   <ns0:sldSz cx="12191695" cy="6858000" type="screen16x9"/>
   <ns0:notesSz cx="6858000" cy="9144000"/>
@@ -1092,71 +1089,7 @@
               <a:t>Observation: One benchmark change lacks an effective date [S1, S2]. Why it matters: Period comparability requires dated benchmark lineage. Uncertainty: Approval records supporting the change were not supplied. What would change the view: Follow-up request 1 producing dated approval records.</a:t>
             </a:r>
           </a:p>
-        </p:txBody>
-      </p:sp>
-      <p:sp>
-        <p:nvSpPr>
-          <p:cNvPr id="4" name="Slide Number Placeholder 3"/>
-          <p:cNvSpPr>
-            <a:spLocks noGrp="1"/>
-          </p:cNvSpPr>
-          <p:nvPr>
-            <p:ph type="sldNum" idx="5" sz="quarter"/>
-          </p:nvPr>
-        </p:nvSpPr>
-        <p:spPr/>
-      </p:sp>
-    </p:spTree>
-  </p:cSld>
-  <p:clrMapOvr>
-    <a:masterClrMapping/>
-  </p:clrMapOvr>
-</p:notes>
-</file>
-
-<file path=ppt/notesSlides/notesSlide2.xml><?xml version="1.0" encoding="utf-8"?>
-<p:notes xmlns:a="http://schemas.openxmlformats.org/drawingml/2006/main" xmlns:p="http://schemas.openxmlformats.org/presentationml/2006/main" xmlns:r="http://schemas.openxmlformats.org/officeDocument/2006/relationships">
-  <p:cSld>
-    <p:spTree>
-      <p:nvGrpSpPr>
-        <p:cNvPr id="1" name=""/>
-        <p:cNvGrpSpPr/>
-        <p:nvPr/>
-      </p:nvGrpSpPr>
-      <p:grpSpPr>
-        <a:xfrm>
-          <a:off x="0" y="0"/>
-          <a:ext cx="0" cy="0"/>
-          <a:chOff x="0" y="0"/>
-          <a:chExt cx="0" cy="0"/>
-        </a:xfrm>
-      </p:grpSpPr>
-      <p:sp>
-        <p:nvSpPr>
-          <p:cNvPr id="2" name="Slide Image Placeholder 1"/>
-          <p:cNvSpPr>
-            <a:spLocks noGrp="1"/>
-          </p:cNvSpPr>
-          <p:nvPr>
-            <p:ph type="sldImg" idx="2"/>
-          </p:nvPr>
-        </p:nvSpPr>
-        <p:spPr/>
-      </p:sp>
-      <p:sp>
-        <p:nvSpPr>
-          <p:cNvPr id="3" name="Notes Placeholder 2"/>
-          <p:cNvSpPr>
-            <a:spLocks noGrp="1"/>
-          </p:cNvSpPr>
-          <p:nvPr>
-            <p:ph type="body" idx="3" sz="quarter"/>
-          </p:nvPr>
-        </p:nvSpPr>
-        <p:spPr/>
-        <p:txBody>
-          <a:bodyPr/>
-          <a:lstStyle/>
+          <a:p/>
           <a:p>
             <a:r>
               <a:t>Analysis — oversight controls are not evidenced</a:t>
@@ -4426,7 +4359,7 @@
               <a:rPr>
                 <a:latin typeface="Inter"/>
               </a:rPr>
-              <a:t>Oversight summary — continued</a:t>
+              <a:t>Appendix — Sources and methods</a:t>
             </a:r>
           </a:p>
         </p:txBody>
@@ -4495,11 +4428,11 @@
             <a:avLst/>
           </a:prstGeom>
           <a:solidFill>
-            <a:srgbClr val="C6F432"/>
+            <a:srgbClr val="9AA5B1"/>
           </a:solidFill>
           <a:ln>
             <a:solidFill>
-              <a:srgbClr val="C6F432"/>
+              <a:srgbClr val="9AA5B1"/>
             </a:solidFill>
           </a:ln>
         </p:spPr>
@@ -4566,7 +4499,7 @@
               <a:rPr>
                 <a:latin typeface="Inter"/>
               </a:rPr>
-              <a:t>03</a:t>
+              <a:t>A</a:t>
             </a:r>
           </a:p>
         </p:txBody>
@@ -4608,7 +4541,7 @@
               <a:rPr>
                 <a:latin typeface="Inter"/>
               </a:rPr>
-              <a:t>The board report presents total-fund returns net of external manager fees and identifies the approved policy</a:t>
+              <a:t>Illustrative, Gradient Maintained — demo data, not the client's holdings or managers. All organizations,</a:t>
             </a:r>
             <a:br/>
             <a:br/>
@@ -4616,7 +4549,7 @@
               <a:rPr>
                 <a:latin typeface="Inter"/>
               </a:rPr>
-              <a:t>benchmark [S1][S2]. Oversight evidence is incomplete for the benchmark change because its effective date and</a:t>
+              <a:t>portfolios, managers and results in this public example are illustrative.</a:t>
             </a:r>
             <a:br/>
             <a:br/>
@@ -4624,7 +4557,7 @@
               <a:rPr>
                 <a:latin typeface="Inter"/>
               </a:rPr>
-              <a:t>rationale are absent. The custodian package also does not include the valuation or error-correction policies</a:t>
+              <a:t> ·  Tag  ·  Source  ·  Detail  ·  As of  ·  Validation  · </a:t>
             </a:r>
             <a:br/>
             <a:br/>
@@ -4632,7 +4565,23 @@
               <a:rPr>
                 <a:latin typeface="Inter"/>
               </a:rPr>
-              <a:t>needed to understand the reporting control framework [S3].</a:t>
+              <a:t> ·  S1  ·  Board performance report  ·  Total-fund pages 2–6  ·  2026-06-30  ·  Illustrative document  · </a:t>
+            </a:r>
+            <a:br/>
+            <a:br/>
+            <a:r>
+              <a:rPr>
+                <a:latin typeface="Inter"/>
+              </a:rPr>
+              <a:t> ·  S2  ·  Investment policy  ·  Benchmark section  ·  2026-01-01  ·  Illustrative document  · </a:t>
+            </a:r>
+            <a:br/>
+            <a:br/>
+            <a:r>
+              <a:rPr>
+                <a:latin typeface="Inter"/>
+              </a:rPr>
+              <a:t> ·  S3  ·  Custodian package  ·  Performance schedules  ·  2026-06-30  ·  Illustrative document  ·</a:t>
             </a:r>
           </a:p>
         </p:txBody>
@@ -4958,7 +4907,7 @@
               <a:rPr>
                 <a:latin typeface="Inter"/>
               </a:rPr>
-              <a:t>Follow-up requests</a:t>
+              <a:t>Appendix — Method &amp; disclaimer</a:t>
             </a:r>
           </a:p>
         </p:txBody>
@@ -5027,11 +4976,11 @@
             <a:avLst/>
           </a:prstGeom>
           <a:solidFill>
-            <a:srgbClr val="C6F432"/>
+            <a:srgbClr val="9AA5B1"/>
           </a:solidFill>
           <a:ln>
             <a:solidFill>
-              <a:srgbClr val="C6F432"/>
+              <a:srgbClr val="9AA5B1"/>
             </a:solidFill>
           </a:ln>
         </p:spPr>
@@ -5098,7 +5047,7 @@
               <a:rPr>
                 <a:latin typeface="Inter"/>
               </a:rPr>
-              <a:t>04</a:t>
+              <a:t>C</a:t>
             </a:r>
           </a:p>
         </p:txBody>
@@ -5112,7 +5061,7 @@
         <p:spPr>
           <a:xfrm>
             <a:off x="640080" y="1325880"/>
-            <a:ext cx="10908792" cy="2977665"/>
+            <a:ext cx="10908792" cy="4892040"/>
           </a:xfrm>
           <a:prstGeom prst="rect">
             <a:avLst/>
@@ -5127,11 +5076,11 @@
           <a:p>
             <a:pPr algn="l">
               <a:spcAft>
-                <a:spcPts val="500"/>
+                <a:spcPts val="0"/>
               </a:spcAft>
-              <a:defRPr sz="1000" b="0">
-                <a:solidFill>
-                  <a:srgbClr val="0D1117"/>
+              <a:defRPr sz="1100" b="0">
+                <a:solidFill>
+                  <a:srgbClr val="4A5563"/>
                 </a:solidFill>
                 <a:latin typeface="Inter"/>
               </a:defRPr>
@@ -5140,108 +5089,14 @@
               <a:rPr>
                 <a:latin typeface="Inter"/>
               </a:rPr>
-              <a:t>01  Provide the benchmark-change effective date, approval record and rationale.</a:t>
-            </a:r>
-            <a:br/>
-            <a:r>
-              <a:rPr>
-                <a:latin typeface="Inter"/>
-              </a:rPr>
-              <a:t>      Closes the 22.C.9 lineage gap [S1][S2].</a:t>
-            </a:r>
-          </a:p>
-          <a:p>
-            <a:pPr algn="l">
-              <a:spcAft>
-                <a:spcPts val="500"/>
-              </a:spcAft>
-              <a:defRPr sz="1000" b="0">
-                <a:solidFill>
-                  <a:srgbClr val="0D1117"/>
-                </a:solidFill>
-                <a:latin typeface="Inter"/>
-              </a:defRPr>
-            </a:pPr>
-            <a:r>
-              <a:rPr>
-                <a:latin typeface="Inter"/>
-              </a:rPr>
-              <a:t>02  Provide the current valuation and error-correction policies.</a:t>
-            </a:r>
-            <a:br/>
-            <a:r>
-              <a:rPr>
-                <a:latin typeface="Inter"/>
-              </a:rPr>
-              <a:t>      Closes the control-evidence gaps [S3].</a:t>
-            </a:r>
-          </a:p>
-        </p:txBody>
-      </p:sp>
-      <p:sp>
-        <p:nvSpPr>
-          <p:cNvPr id="9" name="TextBox 8"/>
-          <p:cNvSpPr txBox="1"/>
-          <p:nvPr/>
-        </p:nvSpPr>
-        <p:spPr>
-          <a:xfrm>
-            <a:off x="640080" y="4413273"/>
-            <a:ext cx="10908792" cy="1804646"/>
-          </a:xfrm>
-          <a:prstGeom prst="rect">
-            <a:avLst/>
-          </a:prstGeom>
-          <a:noFill/>
-        </p:spPr>
-        <p:txBody>
-          <a:bodyPr wrap="none" lIns="9144" rIns="9144" tIns="9144" bIns="9144" anchor="t">
-            <a:spAutoFit/>
-          </a:bodyPr>
-          <a:lstStyle/>
-          <a:p>
-            <a:pPr algn="l">
-              <a:spcAft>
-                <a:spcPts val="500"/>
-              </a:spcAft>
-              <a:defRPr sz="1050" b="0">
-                <a:solidFill>
-                  <a:srgbClr val="0D1117"/>
-                </a:solidFill>
-                <a:latin typeface="Inter"/>
-              </a:defRPr>
-            </a:pPr>
-            <a:r>
-              <a:rPr>
-                <a:latin typeface="Inter"/>
-              </a:rPr>
-              <a:t>•  Provide the benchmark-change effective date, approval record and rationale (22.C.9) [S1][S2].</a:t>
-            </a:r>
-          </a:p>
-          <a:p>
-            <a:pPr algn="l">
-              <a:spcAft>
-                <a:spcPts val="500"/>
-              </a:spcAft>
-              <a:defRPr sz="1050" b="0">
-                <a:solidFill>
-                  <a:srgbClr val="0D1117"/>
-                </a:solidFill>
-                <a:latin typeface="Inter"/>
-              </a:defRPr>
-            </a:pPr>
-            <a:r>
-              <a:rPr>
-                <a:latin typeface="Inter"/>
-              </a:rPr>
-              <a:t>•  Provide the current valuation and error-correction policies (21.A.6; 22.C.20) [S3].</a:t>
-            </a:r>
-          </a:p>
-        </p:txBody>
-      </p:sp>
-      <p:sp>
-        <p:nvSpPr>
-          <p:cNvPr id="10" name="Rectangle 9"/>
+              <a:t>This illustrative asset-owner review is not verification, certification, legal advice or an assessment of any real organization.</a:t>
+            </a:r>
+          </a:p>
+        </p:txBody>
+      </p:sp>
+      <p:sp>
+        <p:nvSpPr>
+          <p:cNvPr id="9" name="Rectangle 8"/>
           <p:cNvSpPr/>
           <p:nvPr/>
         </p:nvSpPr>
@@ -5290,7 +5145,7 @@
       </p:sp>
       <p:sp>
         <p:nvSpPr>
-          <p:cNvPr id="11" name="TextBox 10"/>
+          <p:cNvPr id="10" name="TextBox 9"/>
           <p:cNvSpPr txBox="1"/>
           <p:nvPr/>
         </p:nvSpPr>
@@ -5325,14 +5180,14 @@
               <a:rPr>
                 <a:latin typeface="Inter"/>
               </a:rPr>
-              <a:t>Sources: S1 · S2 · S3</a:t>
-            </a:r>
-          </a:p>
-        </p:txBody>
-      </p:sp>
-      <p:sp>
-        <p:nvSpPr>
-          <p:cNvPr id="12" name="TextBox 11"/>
+              <a:t>Sources: none cited</a:t>
+            </a:r>
+          </a:p>
+        </p:txBody>
+      </p:sp>
+      <p:sp>
+        <p:nvSpPr>
+          <p:cNvPr id="11" name="TextBox 10"/>
           <p:cNvSpPr txBox="1"/>
           <p:nvPr/>
         </p:nvSpPr>
@@ -5374,7 +5229,7 @@
       </p:sp>
       <p:sp>
         <p:nvSpPr>
-          <p:cNvPr id="13" name="TextBox 12"/>
+          <p:cNvPr id="12" name="TextBox 11"/>
           <p:cNvSpPr txBox="1"/>
           <p:nvPr/>
         </p:nvSpPr>
@@ -5410,1610 +5265,6 @@
                 <a:latin typeface="Inter"/>
               </a:rPr>
               <a:t>11</a:t>
-            </a:r>
-          </a:p>
-        </p:txBody>
-      </p:sp>
-    </p:spTree>
-  </p:cSld>
-  <p:clrMapOvr>
-    <a:masterClrMapping/>
-  </p:clrMapOvr>
-</p:sld>
-</file>
-
-<file path=ppt/slides/slide12.xml><?xml version="1.0" encoding="utf-8"?>
-<p:sld xmlns:a="http://schemas.openxmlformats.org/drawingml/2006/main" xmlns:p="http://schemas.openxmlformats.org/presentationml/2006/main" xmlns:r="http://schemas.openxmlformats.org/officeDocument/2006/relationships">
-  <p:cSld>
-    <p:spTree>
-      <p:nvGrpSpPr>
-        <p:cNvPr id="1" name=""/>
-        <p:cNvGrpSpPr/>
-        <p:nvPr/>
-      </p:nvGrpSpPr>
-      <p:grpSpPr/>
-      <p:sp>
-        <p:nvSpPr>
-          <p:cNvPr id="2" name="Rectangle 1"/>
-          <p:cNvSpPr/>
-          <p:nvPr/>
-        </p:nvSpPr>
-        <p:spPr>
-          <a:xfrm>
-            <a:off x="0" y="0"/>
-            <a:ext cx="12191695" cy="6858000"/>
-          </a:xfrm>
-          <a:prstGeom prst="rect">
-            <a:avLst/>
-          </a:prstGeom>
-          <a:solidFill>
-            <a:srgbClr val="FFFFFF"/>
-          </a:solidFill>
-          <a:ln>
-            <a:solidFill>
-              <a:srgbClr val="FFFFFF"/>
-            </a:solidFill>
-          </a:ln>
-        </p:spPr>
-        <p:style>
-          <a:lnRef idx="1">
-            <a:schemeClr val="accent1"/>
-          </a:lnRef>
-          <a:fillRef idx="3">
-            <a:schemeClr val="accent1"/>
-          </a:fillRef>
-          <a:effectRef idx="2">
-            <a:schemeClr val="accent1"/>
-          </a:effectRef>
-          <a:fontRef idx="minor">
-            <a:schemeClr val="lt1"/>
-          </a:fontRef>
-        </p:style>
-        <p:txBody>
-          <a:bodyPr rtlCol="0" anchor="ctr"/>
-          <a:lstStyle/>
-          <a:p>
-            <a:pPr algn="ctr">
-              <a:defRPr>
-                <a:latin typeface="Inter"/>
-              </a:defRPr>
-            </a:pPr>
-          </a:p>
-        </p:txBody>
-      </p:sp>
-      <p:sp>
-        <p:nvSpPr>
-          <p:cNvPr id="3" name="TextBox 2"/>
-          <p:cNvSpPr txBox="1"/>
-          <p:nvPr/>
-        </p:nvSpPr>
-        <p:spPr>
-          <a:xfrm>
-            <a:off x="5897880" y="310896"/>
-            <a:ext cx="4800600" cy="256032"/>
-          </a:xfrm>
-          <a:prstGeom prst="rect">
-            <a:avLst/>
-          </a:prstGeom>
-          <a:noFill/>
-        </p:spPr>
-        <p:txBody>
-          <a:bodyPr wrap="none" lIns="9144" rIns="9144" tIns="9144" bIns="9144" anchor="t">
-            <a:spAutoFit/>
-          </a:bodyPr>
-          <a:lstStyle/>
-          <a:p>
-            <a:pPr algn="r">
-              <a:spcAft>
-                <a:spcPts val="0"/>
-              </a:spcAft>
-              <a:defRPr sz="680" b="1">
-                <a:solidFill>
-                  <a:srgbClr val="4F6B00"/>
-                </a:solidFill>
-                <a:latin typeface="Inter"/>
-              </a:defRPr>
-            </a:pPr>
-            <a:r>
-              <a:rPr>
-                <a:latin typeface="Inter"/>
-              </a:rPr>
-              <a:t>Illustrative, Gradient Maintained — demo data, not the client's holdings or managers</a:t>
-            </a:r>
-          </a:p>
-        </p:txBody>
-      </p:sp>
-      <p:sp>
-        <p:nvSpPr>
-          <p:cNvPr id="4" name="TextBox 3"/>
-          <p:cNvSpPr txBox="1"/>
-          <p:nvPr/>
-        </p:nvSpPr>
-        <p:spPr>
-          <a:xfrm>
-            <a:off x="640080" y="566928"/>
-            <a:ext cx="10058400" cy="530352"/>
-          </a:xfrm>
-          <a:prstGeom prst="rect">
-            <a:avLst/>
-          </a:prstGeom>
-          <a:noFill/>
-        </p:spPr>
-        <p:txBody>
-          <a:bodyPr wrap="none" lIns="9144" rIns="9144" tIns="9144" bIns="9144" anchor="t">
-            <a:spAutoFit/>
-          </a:bodyPr>
-          <a:lstStyle/>
-          <a:p>
-            <a:pPr algn="l">
-              <a:spcAft>
-                <a:spcPts val="0"/>
-              </a:spcAft>
-              <a:defRPr sz="2300" b="1">
-                <a:solidFill>
-                  <a:srgbClr val="0D1117"/>
-                </a:solidFill>
-                <a:latin typeface="Inter"/>
-              </a:defRPr>
-            </a:pPr>
-            <a:r>
-              <a:rPr>
-                <a:latin typeface="Inter"/>
-              </a:rPr>
-              <a:t>Appendix — Findings checklist</a:t>
-            </a:r>
-          </a:p>
-        </p:txBody>
-      </p:sp>
-      <p:sp>
-        <p:nvSpPr>
-          <p:cNvPr id="5" name="Rectangle 4"/>
-          <p:cNvSpPr/>
-          <p:nvPr/>
-        </p:nvSpPr>
-        <p:spPr>
-          <a:xfrm>
-            <a:off x="640080" y="1115568"/>
-            <a:ext cx="10908792" cy="18288"/>
-          </a:xfrm>
-          <a:prstGeom prst="rect">
-            <a:avLst/>
-          </a:prstGeom>
-          <a:solidFill>
-            <a:srgbClr val="0D1117"/>
-          </a:solidFill>
-          <a:ln>
-            <a:solidFill>
-              <a:srgbClr val="0D1117"/>
-            </a:solidFill>
-          </a:ln>
-        </p:spPr>
-        <p:style>
-          <a:lnRef idx="1">
-            <a:schemeClr val="accent1"/>
-          </a:lnRef>
-          <a:fillRef idx="3">
-            <a:schemeClr val="accent1"/>
-          </a:fillRef>
-          <a:effectRef idx="2">
-            <a:schemeClr val="accent1"/>
-          </a:effectRef>
-          <a:fontRef idx="minor">
-            <a:schemeClr val="lt1"/>
-          </a:fontRef>
-        </p:style>
-        <p:txBody>
-          <a:bodyPr rtlCol="0" anchor="ctr"/>
-          <a:lstStyle/>
-          <a:p>
-            <a:pPr algn="ctr">
-              <a:defRPr>
-                <a:latin typeface="Inter"/>
-              </a:defRPr>
-            </a:pPr>
-          </a:p>
-        </p:txBody>
-      </p:sp>
-      <p:sp>
-        <p:nvSpPr>
-          <p:cNvPr id="6" name="Rectangle 5"/>
-          <p:cNvSpPr/>
-          <p:nvPr/>
-        </p:nvSpPr>
-        <p:spPr>
-          <a:xfrm>
-            <a:off x="11018520" y="502920"/>
-            <a:ext cx="530352" cy="393192"/>
-          </a:xfrm>
-          <a:prstGeom prst="rect">
-            <a:avLst/>
-          </a:prstGeom>
-          <a:solidFill>
-            <a:srgbClr val="9AA5B1"/>
-          </a:solidFill>
-          <a:ln>
-            <a:solidFill>
-              <a:srgbClr val="9AA5B1"/>
-            </a:solidFill>
-          </a:ln>
-        </p:spPr>
-        <p:style>
-          <a:lnRef idx="1">
-            <a:schemeClr val="accent1"/>
-          </a:lnRef>
-          <a:fillRef idx="3">
-            <a:schemeClr val="accent1"/>
-          </a:fillRef>
-          <a:effectRef idx="2">
-            <a:schemeClr val="accent1"/>
-          </a:effectRef>
-          <a:fontRef idx="minor">
-            <a:schemeClr val="lt1"/>
-          </a:fontRef>
-        </p:style>
-        <p:txBody>
-          <a:bodyPr rtlCol="0" anchor="ctr"/>
-          <a:lstStyle/>
-          <a:p>
-            <a:pPr algn="ctr">
-              <a:defRPr>
-                <a:latin typeface="Inter"/>
-              </a:defRPr>
-            </a:pPr>
-          </a:p>
-        </p:txBody>
-      </p:sp>
-      <p:sp>
-        <p:nvSpPr>
-          <p:cNvPr id="7" name="TextBox 6"/>
-          <p:cNvSpPr txBox="1"/>
-          <p:nvPr/>
-        </p:nvSpPr>
-        <p:spPr>
-          <a:xfrm>
-            <a:off x="11045952" y="557784"/>
-            <a:ext cx="475488" cy="182880"/>
-          </a:xfrm>
-          <a:prstGeom prst="rect">
-            <a:avLst/>
-          </a:prstGeom>
-          <a:noFill/>
-        </p:spPr>
-        <p:txBody>
-          <a:bodyPr wrap="none" lIns="9144" rIns="9144" tIns="9144" bIns="9144" anchor="t">
-            <a:spAutoFit/>
-          </a:bodyPr>
-          <a:lstStyle/>
-          <a:p>
-            <a:pPr algn="ctr">
-              <a:spcAft>
-                <a:spcPts val="0"/>
-              </a:spcAft>
-              <a:defRPr sz="1000" b="1">
-                <a:solidFill>
-                  <a:srgbClr val="0D1117"/>
-                </a:solidFill>
-                <a:latin typeface="Inter"/>
-              </a:defRPr>
-            </a:pPr>
-            <a:r>
-              <a:rPr>
-                <a:latin typeface="Inter"/>
-              </a:rPr>
-              <a:t>B</a:t>
-            </a:r>
-          </a:p>
-        </p:txBody>
-      </p:sp>
-      <p:sp>
-        <p:nvSpPr>
-          <p:cNvPr id="8" name="TextBox 7"/>
-          <p:cNvSpPr txBox="1"/>
-          <p:nvPr/>
-        </p:nvSpPr>
-        <p:spPr>
-          <a:xfrm>
-            <a:off x="640080" y="1325880"/>
-            <a:ext cx="10908792" cy="4892040"/>
-          </a:xfrm>
-          <a:prstGeom prst="rect">
-            <a:avLst/>
-          </a:prstGeom>
-          <a:noFill/>
-        </p:spPr>
-        <p:txBody>
-          <a:bodyPr wrap="none" lIns="9144" rIns="9144" tIns="9144" bIns="9144" anchor="t">
-            <a:spAutoFit/>
-          </a:bodyPr>
-          <a:lstStyle/>
-          <a:p>
-            <a:pPr algn="l">
-              <a:spcAft>
-                <a:spcPts val="0"/>
-              </a:spcAft>
-              <a:defRPr sz="1100" b="0">
-                <a:solidFill>
-                  <a:srgbClr val="4A5563"/>
-                </a:solidFill>
-                <a:latin typeface="Inter"/>
-              </a:defRPr>
-            </a:pPr>
-            <a:r>
-              <a:rPr>
-                <a:latin typeface="Inter"/>
-              </a:rPr>
-              <a:t>·  Area  ·  Requirement  ·  Provision  ·  Status  ·  Evidence  ·  Finding / follow-up  · </a:t>
-            </a:r>
-            <a:br/>
-            <a:br/>
-            <a:r>
-              <a:rPr>
-                <a:latin typeface="Inter"/>
-              </a:rPr>
-              <a:t> ·  Returns  ·  Total-fund return basis  ·  Asset Owner 22.A.1  ·  Met  ·  Board report [S1]  ·  —  · </a:t>
-            </a:r>
-            <a:br/>
-            <a:br/>
-            <a:r>
-              <a:rPr>
-                <a:latin typeface="Inter"/>
-              </a:rPr>
-              <a:t> ·  Benchmark  ·  Policy benchmark identified  ·  Asset Owner 22.C.8  ·  Met  ·  Policy [S2]  ·  —  · </a:t>
-            </a:r>
-            <a:br/>
-            <a:br/>
-            <a:r>
-              <a:rPr>
-                <a:latin typeface="Inter"/>
-              </a:rPr>
-              <a:t> ·  Benchmark  ·  Change disclosure  ·  Asset Owner 22.C.9  ·  Partially met  ·  Board report [S1]  ·  Effective date absent  · </a:t>
-            </a:r>
-            <a:br/>
-            <a:br/>
-            <a:r>
-              <a:rPr>
-                <a:latin typeface="Inter"/>
-              </a:rPr>
-              <a:t> ·  Valuation  ·  Valuation policy availability  ·  Asset Owner 21.A.6  ·  Not met  ·  Custodian package [S3]  ·  Policy not supplied  · </a:t>
-            </a:r>
-            <a:br/>
-            <a:br/>
-            <a:r>
-              <a:rPr>
-                <a:latin typeface="Inter"/>
-              </a:rPr>
-              <a:t> ·  Oversight  ·  Error-correction policy  ·  Asset Owner 22.C.20  ·  Not found  ·  —  ·  Request  ·</a:t>
-            </a:r>
-          </a:p>
-        </p:txBody>
-      </p:sp>
-      <p:sp>
-        <p:nvSpPr>
-          <p:cNvPr id="9" name="Rectangle 8"/>
-          <p:cNvSpPr/>
-          <p:nvPr/>
-        </p:nvSpPr>
-        <p:spPr>
-          <a:xfrm>
-            <a:off x="640080" y="6446520"/>
-            <a:ext cx="10908792" cy="9144"/>
-          </a:xfrm>
-          <a:prstGeom prst="rect">
-            <a:avLst/>
-          </a:prstGeom>
-          <a:solidFill>
-            <a:srgbClr val="E3E7EC"/>
-          </a:solidFill>
-          <a:ln>
-            <a:solidFill>
-              <a:srgbClr val="E3E7EC"/>
-            </a:solidFill>
-          </a:ln>
-        </p:spPr>
-        <p:style>
-          <a:lnRef idx="1">
-            <a:schemeClr val="accent1"/>
-          </a:lnRef>
-          <a:fillRef idx="3">
-            <a:schemeClr val="accent1"/>
-          </a:fillRef>
-          <a:effectRef idx="2">
-            <a:schemeClr val="accent1"/>
-          </a:effectRef>
-          <a:fontRef idx="minor">
-            <a:schemeClr val="lt1"/>
-          </a:fontRef>
-        </p:style>
-        <p:txBody>
-          <a:bodyPr rtlCol="0" anchor="ctr"/>
-          <a:lstStyle/>
-          <a:p>
-            <a:pPr algn="ctr">
-              <a:defRPr>
-                <a:latin typeface="Inter"/>
-              </a:defRPr>
-            </a:pPr>
-          </a:p>
-        </p:txBody>
-      </p:sp>
-      <p:sp>
-        <p:nvSpPr>
-          <p:cNvPr id="10" name="TextBox 9"/>
-          <p:cNvSpPr txBox="1"/>
-          <p:nvPr/>
-        </p:nvSpPr>
-        <p:spPr>
-          <a:xfrm>
-            <a:off x="640080" y="6501384"/>
-            <a:ext cx="4297680" cy="146304"/>
-          </a:xfrm>
-          <a:prstGeom prst="rect">
-            <a:avLst/>
-          </a:prstGeom>
-          <a:noFill/>
-        </p:spPr>
-        <p:txBody>
-          <a:bodyPr wrap="none" lIns="9144" rIns="9144" tIns="9144" bIns="9144" anchor="t">
-            <a:spAutoFit/>
-          </a:bodyPr>
-          <a:lstStyle/>
-          <a:p>
-            <a:pPr algn="l">
-              <a:spcAft>
-                <a:spcPts val="0"/>
-              </a:spcAft>
-              <a:defRPr sz="650" b="0">
-                <a:solidFill>
-                  <a:srgbClr val="8A94A1"/>
-                </a:solidFill>
-                <a:latin typeface="Inter"/>
-              </a:defRPr>
-            </a:pPr>
-            <a:r>
-              <a:rPr>
-                <a:latin typeface="Inter"/>
-              </a:rPr>
-              <a:t>Sources: S1 · S2 · S3</a:t>
-            </a:r>
-          </a:p>
-        </p:txBody>
-      </p:sp>
-      <p:sp>
-        <p:nvSpPr>
-          <p:cNvPr id="11" name="TextBox 10"/>
-          <p:cNvSpPr txBox="1"/>
-          <p:nvPr/>
-        </p:nvSpPr>
-        <p:spPr>
-          <a:xfrm>
-            <a:off x="4480560" y="6501384"/>
-            <a:ext cx="5303520" cy="146304"/>
-          </a:xfrm>
-          <a:prstGeom prst="rect">
-            <a:avLst/>
-          </a:prstGeom>
-          <a:noFill/>
-        </p:spPr>
-        <p:txBody>
-          <a:bodyPr wrap="none" lIns="9144" rIns="9144" tIns="9144" bIns="9144" anchor="t">
-            <a:spAutoFit/>
-          </a:bodyPr>
-          <a:lstStyle/>
-          <a:p>
-            <a:pPr algn="ctr">
-              <a:spcAft>
-                <a:spcPts val="0"/>
-              </a:spcAft>
-              <a:defRPr sz="650" b="0">
-                <a:solidFill>
-                  <a:srgbClr val="8A94A1"/>
-                </a:solidFill>
-                <a:latin typeface="Inter"/>
-              </a:defRPr>
-            </a:pPr>
-            <a:r>
-              <a:rPr>
-                <a:latin typeface="Inter"/>
-              </a:rPr>
-              <a:t>Confidential — performance standards review · Data as of 2026-06-30</a:t>
-            </a:r>
-          </a:p>
-        </p:txBody>
-      </p:sp>
-      <p:sp>
-        <p:nvSpPr>
-          <p:cNvPr id="12" name="TextBox 11"/>
-          <p:cNvSpPr txBox="1"/>
-          <p:nvPr/>
-        </p:nvSpPr>
-        <p:spPr>
-          <a:xfrm>
-            <a:off x="10287000" y="6501384"/>
-            <a:ext cx="1261872" cy="146304"/>
-          </a:xfrm>
-          <a:prstGeom prst="rect">
-            <a:avLst/>
-          </a:prstGeom>
-          <a:noFill/>
-        </p:spPr>
-        <p:txBody>
-          <a:bodyPr wrap="none" lIns="9144" rIns="9144" tIns="9144" bIns="9144" anchor="t">
-            <a:spAutoFit/>
-          </a:bodyPr>
-          <a:lstStyle/>
-          <a:p>
-            <a:pPr algn="r">
-              <a:spcAft>
-                <a:spcPts val="0"/>
-              </a:spcAft>
-              <a:defRPr sz="650" b="0">
-                <a:solidFill>
-                  <a:srgbClr val="8A94A1"/>
-                </a:solidFill>
-                <a:latin typeface="Inter"/>
-              </a:defRPr>
-            </a:pPr>
-            <a:r>
-              <a:rPr>
-                <a:latin typeface="Inter"/>
-              </a:rPr>
-              <a:t>12</a:t>
-            </a:r>
-          </a:p>
-        </p:txBody>
-      </p:sp>
-    </p:spTree>
-  </p:cSld>
-  <p:clrMapOvr>
-    <a:masterClrMapping/>
-  </p:clrMapOvr>
-</p:sld>
-</file>
-
-<file path=ppt/slides/slide13.xml><?xml version="1.0" encoding="utf-8"?>
-<p:sld xmlns:a="http://schemas.openxmlformats.org/drawingml/2006/main" xmlns:p="http://schemas.openxmlformats.org/presentationml/2006/main" xmlns:r="http://schemas.openxmlformats.org/officeDocument/2006/relationships">
-  <p:cSld>
-    <p:spTree>
-      <p:nvGrpSpPr>
-        <p:cNvPr id="1" name=""/>
-        <p:cNvGrpSpPr/>
-        <p:nvPr/>
-      </p:nvGrpSpPr>
-      <p:grpSpPr/>
-      <p:sp>
-        <p:nvSpPr>
-          <p:cNvPr id="2" name="Rectangle 1"/>
-          <p:cNvSpPr/>
-          <p:nvPr/>
-        </p:nvSpPr>
-        <p:spPr>
-          <a:xfrm>
-            <a:off x="0" y="0"/>
-            <a:ext cx="12191695" cy="6858000"/>
-          </a:xfrm>
-          <a:prstGeom prst="rect">
-            <a:avLst/>
-          </a:prstGeom>
-          <a:solidFill>
-            <a:srgbClr val="FFFFFF"/>
-          </a:solidFill>
-          <a:ln>
-            <a:solidFill>
-              <a:srgbClr val="FFFFFF"/>
-            </a:solidFill>
-          </a:ln>
-        </p:spPr>
-        <p:style>
-          <a:lnRef idx="1">
-            <a:schemeClr val="accent1"/>
-          </a:lnRef>
-          <a:fillRef idx="3">
-            <a:schemeClr val="accent1"/>
-          </a:fillRef>
-          <a:effectRef idx="2">
-            <a:schemeClr val="accent1"/>
-          </a:effectRef>
-          <a:fontRef idx="minor">
-            <a:schemeClr val="lt1"/>
-          </a:fontRef>
-        </p:style>
-        <p:txBody>
-          <a:bodyPr rtlCol="0" anchor="ctr"/>
-          <a:lstStyle/>
-          <a:p>
-            <a:pPr algn="ctr">
-              <a:defRPr>
-                <a:latin typeface="Inter"/>
-              </a:defRPr>
-            </a:pPr>
-          </a:p>
-        </p:txBody>
-      </p:sp>
-      <p:sp>
-        <p:nvSpPr>
-          <p:cNvPr id="3" name="TextBox 2"/>
-          <p:cNvSpPr txBox="1"/>
-          <p:nvPr/>
-        </p:nvSpPr>
-        <p:spPr>
-          <a:xfrm>
-            <a:off x="5897880" y="310896"/>
-            <a:ext cx="4800600" cy="256032"/>
-          </a:xfrm>
-          <a:prstGeom prst="rect">
-            <a:avLst/>
-          </a:prstGeom>
-          <a:noFill/>
-        </p:spPr>
-        <p:txBody>
-          <a:bodyPr wrap="none" lIns="9144" rIns="9144" tIns="9144" bIns="9144" anchor="t">
-            <a:spAutoFit/>
-          </a:bodyPr>
-          <a:lstStyle/>
-          <a:p>
-            <a:pPr algn="r">
-              <a:spcAft>
-                <a:spcPts val="0"/>
-              </a:spcAft>
-              <a:defRPr sz="680" b="1">
-                <a:solidFill>
-                  <a:srgbClr val="4F6B00"/>
-                </a:solidFill>
-                <a:latin typeface="Inter"/>
-              </a:defRPr>
-            </a:pPr>
-            <a:r>
-              <a:rPr>
-                <a:latin typeface="Inter"/>
-              </a:rPr>
-              <a:t>Illustrative, Gradient Maintained — demo data, not the client's holdings or managers</a:t>
-            </a:r>
-          </a:p>
-        </p:txBody>
-      </p:sp>
-      <p:sp>
-        <p:nvSpPr>
-          <p:cNvPr id="4" name="TextBox 3"/>
-          <p:cNvSpPr txBox="1"/>
-          <p:nvPr/>
-        </p:nvSpPr>
-        <p:spPr>
-          <a:xfrm>
-            <a:off x="640080" y="566928"/>
-            <a:ext cx="10058400" cy="530352"/>
-          </a:xfrm>
-          <a:prstGeom prst="rect">
-            <a:avLst/>
-          </a:prstGeom>
-          <a:noFill/>
-        </p:spPr>
-        <p:txBody>
-          <a:bodyPr wrap="none" lIns="9144" rIns="9144" tIns="9144" bIns="9144" anchor="t">
-            <a:spAutoFit/>
-          </a:bodyPr>
-          <a:lstStyle/>
-          <a:p>
-            <a:pPr algn="l">
-              <a:spcAft>
-                <a:spcPts val="0"/>
-              </a:spcAft>
-              <a:defRPr sz="2300" b="1">
-                <a:solidFill>
-                  <a:srgbClr val="0D1117"/>
-                </a:solidFill>
-                <a:latin typeface="Inter"/>
-              </a:defRPr>
-            </a:pPr>
-            <a:r>
-              <a:rPr>
-                <a:latin typeface="Inter"/>
-              </a:rPr>
-              <a:t>Appendix — Sources and methods</a:t>
-            </a:r>
-          </a:p>
-        </p:txBody>
-      </p:sp>
-      <p:sp>
-        <p:nvSpPr>
-          <p:cNvPr id="5" name="Rectangle 4"/>
-          <p:cNvSpPr/>
-          <p:nvPr/>
-        </p:nvSpPr>
-        <p:spPr>
-          <a:xfrm>
-            <a:off x="640080" y="1115568"/>
-            <a:ext cx="10908792" cy="18288"/>
-          </a:xfrm>
-          <a:prstGeom prst="rect">
-            <a:avLst/>
-          </a:prstGeom>
-          <a:solidFill>
-            <a:srgbClr val="0D1117"/>
-          </a:solidFill>
-          <a:ln>
-            <a:solidFill>
-              <a:srgbClr val="0D1117"/>
-            </a:solidFill>
-          </a:ln>
-        </p:spPr>
-        <p:style>
-          <a:lnRef idx="1">
-            <a:schemeClr val="accent1"/>
-          </a:lnRef>
-          <a:fillRef idx="3">
-            <a:schemeClr val="accent1"/>
-          </a:fillRef>
-          <a:effectRef idx="2">
-            <a:schemeClr val="accent1"/>
-          </a:effectRef>
-          <a:fontRef idx="minor">
-            <a:schemeClr val="lt1"/>
-          </a:fontRef>
-        </p:style>
-        <p:txBody>
-          <a:bodyPr rtlCol="0" anchor="ctr"/>
-          <a:lstStyle/>
-          <a:p>
-            <a:pPr algn="ctr">
-              <a:defRPr>
-                <a:latin typeface="Inter"/>
-              </a:defRPr>
-            </a:pPr>
-          </a:p>
-        </p:txBody>
-      </p:sp>
-      <p:sp>
-        <p:nvSpPr>
-          <p:cNvPr id="6" name="Rectangle 5"/>
-          <p:cNvSpPr/>
-          <p:nvPr/>
-        </p:nvSpPr>
-        <p:spPr>
-          <a:xfrm>
-            <a:off x="11018520" y="502920"/>
-            <a:ext cx="530352" cy="393192"/>
-          </a:xfrm>
-          <a:prstGeom prst="rect">
-            <a:avLst/>
-          </a:prstGeom>
-          <a:solidFill>
-            <a:srgbClr val="9AA5B1"/>
-          </a:solidFill>
-          <a:ln>
-            <a:solidFill>
-              <a:srgbClr val="9AA5B1"/>
-            </a:solidFill>
-          </a:ln>
-        </p:spPr>
-        <p:style>
-          <a:lnRef idx="1">
-            <a:schemeClr val="accent1"/>
-          </a:lnRef>
-          <a:fillRef idx="3">
-            <a:schemeClr val="accent1"/>
-          </a:fillRef>
-          <a:effectRef idx="2">
-            <a:schemeClr val="accent1"/>
-          </a:effectRef>
-          <a:fontRef idx="minor">
-            <a:schemeClr val="lt1"/>
-          </a:fontRef>
-        </p:style>
-        <p:txBody>
-          <a:bodyPr rtlCol="0" anchor="ctr"/>
-          <a:lstStyle/>
-          <a:p>
-            <a:pPr algn="ctr">
-              <a:defRPr>
-                <a:latin typeface="Inter"/>
-              </a:defRPr>
-            </a:pPr>
-          </a:p>
-        </p:txBody>
-      </p:sp>
-      <p:sp>
-        <p:nvSpPr>
-          <p:cNvPr id="7" name="TextBox 6"/>
-          <p:cNvSpPr txBox="1"/>
-          <p:nvPr/>
-        </p:nvSpPr>
-        <p:spPr>
-          <a:xfrm>
-            <a:off x="11045952" y="557784"/>
-            <a:ext cx="475488" cy="182880"/>
-          </a:xfrm>
-          <a:prstGeom prst="rect">
-            <a:avLst/>
-          </a:prstGeom>
-          <a:noFill/>
-        </p:spPr>
-        <p:txBody>
-          <a:bodyPr wrap="none" lIns="9144" rIns="9144" tIns="9144" bIns="9144" anchor="t">
-            <a:spAutoFit/>
-          </a:bodyPr>
-          <a:lstStyle/>
-          <a:p>
-            <a:pPr algn="ctr">
-              <a:spcAft>
-                <a:spcPts val="0"/>
-              </a:spcAft>
-              <a:defRPr sz="1000" b="1">
-                <a:solidFill>
-                  <a:srgbClr val="0D1117"/>
-                </a:solidFill>
-                <a:latin typeface="Inter"/>
-              </a:defRPr>
-            </a:pPr>
-            <a:r>
-              <a:rPr>
-                <a:latin typeface="Inter"/>
-              </a:rPr>
-              <a:t>A</a:t>
-            </a:r>
-          </a:p>
-        </p:txBody>
-      </p:sp>
-      <p:sp>
-        <p:nvSpPr>
-          <p:cNvPr id="8" name="TextBox 7"/>
-          <p:cNvSpPr txBox="1"/>
-          <p:nvPr/>
-        </p:nvSpPr>
-        <p:spPr>
-          <a:xfrm>
-            <a:off x="640080" y="1325880"/>
-            <a:ext cx="10908792" cy="4892040"/>
-          </a:xfrm>
-          <a:prstGeom prst="rect">
-            <a:avLst/>
-          </a:prstGeom>
-          <a:noFill/>
-        </p:spPr>
-        <p:txBody>
-          <a:bodyPr wrap="none" lIns="9144" rIns="9144" tIns="9144" bIns="9144" anchor="t">
-            <a:spAutoFit/>
-          </a:bodyPr>
-          <a:lstStyle/>
-          <a:p>
-            <a:pPr algn="l">
-              <a:spcAft>
-                <a:spcPts val="0"/>
-              </a:spcAft>
-              <a:defRPr sz="1100" b="0">
-                <a:solidFill>
-                  <a:srgbClr val="4A5563"/>
-                </a:solidFill>
-                <a:latin typeface="Inter"/>
-              </a:defRPr>
-            </a:pPr>
-            <a:r>
-              <a:rPr>
-                <a:latin typeface="Inter"/>
-              </a:rPr>
-              <a:t>Illustrative, Gradient Maintained — demo data, not the client's holdings or managers. All organizations,</a:t>
-            </a:r>
-            <a:br/>
-            <a:br/>
-            <a:r>
-              <a:rPr>
-                <a:latin typeface="Inter"/>
-              </a:rPr>
-              <a:t>portfolios, managers and results in this public example are illustrative.</a:t>
-            </a:r>
-            <a:br/>
-            <a:br/>
-            <a:r>
-              <a:rPr>
-                <a:latin typeface="Inter"/>
-              </a:rPr>
-              <a:t> ·  Tag  ·  Source  ·  Detail  ·  As of  ·  Validation  · </a:t>
-            </a:r>
-            <a:br/>
-            <a:br/>
-            <a:r>
-              <a:rPr>
-                <a:latin typeface="Inter"/>
-              </a:rPr>
-              <a:t> ·  S1  ·  Board performance report  ·  Total-fund pages 2–6  ·  2026-06-30  ·  Illustrative document  · </a:t>
-            </a:r>
-            <a:br/>
-            <a:br/>
-            <a:r>
-              <a:rPr>
-                <a:latin typeface="Inter"/>
-              </a:rPr>
-              <a:t> ·  S2  ·  Investment policy  ·  Benchmark section  ·  2026-01-01  ·  Illustrative document  · </a:t>
-            </a:r>
-            <a:br/>
-            <a:br/>
-            <a:r>
-              <a:rPr>
-                <a:latin typeface="Inter"/>
-              </a:rPr>
-              <a:t> ·  S3  ·  Custodian package  ·  Performance schedules  ·  2026-06-30  ·  Illustrative document  ·</a:t>
-            </a:r>
-          </a:p>
-        </p:txBody>
-      </p:sp>
-      <p:sp>
-        <p:nvSpPr>
-          <p:cNvPr id="9" name="Rectangle 8"/>
-          <p:cNvSpPr/>
-          <p:nvPr/>
-        </p:nvSpPr>
-        <p:spPr>
-          <a:xfrm>
-            <a:off x="640080" y="6446520"/>
-            <a:ext cx="10908792" cy="9144"/>
-          </a:xfrm>
-          <a:prstGeom prst="rect">
-            <a:avLst/>
-          </a:prstGeom>
-          <a:solidFill>
-            <a:srgbClr val="E3E7EC"/>
-          </a:solidFill>
-          <a:ln>
-            <a:solidFill>
-              <a:srgbClr val="E3E7EC"/>
-            </a:solidFill>
-          </a:ln>
-        </p:spPr>
-        <p:style>
-          <a:lnRef idx="1">
-            <a:schemeClr val="accent1"/>
-          </a:lnRef>
-          <a:fillRef idx="3">
-            <a:schemeClr val="accent1"/>
-          </a:fillRef>
-          <a:effectRef idx="2">
-            <a:schemeClr val="accent1"/>
-          </a:effectRef>
-          <a:fontRef idx="minor">
-            <a:schemeClr val="lt1"/>
-          </a:fontRef>
-        </p:style>
-        <p:txBody>
-          <a:bodyPr rtlCol="0" anchor="ctr"/>
-          <a:lstStyle/>
-          <a:p>
-            <a:pPr algn="ctr">
-              <a:defRPr>
-                <a:latin typeface="Inter"/>
-              </a:defRPr>
-            </a:pPr>
-          </a:p>
-        </p:txBody>
-      </p:sp>
-      <p:sp>
-        <p:nvSpPr>
-          <p:cNvPr id="10" name="TextBox 9"/>
-          <p:cNvSpPr txBox="1"/>
-          <p:nvPr/>
-        </p:nvSpPr>
-        <p:spPr>
-          <a:xfrm>
-            <a:off x="640080" y="6501384"/>
-            <a:ext cx="4297680" cy="146304"/>
-          </a:xfrm>
-          <a:prstGeom prst="rect">
-            <a:avLst/>
-          </a:prstGeom>
-          <a:noFill/>
-        </p:spPr>
-        <p:txBody>
-          <a:bodyPr wrap="none" lIns="9144" rIns="9144" tIns="9144" bIns="9144" anchor="t">
-            <a:spAutoFit/>
-          </a:bodyPr>
-          <a:lstStyle/>
-          <a:p>
-            <a:pPr algn="l">
-              <a:spcAft>
-                <a:spcPts val="0"/>
-              </a:spcAft>
-              <a:defRPr sz="650" b="0">
-                <a:solidFill>
-                  <a:srgbClr val="8A94A1"/>
-                </a:solidFill>
-                <a:latin typeface="Inter"/>
-              </a:defRPr>
-            </a:pPr>
-            <a:r>
-              <a:rPr>
-                <a:latin typeface="Inter"/>
-              </a:rPr>
-              <a:t>Sources: S1 · S2 · S3</a:t>
-            </a:r>
-          </a:p>
-        </p:txBody>
-      </p:sp>
-      <p:sp>
-        <p:nvSpPr>
-          <p:cNvPr id="11" name="TextBox 10"/>
-          <p:cNvSpPr txBox="1"/>
-          <p:nvPr/>
-        </p:nvSpPr>
-        <p:spPr>
-          <a:xfrm>
-            <a:off x="4480560" y="6501384"/>
-            <a:ext cx="5303520" cy="146304"/>
-          </a:xfrm>
-          <a:prstGeom prst="rect">
-            <a:avLst/>
-          </a:prstGeom>
-          <a:noFill/>
-        </p:spPr>
-        <p:txBody>
-          <a:bodyPr wrap="none" lIns="9144" rIns="9144" tIns="9144" bIns="9144" anchor="t">
-            <a:spAutoFit/>
-          </a:bodyPr>
-          <a:lstStyle/>
-          <a:p>
-            <a:pPr algn="ctr">
-              <a:spcAft>
-                <a:spcPts val="0"/>
-              </a:spcAft>
-              <a:defRPr sz="650" b="0">
-                <a:solidFill>
-                  <a:srgbClr val="8A94A1"/>
-                </a:solidFill>
-                <a:latin typeface="Inter"/>
-              </a:defRPr>
-            </a:pPr>
-            <a:r>
-              <a:rPr>
-                <a:latin typeface="Inter"/>
-              </a:rPr>
-              <a:t>Confidential — performance standards review · Data as of 2026-06-30</a:t>
-            </a:r>
-          </a:p>
-        </p:txBody>
-      </p:sp>
-      <p:sp>
-        <p:nvSpPr>
-          <p:cNvPr id="12" name="TextBox 11"/>
-          <p:cNvSpPr txBox="1"/>
-          <p:nvPr/>
-        </p:nvSpPr>
-        <p:spPr>
-          <a:xfrm>
-            <a:off x="10287000" y="6501384"/>
-            <a:ext cx="1261872" cy="146304"/>
-          </a:xfrm>
-          <a:prstGeom prst="rect">
-            <a:avLst/>
-          </a:prstGeom>
-          <a:noFill/>
-        </p:spPr>
-        <p:txBody>
-          <a:bodyPr wrap="none" lIns="9144" rIns="9144" tIns="9144" bIns="9144" anchor="t">
-            <a:spAutoFit/>
-          </a:bodyPr>
-          <a:lstStyle/>
-          <a:p>
-            <a:pPr algn="r">
-              <a:spcAft>
-                <a:spcPts val="0"/>
-              </a:spcAft>
-              <a:defRPr sz="650" b="0">
-                <a:solidFill>
-                  <a:srgbClr val="8A94A1"/>
-                </a:solidFill>
-                <a:latin typeface="Inter"/>
-              </a:defRPr>
-            </a:pPr>
-            <a:r>
-              <a:rPr>
-                <a:latin typeface="Inter"/>
-              </a:rPr>
-              <a:t>13</a:t>
-            </a:r>
-          </a:p>
-        </p:txBody>
-      </p:sp>
-    </p:spTree>
-  </p:cSld>
-  <p:clrMapOvr>
-    <a:masterClrMapping/>
-  </p:clrMapOvr>
-</p:sld>
-</file>
-
-<file path=ppt/slides/slide14.xml><?xml version="1.0" encoding="utf-8"?>
-<p:sld xmlns:a="http://schemas.openxmlformats.org/drawingml/2006/main" xmlns:p="http://schemas.openxmlformats.org/presentationml/2006/main" xmlns:r="http://schemas.openxmlformats.org/officeDocument/2006/relationships">
-  <p:cSld>
-    <p:spTree>
-      <p:nvGrpSpPr>
-        <p:cNvPr id="1" name=""/>
-        <p:cNvGrpSpPr/>
-        <p:nvPr/>
-      </p:nvGrpSpPr>
-      <p:grpSpPr/>
-      <p:sp>
-        <p:nvSpPr>
-          <p:cNvPr id="2" name="Rectangle 1"/>
-          <p:cNvSpPr/>
-          <p:nvPr/>
-        </p:nvSpPr>
-        <p:spPr>
-          <a:xfrm>
-            <a:off x="0" y="0"/>
-            <a:ext cx="12191695" cy="6858000"/>
-          </a:xfrm>
-          <a:prstGeom prst="rect">
-            <a:avLst/>
-          </a:prstGeom>
-          <a:solidFill>
-            <a:srgbClr val="FFFFFF"/>
-          </a:solidFill>
-          <a:ln>
-            <a:solidFill>
-              <a:srgbClr val="FFFFFF"/>
-            </a:solidFill>
-          </a:ln>
-        </p:spPr>
-        <p:style>
-          <a:lnRef idx="1">
-            <a:schemeClr val="accent1"/>
-          </a:lnRef>
-          <a:fillRef idx="3">
-            <a:schemeClr val="accent1"/>
-          </a:fillRef>
-          <a:effectRef idx="2">
-            <a:schemeClr val="accent1"/>
-          </a:effectRef>
-          <a:fontRef idx="minor">
-            <a:schemeClr val="lt1"/>
-          </a:fontRef>
-        </p:style>
-        <p:txBody>
-          <a:bodyPr rtlCol="0" anchor="ctr"/>
-          <a:lstStyle/>
-          <a:p>
-            <a:pPr algn="ctr">
-              <a:defRPr>
-                <a:latin typeface="Inter"/>
-              </a:defRPr>
-            </a:pPr>
-          </a:p>
-        </p:txBody>
-      </p:sp>
-      <p:sp>
-        <p:nvSpPr>
-          <p:cNvPr id="3" name="TextBox 2"/>
-          <p:cNvSpPr txBox="1"/>
-          <p:nvPr/>
-        </p:nvSpPr>
-        <p:spPr>
-          <a:xfrm>
-            <a:off x="5897880" y="310896"/>
-            <a:ext cx="4800600" cy="256032"/>
-          </a:xfrm>
-          <a:prstGeom prst="rect">
-            <a:avLst/>
-          </a:prstGeom>
-          <a:noFill/>
-        </p:spPr>
-        <p:txBody>
-          <a:bodyPr wrap="none" lIns="9144" rIns="9144" tIns="9144" bIns="9144" anchor="t">
-            <a:spAutoFit/>
-          </a:bodyPr>
-          <a:lstStyle/>
-          <a:p>
-            <a:pPr algn="r">
-              <a:spcAft>
-                <a:spcPts val="0"/>
-              </a:spcAft>
-              <a:defRPr sz="680" b="1">
-                <a:solidFill>
-                  <a:srgbClr val="4F6B00"/>
-                </a:solidFill>
-                <a:latin typeface="Inter"/>
-              </a:defRPr>
-            </a:pPr>
-            <a:r>
-              <a:rPr>
-                <a:latin typeface="Inter"/>
-              </a:rPr>
-              <a:t>Illustrative, Gradient Maintained — demo data, not the client's holdings or managers</a:t>
-            </a:r>
-          </a:p>
-        </p:txBody>
-      </p:sp>
-      <p:sp>
-        <p:nvSpPr>
-          <p:cNvPr id="4" name="TextBox 3"/>
-          <p:cNvSpPr txBox="1"/>
-          <p:nvPr/>
-        </p:nvSpPr>
-        <p:spPr>
-          <a:xfrm>
-            <a:off x="640080" y="566928"/>
-            <a:ext cx="10058400" cy="530352"/>
-          </a:xfrm>
-          <a:prstGeom prst="rect">
-            <a:avLst/>
-          </a:prstGeom>
-          <a:noFill/>
-        </p:spPr>
-        <p:txBody>
-          <a:bodyPr wrap="none" lIns="9144" rIns="9144" tIns="9144" bIns="9144" anchor="t">
-            <a:spAutoFit/>
-          </a:bodyPr>
-          <a:lstStyle/>
-          <a:p>
-            <a:pPr algn="l">
-              <a:spcAft>
-                <a:spcPts val="0"/>
-              </a:spcAft>
-              <a:defRPr sz="2300" b="1">
-                <a:solidFill>
-                  <a:srgbClr val="0D1117"/>
-                </a:solidFill>
-                <a:latin typeface="Inter"/>
-              </a:defRPr>
-            </a:pPr>
-            <a:r>
-              <a:rPr>
-                <a:latin typeface="Inter"/>
-              </a:rPr>
-              <a:t>Appendix — Method &amp; disclaimer</a:t>
-            </a:r>
-          </a:p>
-        </p:txBody>
-      </p:sp>
-      <p:sp>
-        <p:nvSpPr>
-          <p:cNvPr id="5" name="Rectangle 4"/>
-          <p:cNvSpPr/>
-          <p:nvPr/>
-        </p:nvSpPr>
-        <p:spPr>
-          <a:xfrm>
-            <a:off x="640080" y="1115568"/>
-            <a:ext cx="10908792" cy="18288"/>
-          </a:xfrm>
-          <a:prstGeom prst="rect">
-            <a:avLst/>
-          </a:prstGeom>
-          <a:solidFill>
-            <a:srgbClr val="0D1117"/>
-          </a:solidFill>
-          <a:ln>
-            <a:solidFill>
-              <a:srgbClr val="0D1117"/>
-            </a:solidFill>
-          </a:ln>
-        </p:spPr>
-        <p:style>
-          <a:lnRef idx="1">
-            <a:schemeClr val="accent1"/>
-          </a:lnRef>
-          <a:fillRef idx="3">
-            <a:schemeClr val="accent1"/>
-          </a:fillRef>
-          <a:effectRef idx="2">
-            <a:schemeClr val="accent1"/>
-          </a:effectRef>
-          <a:fontRef idx="minor">
-            <a:schemeClr val="lt1"/>
-          </a:fontRef>
-        </p:style>
-        <p:txBody>
-          <a:bodyPr rtlCol="0" anchor="ctr"/>
-          <a:lstStyle/>
-          <a:p>
-            <a:pPr algn="ctr">
-              <a:defRPr>
-                <a:latin typeface="Inter"/>
-              </a:defRPr>
-            </a:pPr>
-          </a:p>
-        </p:txBody>
-      </p:sp>
-      <p:sp>
-        <p:nvSpPr>
-          <p:cNvPr id="6" name="Rectangle 5"/>
-          <p:cNvSpPr/>
-          <p:nvPr/>
-        </p:nvSpPr>
-        <p:spPr>
-          <a:xfrm>
-            <a:off x="11018520" y="502920"/>
-            <a:ext cx="530352" cy="393192"/>
-          </a:xfrm>
-          <a:prstGeom prst="rect">
-            <a:avLst/>
-          </a:prstGeom>
-          <a:solidFill>
-            <a:srgbClr val="9AA5B1"/>
-          </a:solidFill>
-          <a:ln>
-            <a:solidFill>
-              <a:srgbClr val="9AA5B1"/>
-            </a:solidFill>
-          </a:ln>
-        </p:spPr>
-        <p:style>
-          <a:lnRef idx="1">
-            <a:schemeClr val="accent1"/>
-          </a:lnRef>
-          <a:fillRef idx="3">
-            <a:schemeClr val="accent1"/>
-          </a:fillRef>
-          <a:effectRef idx="2">
-            <a:schemeClr val="accent1"/>
-          </a:effectRef>
-          <a:fontRef idx="minor">
-            <a:schemeClr val="lt1"/>
-          </a:fontRef>
-        </p:style>
-        <p:txBody>
-          <a:bodyPr rtlCol="0" anchor="ctr"/>
-          <a:lstStyle/>
-          <a:p>
-            <a:pPr algn="ctr">
-              <a:defRPr>
-                <a:latin typeface="Inter"/>
-              </a:defRPr>
-            </a:pPr>
-          </a:p>
-        </p:txBody>
-      </p:sp>
-      <p:sp>
-        <p:nvSpPr>
-          <p:cNvPr id="7" name="TextBox 6"/>
-          <p:cNvSpPr txBox="1"/>
-          <p:nvPr/>
-        </p:nvSpPr>
-        <p:spPr>
-          <a:xfrm>
-            <a:off x="11045952" y="557784"/>
-            <a:ext cx="475488" cy="182880"/>
-          </a:xfrm>
-          <a:prstGeom prst="rect">
-            <a:avLst/>
-          </a:prstGeom>
-          <a:noFill/>
-        </p:spPr>
-        <p:txBody>
-          <a:bodyPr wrap="none" lIns="9144" rIns="9144" tIns="9144" bIns="9144" anchor="t">
-            <a:spAutoFit/>
-          </a:bodyPr>
-          <a:lstStyle/>
-          <a:p>
-            <a:pPr algn="ctr">
-              <a:spcAft>
-                <a:spcPts val="0"/>
-              </a:spcAft>
-              <a:defRPr sz="1000" b="1">
-                <a:solidFill>
-                  <a:srgbClr val="0D1117"/>
-                </a:solidFill>
-                <a:latin typeface="Inter"/>
-              </a:defRPr>
-            </a:pPr>
-            <a:r>
-              <a:rPr>
-                <a:latin typeface="Inter"/>
-              </a:rPr>
-              <a:t>C</a:t>
-            </a:r>
-          </a:p>
-        </p:txBody>
-      </p:sp>
-      <p:sp>
-        <p:nvSpPr>
-          <p:cNvPr id="8" name="TextBox 7"/>
-          <p:cNvSpPr txBox="1"/>
-          <p:nvPr/>
-        </p:nvSpPr>
-        <p:spPr>
-          <a:xfrm>
-            <a:off x="640080" y="1325880"/>
-            <a:ext cx="10908792" cy="4892040"/>
-          </a:xfrm>
-          <a:prstGeom prst="rect">
-            <a:avLst/>
-          </a:prstGeom>
-          <a:noFill/>
-        </p:spPr>
-        <p:txBody>
-          <a:bodyPr wrap="none" lIns="9144" rIns="9144" tIns="9144" bIns="9144" anchor="t">
-            <a:spAutoFit/>
-          </a:bodyPr>
-          <a:lstStyle/>
-          <a:p>
-            <a:pPr algn="l">
-              <a:spcAft>
-                <a:spcPts val="0"/>
-              </a:spcAft>
-              <a:defRPr sz="1100" b="0">
-                <a:solidFill>
-                  <a:srgbClr val="4A5563"/>
-                </a:solidFill>
-                <a:latin typeface="Inter"/>
-              </a:defRPr>
-            </a:pPr>
-            <a:r>
-              <a:rPr>
-                <a:latin typeface="Inter"/>
-              </a:rPr>
-              <a:t>This illustrative asset-owner review is not verification, certification, legal advice or an assessment of any real organization.</a:t>
-            </a:r>
-          </a:p>
-        </p:txBody>
-      </p:sp>
-      <p:sp>
-        <p:nvSpPr>
-          <p:cNvPr id="9" name="Rectangle 8"/>
-          <p:cNvSpPr/>
-          <p:nvPr/>
-        </p:nvSpPr>
-        <p:spPr>
-          <a:xfrm>
-            <a:off x="640080" y="6446520"/>
-            <a:ext cx="10908792" cy="9144"/>
-          </a:xfrm>
-          <a:prstGeom prst="rect">
-            <a:avLst/>
-          </a:prstGeom>
-          <a:solidFill>
-            <a:srgbClr val="E3E7EC"/>
-          </a:solidFill>
-          <a:ln>
-            <a:solidFill>
-              <a:srgbClr val="E3E7EC"/>
-            </a:solidFill>
-          </a:ln>
-        </p:spPr>
-        <p:style>
-          <a:lnRef idx="1">
-            <a:schemeClr val="accent1"/>
-          </a:lnRef>
-          <a:fillRef idx="3">
-            <a:schemeClr val="accent1"/>
-          </a:fillRef>
-          <a:effectRef idx="2">
-            <a:schemeClr val="accent1"/>
-          </a:effectRef>
-          <a:fontRef idx="minor">
-            <a:schemeClr val="lt1"/>
-          </a:fontRef>
-        </p:style>
-        <p:txBody>
-          <a:bodyPr rtlCol="0" anchor="ctr"/>
-          <a:lstStyle/>
-          <a:p>
-            <a:pPr algn="ctr">
-              <a:defRPr>
-                <a:latin typeface="Inter"/>
-              </a:defRPr>
-            </a:pPr>
-          </a:p>
-        </p:txBody>
-      </p:sp>
-      <p:sp>
-        <p:nvSpPr>
-          <p:cNvPr id="10" name="TextBox 9"/>
-          <p:cNvSpPr txBox="1"/>
-          <p:nvPr/>
-        </p:nvSpPr>
-        <p:spPr>
-          <a:xfrm>
-            <a:off x="640080" y="6501384"/>
-            <a:ext cx="4297680" cy="146304"/>
-          </a:xfrm>
-          <a:prstGeom prst="rect">
-            <a:avLst/>
-          </a:prstGeom>
-          <a:noFill/>
-        </p:spPr>
-        <p:txBody>
-          <a:bodyPr wrap="none" lIns="9144" rIns="9144" tIns="9144" bIns="9144" anchor="t">
-            <a:spAutoFit/>
-          </a:bodyPr>
-          <a:lstStyle/>
-          <a:p>
-            <a:pPr algn="l">
-              <a:spcAft>
-                <a:spcPts val="0"/>
-              </a:spcAft>
-              <a:defRPr sz="650" b="0">
-                <a:solidFill>
-                  <a:srgbClr val="8A94A1"/>
-                </a:solidFill>
-                <a:latin typeface="Inter"/>
-              </a:defRPr>
-            </a:pPr>
-            <a:r>
-              <a:rPr>
-                <a:latin typeface="Inter"/>
-              </a:rPr>
-              <a:t>Sources: none cited</a:t>
-            </a:r>
-          </a:p>
-        </p:txBody>
-      </p:sp>
-      <p:sp>
-        <p:nvSpPr>
-          <p:cNvPr id="11" name="TextBox 10"/>
-          <p:cNvSpPr txBox="1"/>
-          <p:nvPr/>
-        </p:nvSpPr>
-        <p:spPr>
-          <a:xfrm>
-            <a:off x="4480560" y="6501384"/>
-            <a:ext cx="5303520" cy="146304"/>
-          </a:xfrm>
-          <a:prstGeom prst="rect">
-            <a:avLst/>
-          </a:prstGeom>
-          <a:noFill/>
-        </p:spPr>
-        <p:txBody>
-          <a:bodyPr wrap="none" lIns="9144" rIns="9144" tIns="9144" bIns="9144" anchor="t">
-            <a:spAutoFit/>
-          </a:bodyPr>
-          <a:lstStyle/>
-          <a:p>
-            <a:pPr algn="ctr">
-              <a:spcAft>
-                <a:spcPts val="0"/>
-              </a:spcAft>
-              <a:defRPr sz="650" b="0">
-                <a:solidFill>
-                  <a:srgbClr val="8A94A1"/>
-                </a:solidFill>
-                <a:latin typeface="Inter"/>
-              </a:defRPr>
-            </a:pPr>
-            <a:r>
-              <a:rPr>
-                <a:latin typeface="Inter"/>
-              </a:rPr>
-              <a:t>Confidential — performance standards review · Data as of 2026-06-30</a:t>
-            </a:r>
-          </a:p>
-        </p:txBody>
-      </p:sp>
-      <p:sp>
-        <p:nvSpPr>
-          <p:cNvPr id="12" name="TextBox 11"/>
-          <p:cNvSpPr txBox="1"/>
-          <p:nvPr/>
-        </p:nvSpPr>
-        <p:spPr>
-          <a:xfrm>
-            <a:off x="10287000" y="6501384"/>
-            <a:ext cx="1261872" cy="146304"/>
-          </a:xfrm>
-          <a:prstGeom prst="rect">
-            <a:avLst/>
-          </a:prstGeom>
-          <a:noFill/>
-        </p:spPr>
-        <p:txBody>
-          <a:bodyPr wrap="none" lIns="9144" rIns="9144" tIns="9144" bIns="9144" anchor="t">
-            <a:spAutoFit/>
-          </a:bodyPr>
-          <a:lstStyle/>
-          <a:p>
-            <a:pPr algn="r">
-              <a:spcAft>
-                <a:spcPts val="0"/>
-              </a:spcAft>
-              <a:defRPr sz="650" b="0">
-                <a:solidFill>
-                  <a:srgbClr val="8A94A1"/>
-                </a:solidFill>
-                <a:latin typeface="Inter"/>
-              </a:defRPr>
-            </a:pPr>
-            <a:r>
-              <a:rPr>
-                <a:latin typeface="Inter"/>
-              </a:rPr>
-              <a:t>14</a:t>
             </a:r>
           </a:p>
         </p:txBody>
@@ -7318,7 +5569,7 @@
         <p:spPr>
           <a:xfrm>
             <a:off x="640080" y="1325880"/>
-            <a:ext cx="10908792" cy="1866268"/>
+            <a:ext cx="10908792" cy="1793366"/>
           </a:xfrm>
           <a:prstGeom prst="rect">
             <a:avLst/>
@@ -7367,7 +5618,7 @@
         <p:spPr>
           <a:xfrm>
             <a:off x="640080" y="1325880"/>
-            <a:ext cx="54864" cy="1866268"/>
+            <a:ext cx="54864" cy="1793366"/>
           </a:xfrm>
           <a:prstGeom prst="rect">
             <a:avLst/>
@@ -7458,7 +5709,7 @@
         <p:spPr>
           <a:xfrm>
             <a:off x="804671" y="1719072"/>
-            <a:ext cx="10616184" cy="1381636"/>
+            <a:ext cx="10616184" cy="1308734"/>
           </a:xfrm>
           <a:prstGeom prst="rect">
             <a:avLst/>
@@ -7499,8 +5750,8 @@
         </p:nvSpPr>
         <p:spPr>
           <a:xfrm>
-            <a:off x="640080" y="3301876"/>
-            <a:ext cx="2644902" cy="2916043"/>
+            <a:off x="640080" y="3228975"/>
+            <a:ext cx="2644902" cy="2988945"/>
           </a:xfrm>
           <a:prstGeom prst="rect">
             <a:avLst/>
@@ -7548,7 +5799,7 @@
         </p:nvSpPr>
         <p:spPr>
           <a:xfrm>
-            <a:off x="640080" y="3301876"/>
+            <a:off x="640080" y="3228975"/>
             <a:ext cx="2644902" cy="45720"/>
           </a:xfrm>
           <a:prstGeom prst="rect">
@@ -7597,7 +5848,7 @@
         </p:nvSpPr>
         <p:spPr>
           <a:xfrm>
-            <a:off x="749808" y="3429892"/>
+            <a:off x="749808" y="3356991"/>
             <a:ext cx="2425446" cy="201168"/>
           </a:xfrm>
           <a:prstGeom prst="rect">
@@ -7639,7 +5890,7 @@
         </p:nvSpPr>
         <p:spPr>
           <a:xfrm>
-            <a:off x="749808" y="3685924"/>
+            <a:off x="749808" y="3613023"/>
             <a:ext cx="2425446" cy="475488"/>
           </a:xfrm>
           <a:prstGeom prst="rect">
@@ -7723,8 +5974,8 @@
         </p:nvSpPr>
         <p:spPr>
           <a:xfrm>
-            <a:off x="3394710" y="3301876"/>
-            <a:ext cx="2644902" cy="2916043"/>
+            <a:off x="3394710" y="3228975"/>
+            <a:ext cx="2644902" cy="2988945"/>
           </a:xfrm>
           <a:prstGeom prst="rect">
             <a:avLst/>
@@ -7772,7 +6023,7 @@
         </p:nvSpPr>
         <p:spPr>
           <a:xfrm>
-            <a:off x="3394710" y="3301876"/>
+            <a:off x="3394710" y="3228975"/>
             <a:ext cx="2644902" cy="45720"/>
           </a:xfrm>
           <a:prstGeom prst="rect">
@@ -7821,7 +6072,7 @@
         </p:nvSpPr>
         <p:spPr>
           <a:xfrm>
-            <a:off x="3504438" y="3429892"/>
+            <a:off x="3504438" y="3356991"/>
             <a:ext cx="2425446" cy="201168"/>
           </a:xfrm>
           <a:prstGeom prst="rect">
@@ -7863,7 +6114,7 @@
         </p:nvSpPr>
         <p:spPr>
           <a:xfrm>
-            <a:off x="3504438" y="3685924"/>
+            <a:off x="3504438" y="3613023"/>
             <a:ext cx="2425446" cy="475488"/>
           </a:xfrm>
           <a:prstGeom prst="rect">
@@ -7947,8 +6198,8 @@
         </p:nvSpPr>
         <p:spPr>
           <a:xfrm>
-            <a:off x="6149340" y="3301876"/>
-            <a:ext cx="2644902" cy="2916043"/>
+            <a:off x="6149340" y="3228975"/>
+            <a:ext cx="2644902" cy="2988945"/>
           </a:xfrm>
           <a:prstGeom prst="rect">
             <a:avLst/>
@@ -7996,7 +6247,7 @@
         </p:nvSpPr>
         <p:spPr>
           <a:xfrm>
-            <a:off x="6149340" y="3301876"/>
+            <a:off x="6149340" y="3228975"/>
             <a:ext cx="2644902" cy="45720"/>
           </a:xfrm>
           <a:prstGeom prst="rect">
@@ -8045,7 +6296,7 @@
         </p:nvSpPr>
         <p:spPr>
           <a:xfrm>
-            <a:off x="6259068" y="3429892"/>
+            <a:off x="6259068" y="3356991"/>
             <a:ext cx="2425446" cy="201168"/>
           </a:xfrm>
           <a:prstGeom prst="rect">
@@ -8087,7 +6338,7 @@
         </p:nvSpPr>
         <p:spPr>
           <a:xfrm>
-            <a:off x="6259068" y="3685924"/>
+            <a:off x="6259068" y="3613023"/>
             <a:ext cx="2425446" cy="475488"/>
           </a:xfrm>
           <a:prstGeom prst="rect">
@@ -8171,8 +6422,8 @@
         </p:nvSpPr>
         <p:spPr>
           <a:xfrm>
-            <a:off x="8903970" y="3301876"/>
-            <a:ext cx="2644902" cy="2916043"/>
+            <a:off x="8903970" y="3228975"/>
+            <a:ext cx="2644902" cy="2988945"/>
           </a:xfrm>
           <a:prstGeom prst="rect">
             <a:avLst/>
@@ -8220,7 +6471,7 @@
         </p:nvSpPr>
         <p:spPr>
           <a:xfrm>
-            <a:off x="8903970" y="3301876"/>
+            <a:off x="8903970" y="3228975"/>
             <a:ext cx="2644902" cy="45720"/>
           </a:xfrm>
           <a:prstGeom prst="rect">
@@ -8269,7 +6520,7 @@
         </p:nvSpPr>
         <p:spPr>
           <a:xfrm>
-            <a:off x="9013698" y="3429892"/>
+            <a:off x="9013698" y="3356991"/>
             <a:ext cx="2425446" cy="201168"/>
           </a:xfrm>
           <a:prstGeom prst="rect">
@@ -8311,7 +6562,7 @@
         </p:nvSpPr>
         <p:spPr>
           <a:xfrm>
-            <a:off x="9013698" y="3685924"/>
+            <a:off x="9013698" y="3613023"/>
             <a:ext cx="2425446" cy="475488"/>
           </a:xfrm>
           <a:prstGeom prst="rect">
@@ -8905,7 +7156,7 @@
         </p:nvGraphicFramePr>
         <p:xfrm>
           <a:off x="640080" y="1600200"/>
-          <a:ext cx="10908792" cy="2099319"/>
+          <a:ext cx="10908792" cy="1883677"/>
         </p:xfrm>
         <a:graphic>
           <a:graphicData uri="http://schemas.openxmlformats.org/drawingml/2006/table">
@@ -8918,7 +7169,7 @@
                 <a:gridCol w="4448556"/>
                 <a:gridCol w="4448556"/>
               </a:tblGrid>
-              <a:tr h="524829">
+              <a:tr h="470919">
                 <a:tc>
                   <a:txBody>
                     <a:bodyPr/>
@@ -9001,7 +7252,7 @@
                   </a:tcPr>
                 </a:tc>
               </a:tr>
-              <a:tr h="524829">
+              <a:tr h="470919">
                 <a:tc>
                   <a:txBody>
                     <a:bodyPr/>
@@ -9084,7 +7335,7 @@
                   </a:tcPr>
                 </a:tc>
               </a:tr>
-              <a:tr h="524829">
+              <a:tr h="470919">
                 <a:tc>
                   <a:txBody>
                     <a:bodyPr/>
@@ -9167,7 +7418,7 @@
                   </a:tcPr>
                 </a:tc>
               </a:tr>
-              <a:tr h="524832">
+              <a:tr h="470920">
                 <a:tc>
                   <a:txBody>
                     <a:bodyPr/>
@@ -9262,8 +7513,8 @@
         </p:nvSpPr>
         <p:spPr>
           <a:xfrm>
-            <a:off x="640080" y="3809247"/>
-            <a:ext cx="10908792" cy="1078927"/>
+            <a:off x="640080" y="3593605"/>
+            <a:ext cx="10908792" cy="588544"/>
           </a:xfrm>
           <a:prstGeom prst="rect">
             <a:avLst/>
@@ -9304,8 +7555,8 @@
         </p:nvSpPr>
         <p:spPr>
           <a:xfrm>
-            <a:off x="640080" y="4997902"/>
-            <a:ext cx="10908792" cy="1220017"/>
+            <a:off x="640080" y="4291877"/>
+            <a:ext cx="10908792" cy="908157"/>
           </a:xfrm>
           <a:prstGeom prst="rect">
             <a:avLst/>
@@ -9353,8 +7604,8 @@
         </p:nvSpPr>
         <p:spPr>
           <a:xfrm>
-            <a:off x="640080" y="4997902"/>
-            <a:ext cx="54864" cy="1220017"/>
+            <a:off x="640080" y="4291877"/>
+            <a:ext cx="54864" cy="908157"/>
           </a:xfrm>
           <a:prstGeom prst="rect">
             <a:avLst/>
@@ -9402,7 +7653,7 @@
         </p:nvSpPr>
         <p:spPr>
           <a:xfrm>
-            <a:off x="804671" y="5107630"/>
+            <a:off x="804671" y="4401605"/>
             <a:ext cx="10616184" cy="228600"/>
           </a:xfrm>
           <a:prstGeom prst="rect">
@@ -9444,8 +7695,8 @@
         </p:nvSpPr>
         <p:spPr>
           <a:xfrm>
-            <a:off x="804671" y="5391094"/>
-            <a:ext cx="10616184" cy="735385"/>
+            <a:off x="804671" y="4685069"/>
+            <a:ext cx="10616184" cy="423525"/>
           </a:xfrm>
           <a:prstGeom prst="rect">
             <a:avLst/>
@@ -9481,6 +7732,188 @@
       <p:sp>
         <p:nvSpPr>
           <p:cNvPr id="15" name="Rectangle 14"/>
+          <p:cNvSpPr/>
+          <p:nvPr/>
+        </p:nvSpPr>
+        <p:spPr>
+          <a:xfrm>
+            <a:off x="640080" y="5309762"/>
+            <a:ext cx="10908792" cy="908157"/>
+          </a:xfrm>
+          <a:prstGeom prst="rect">
+            <a:avLst/>
+          </a:prstGeom>
+          <a:solidFill>
+            <a:srgbClr val="F5F7F9"/>
+          </a:solidFill>
+          <a:ln>
+            <a:solidFill>
+              <a:srgbClr val="E3E7EC"/>
+            </a:solidFill>
+          </a:ln>
+        </p:spPr>
+        <p:style>
+          <a:lnRef idx="1">
+            <a:schemeClr val="accent1"/>
+          </a:lnRef>
+          <a:fillRef idx="3">
+            <a:schemeClr val="accent1"/>
+          </a:fillRef>
+          <a:effectRef idx="2">
+            <a:schemeClr val="accent1"/>
+          </a:effectRef>
+          <a:fontRef idx="minor">
+            <a:schemeClr val="lt1"/>
+          </a:fontRef>
+        </p:style>
+        <p:txBody>
+          <a:bodyPr rtlCol="0" anchor="ctr"/>
+          <a:lstStyle/>
+          <a:p>
+            <a:pPr algn="ctr">
+              <a:defRPr>
+                <a:latin typeface="Inter"/>
+              </a:defRPr>
+            </a:pPr>
+          </a:p>
+        </p:txBody>
+      </p:sp>
+      <p:sp>
+        <p:nvSpPr>
+          <p:cNvPr id="16" name="Rectangle 15"/>
+          <p:cNvSpPr/>
+          <p:nvPr/>
+        </p:nvSpPr>
+        <p:spPr>
+          <a:xfrm>
+            <a:off x="640080" y="5309762"/>
+            <a:ext cx="54864" cy="908157"/>
+          </a:xfrm>
+          <a:prstGeom prst="rect">
+            <a:avLst/>
+          </a:prstGeom>
+          <a:solidFill>
+            <a:srgbClr val="C6F432"/>
+          </a:solidFill>
+          <a:ln>
+            <a:solidFill>
+              <a:srgbClr val="C6F432"/>
+            </a:solidFill>
+          </a:ln>
+        </p:spPr>
+        <p:style>
+          <a:lnRef idx="1">
+            <a:schemeClr val="accent1"/>
+          </a:lnRef>
+          <a:fillRef idx="3">
+            <a:schemeClr val="accent1"/>
+          </a:fillRef>
+          <a:effectRef idx="2">
+            <a:schemeClr val="accent1"/>
+          </a:effectRef>
+          <a:fontRef idx="minor">
+            <a:schemeClr val="lt1"/>
+          </a:fontRef>
+        </p:style>
+        <p:txBody>
+          <a:bodyPr rtlCol="0" anchor="ctr"/>
+          <a:lstStyle/>
+          <a:p>
+            <a:pPr algn="ctr">
+              <a:defRPr>
+                <a:latin typeface="Inter"/>
+              </a:defRPr>
+            </a:pPr>
+          </a:p>
+        </p:txBody>
+      </p:sp>
+      <p:sp>
+        <p:nvSpPr>
+          <p:cNvPr id="17" name="TextBox 16"/>
+          <p:cNvSpPr txBox="1"/>
+          <p:nvPr/>
+        </p:nvSpPr>
+        <p:spPr>
+          <a:xfrm>
+            <a:off x="804671" y="5419490"/>
+            <a:ext cx="10616184" cy="228600"/>
+          </a:xfrm>
+          <a:prstGeom prst="rect">
+            <a:avLst/>
+          </a:prstGeom>
+          <a:noFill/>
+        </p:spPr>
+        <p:txBody>
+          <a:bodyPr wrap="none" lIns="9144" rIns="9144" tIns="9144" bIns="9144" anchor="t">
+            <a:spAutoFit/>
+          </a:bodyPr>
+          <a:lstStyle/>
+          <a:p>
+            <a:pPr algn="l">
+              <a:spcAft>
+                <a:spcPts val="0"/>
+              </a:spcAft>
+              <a:defRPr sz="1000" b="1">
+                <a:solidFill>
+                  <a:srgbClr val="0D1117"/>
+                </a:solidFill>
+                <a:latin typeface="Inter"/>
+              </a:defRPr>
+            </a:pPr>
+            <a:r>
+              <a:rPr>
+                <a:latin typeface="Inter"/>
+              </a:rPr>
+              <a:t>Key judgment — policy benchmark is identified</a:t>
+            </a:r>
+          </a:p>
+        </p:txBody>
+      </p:sp>
+      <p:sp>
+        <p:nvSpPr>
+          <p:cNvPr id="18" name="TextBox 17"/>
+          <p:cNvSpPr txBox="1"/>
+          <p:nvPr/>
+        </p:nvSpPr>
+        <p:spPr>
+          <a:xfrm>
+            <a:off x="804671" y="5702954"/>
+            <a:ext cx="10616184" cy="423525"/>
+          </a:xfrm>
+          <a:prstGeom prst="rect">
+            <a:avLst/>
+          </a:prstGeom>
+          <a:noFill/>
+        </p:spPr>
+        <p:txBody>
+          <a:bodyPr wrap="none" lIns="9144" rIns="9144" tIns="9144" bIns="9144" anchor="t">
+            <a:spAutoFit/>
+          </a:bodyPr>
+          <a:lstStyle/>
+          <a:p>
+            <a:pPr algn="l">
+              <a:spcAft>
+                <a:spcPts val="0"/>
+              </a:spcAft>
+              <a:defRPr sz="950" b="0">
+                <a:solidFill>
+                  <a:srgbClr val="4A5563"/>
+                </a:solidFill>
+                <a:latin typeface="Inter"/>
+              </a:defRPr>
+            </a:pPr>
+            <a:r>
+              <a:rPr>
+                <a:latin typeface="Inter"/>
+              </a:rPr>
+              <a:t>The investment policy names the benchmark used in the board report [S1, S2]. Matching the two records supports benchmark identity, but the evidence does not by itself establish uninterrupted methodology, approval history, or comparability across every reported period.</a:t>
+            </a:r>
+          </a:p>
+        </p:txBody>
+      </p:sp>
+      <p:sp>
+        <p:nvSpPr>
+          <p:cNvPr id="19" name="Rectangle 18"/>
           <p:cNvSpPr/>
           <p:nvPr/>
         </p:nvSpPr>
@@ -9529,7 +7962,7 @@
       </p:sp>
       <p:sp>
         <p:nvSpPr>
-          <p:cNvPr id="16" name="TextBox 15"/>
+          <p:cNvPr id="20" name="TextBox 19"/>
           <p:cNvSpPr txBox="1"/>
           <p:nvPr/>
         </p:nvSpPr>
@@ -9571,7 +8004,7 @@
       </p:sp>
       <p:sp>
         <p:nvSpPr>
-          <p:cNvPr id="17" name="TextBox 16"/>
+          <p:cNvPr id="21" name="TextBox 20"/>
           <p:cNvSpPr txBox="1"/>
           <p:nvPr/>
         </p:nvSpPr>
@@ -9613,7 +8046,7 @@
       </p:sp>
       <p:sp>
         <p:nvSpPr>
-          <p:cNvPr id="18" name="TextBox 17"/>
+          <p:cNvPr id="22" name="TextBox 21"/>
           <p:cNvSpPr txBox="1"/>
           <p:nvPr/>
         </p:nvSpPr>
@@ -9953,7 +8386,7 @@
         <p:spPr>
           <a:xfrm>
             <a:off x="640080" y="1325880"/>
-            <a:ext cx="10908792" cy="1563361"/>
+            <a:ext cx="10908792" cy="2391156"/>
           </a:xfrm>
           <a:prstGeom prst="rect">
             <a:avLst/>
@@ -10002,17 +8435,17 @@
         <p:spPr>
           <a:xfrm>
             <a:off x="640080" y="1325880"/>
-            <a:ext cx="54864" cy="1563361"/>
+            <a:ext cx="54864" cy="2391156"/>
           </a:xfrm>
           <a:prstGeom prst="rect">
             <a:avLst/>
           </a:prstGeom>
           <a:solidFill>
-            <a:srgbClr val="C6F432"/>
+            <a:srgbClr val="F2A93B"/>
           </a:solidFill>
           <a:ln>
             <a:solidFill>
-              <a:srgbClr val="C6F432"/>
+              <a:srgbClr val="F2A93B"/>
             </a:solidFill>
           </a:ln>
         </p:spPr>
@@ -10079,7 +8512,7 @@
               <a:rPr>
                 <a:latin typeface="Inter"/>
               </a:rPr>
-              <a:t>Key judgment — policy benchmark is identified</a:t>
+              <a:t>Key judgment — benchmark lineage is incomplete</a:t>
             </a:r>
           </a:p>
         </p:txBody>
@@ -10093,7 +8526,7 @@
         <p:spPr>
           <a:xfrm>
             <a:off x="804671" y="1719072"/>
-            <a:ext cx="10616184" cy="1078729"/>
+            <a:ext cx="10616184" cy="1906523"/>
           </a:xfrm>
           <a:prstGeom prst="rect">
             <a:avLst/>
@@ -10121,7 +8554,7 @@
               <a:rPr>
                 <a:latin typeface="Inter"/>
               </a:rPr>
-              <a:t>The investment policy names the benchmark used in the board report [S1, S2]. Matching the two records supports benchmark identity, but the evidence does not by itself establish uninterrupted methodology, approval history, or comparability across every reported period.</a:t>
+              <a:t>The benchmark change is disclosed without an effective date or approval rationale [S1, S2]. That omission prevents period-level lineage testing, so comparability remains bounded until dated approval records identify when the change took effect and why it was adopted.</a:t>
             </a:r>
           </a:p>
         </p:txBody>
@@ -10134,8 +8567,8 @@
         </p:nvSpPr>
         <p:spPr>
           <a:xfrm>
-            <a:off x="640080" y="2998969"/>
-            <a:ext cx="10908792" cy="1557527"/>
+            <a:off x="640080" y="3826763"/>
+            <a:ext cx="10908792" cy="2391156"/>
           </a:xfrm>
           <a:prstGeom prst="rect">
             <a:avLst/>
@@ -10183,190 +8616,8 @@
         </p:nvSpPr>
         <p:spPr>
           <a:xfrm>
-            <a:off x="640080" y="2998969"/>
-            <a:ext cx="54864" cy="1557527"/>
-          </a:xfrm>
-          <a:prstGeom prst="rect">
-            <a:avLst/>
-          </a:prstGeom>
-          <a:solidFill>
-            <a:srgbClr val="F2A93B"/>
-          </a:solidFill>
-          <a:ln>
-            <a:solidFill>
-              <a:srgbClr val="F2A93B"/>
-            </a:solidFill>
-          </a:ln>
-        </p:spPr>
-        <p:style>
-          <a:lnRef idx="1">
-            <a:schemeClr val="accent1"/>
-          </a:lnRef>
-          <a:fillRef idx="3">
-            <a:schemeClr val="accent1"/>
-          </a:fillRef>
-          <a:effectRef idx="2">
-            <a:schemeClr val="accent1"/>
-          </a:effectRef>
-          <a:fontRef idx="minor">
-            <a:schemeClr val="lt1"/>
-          </a:fontRef>
-        </p:style>
-        <p:txBody>
-          <a:bodyPr rtlCol="0" anchor="ctr"/>
-          <a:lstStyle/>
-          <a:p>
-            <a:pPr algn="ctr">
-              <a:defRPr>
-                <a:latin typeface="Inter"/>
-              </a:defRPr>
-            </a:pPr>
-          </a:p>
-        </p:txBody>
-      </p:sp>
-      <p:sp>
-        <p:nvSpPr>
-          <p:cNvPr id="14" name="TextBox 13"/>
-          <p:cNvSpPr txBox="1"/>
-          <p:nvPr/>
-        </p:nvSpPr>
-        <p:spPr>
-          <a:xfrm>
-            <a:off x="804671" y="3108697"/>
-            <a:ext cx="10616184" cy="228600"/>
-          </a:xfrm>
-          <a:prstGeom prst="rect">
-            <a:avLst/>
-          </a:prstGeom>
-          <a:noFill/>
-        </p:spPr>
-        <p:txBody>
-          <a:bodyPr wrap="none" lIns="9144" rIns="9144" tIns="9144" bIns="9144" anchor="t">
-            <a:spAutoFit/>
-          </a:bodyPr>
-          <a:lstStyle/>
-          <a:p>
-            <a:pPr algn="l">
-              <a:spcAft>
-                <a:spcPts val="0"/>
-              </a:spcAft>
-              <a:defRPr sz="1000" b="1">
-                <a:solidFill>
-                  <a:srgbClr val="0D1117"/>
-                </a:solidFill>
-                <a:latin typeface="Inter"/>
-              </a:defRPr>
-            </a:pPr>
-            <a:r>
-              <a:rPr>
-                <a:latin typeface="Inter"/>
-              </a:rPr>
-              <a:t>Key judgment — benchmark lineage is incomplete</a:t>
-            </a:r>
-          </a:p>
-        </p:txBody>
-      </p:sp>
-      <p:sp>
-        <p:nvSpPr>
-          <p:cNvPr id="15" name="TextBox 14"/>
-          <p:cNvSpPr txBox="1"/>
-          <p:nvPr/>
-        </p:nvSpPr>
-        <p:spPr>
-          <a:xfrm>
-            <a:off x="804671" y="3392161"/>
-            <a:ext cx="10616184" cy="1072895"/>
-          </a:xfrm>
-          <a:prstGeom prst="rect">
-            <a:avLst/>
-          </a:prstGeom>
-          <a:noFill/>
-        </p:spPr>
-        <p:txBody>
-          <a:bodyPr wrap="none" lIns="9144" rIns="9144" tIns="9144" bIns="9144" anchor="t">
-            <a:spAutoFit/>
-          </a:bodyPr>
-          <a:lstStyle/>
-          <a:p>
-            <a:pPr algn="l">
-              <a:spcAft>
-                <a:spcPts val="0"/>
-              </a:spcAft>
-              <a:defRPr sz="950" b="0">
-                <a:solidFill>
-                  <a:srgbClr val="4A5563"/>
-                </a:solidFill>
-                <a:latin typeface="Inter"/>
-              </a:defRPr>
-            </a:pPr>
-            <a:r>
-              <a:rPr>
-                <a:latin typeface="Inter"/>
-              </a:rPr>
-              <a:t>The benchmark change is disclosed without an effective date or approval rationale [S1, S2]. That omission prevents period-level lineage testing, so comparability remains bounded until dated approval records identify when the change took effect and why it was adopted.</a:t>
-            </a:r>
-          </a:p>
-        </p:txBody>
-      </p:sp>
-      <p:sp>
-        <p:nvSpPr>
-          <p:cNvPr id="16" name="Rectangle 15"/>
-          <p:cNvSpPr/>
-          <p:nvPr/>
-        </p:nvSpPr>
-        <p:spPr>
-          <a:xfrm>
-            <a:off x="640080" y="4666225"/>
-            <a:ext cx="10908792" cy="1551694"/>
-          </a:xfrm>
-          <a:prstGeom prst="rect">
-            <a:avLst/>
-          </a:prstGeom>
-          <a:solidFill>
-            <a:srgbClr val="F5F7F9"/>
-          </a:solidFill>
-          <a:ln>
-            <a:solidFill>
-              <a:srgbClr val="E3E7EC"/>
-            </a:solidFill>
-          </a:ln>
-        </p:spPr>
-        <p:style>
-          <a:lnRef idx="1">
-            <a:schemeClr val="accent1"/>
-          </a:lnRef>
-          <a:fillRef idx="3">
-            <a:schemeClr val="accent1"/>
-          </a:fillRef>
-          <a:effectRef idx="2">
-            <a:schemeClr val="accent1"/>
-          </a:effectRef>
-          <a:fontRef idx="minor">
-            <a:schemeClr val="lt1"/>
-          </a:fontRef>
-        </p:style>
-        <p:txBody>
-          <a:bodyPr rtlCol="0" anchor="ctr"/>
-          <a:lstStyle/>
-          <a:p>
-            <a:pPr algn="ctr">
-              <a:defRPr>
-                <a:latin typeface="Inter"/>
-              </a:defRPr>
-            </a:pPr>
-          </a:p>
-        </p:txBody>
-      </p:sp>
-      <p:sp>
-        <p:nvSpPr>
-          <p:cNvPr id="17" name="Rectangle 16"/>
-          <p:cNvSpPr/>
-          <p:nvPr/>
-        </p:nvSpPr>
-        <p:spPr>
-          <a:xfrm>
-            <a:off x="640080" y="4666225"/>
-            <a:ext cx="54864" cy="1551694"/>
+            <a:off x="640080" y="3826763"/>
+            <a:ext cx="54864" cy="2391156"/>
           </a:xfrm>
           <a:prstGeom prst="rect">
             <a:avLst/>
@@ -10408,13 +8659,13 @@
       </p:sp>
       <p:sp>
         <p:nvSpPr>
-          <p:cNvPr id="18" name="TextBox 17"/>
+          <p:cNvPr id="14" name="TextBox 13"/>
           <p:cNvSpPr txBox="1"/>
           <p:nvPr/>
         </p:nvSpPr>
         <p:spPr>
           <a:xfrm>
-            <a:off x="804671" y="4775953"/>
+            <a:off x="804671" y="3936491"/>
             <a:ext cx="10616184" cy="228600"/>
           </a:xfrm>
           <a:prstGeom prst="rect">
@@ -10450,14 +8701,14 @@
       </p:sp>
       <p:sp>
         <p:nvSpPr>
-          <p:cNvPr id="19" name="TextBox 18"/>
+          <p:cNvPr id="15" name="TextBox 14"/>
           <p:cNvSpPr txBox="1"/>
           <p:nvPr/>
         </p:nvSpPr>
         <p:spPr>
           <a:xfrm>
-            <a:off x="804671" y="5059417"/>
-            <a:ext cx="10616184" cy="1067062"/>
+            <a:off x="804671" y="4219955"/>
+            <a:ext cx="10616184" cy="1906524"/>
           </a:xfrm>
           <a:prstGeom prst="rect">
             <a:avLst/>
@@ -10492,7 +8743,7 @@
       </p:sp>
       <p:sp>
         <p:nvSpPr>
-          <p:cNvPr id="20" name="Rectangle 19"/>
+          <p:cNvPr id="16" name="Rectangle 15"/>
           <p:cNvSpPr/>
           <p:nvPr/>
         </p:nvSpPr>
@@ -10541,7 +8792,7 @@
       </p:sp>
       <p:sp>
         <p:nvSpPr>
-          <p:cNvPr id="21" name="TextBox 20"/>
+          <p:cNvPr id="17" name="TextBox 16"/>
           <p:cNvSpPr txBox="1"/>
           <p:nvPr/>
         </p:nvSpPr>
@@ -10583,7 +8834,7 @@
       </p:sp>
       <p:sp>
         <p:nvSpPr>
-          <p:cNvPr id="22" name="TextBox 21"/>
+          <p:cNvPr id="18" name="TextBox 17"/>
           <p:cNvSpPr txBox="1"/>
           <p:nvPr/>
         </p:nvSpPr>
@@ -10625,7 +8876,7 @@
       </p:sp>
       <p:sp>
         <p:nvSpPr>
-          <p:cNvPr id="23" name="TextBox 22"/>
+          <p:cNvPr id="19" name="TextBox 18"/>
           <p:cNvSpPr txBox="1"/>
           <p:nvPr/>
         </p:nvSpPr>
@@ -10965,7 +9216,7 @@
         <p:spPr>
           <a:xfrm>
             <a:off x="640080" y="1325880"/>
-            <a:ext cx="10908792" cy="201168"/>
+            <a:ext cx="5239512" cy="201168"/>
           </a:xfrm>
           <a:prstGeom prst="rect">
             <a:avLst/>
@@ -11008,7 +9259,7 @@
         </p:nvGraphicFramePr>
         <p:xfrm>
           <a:off x="640080" y="1600200"/>
-          <a:ext cx="10908792" cy="4617720"/>
+          <a:ext cx="5239512" cy="4617720"/>
         </p:xfrm>
         <a:graphic>
           <a:graphicData uri="http://schemas.openxmlformats.org/drawingml/2006/chart">
@@ -11024,8 +9275,8 @@
         </p:nvSpPr>
         <p:spPr>
           <a:xfrm>
-            <a:off x="640080" y="6446520"/>
-            <a:ext cx="10908792" cy="9144"/>
+            <a:off x="6080760" y="1325880"/>
+            <a:ext cx="9144" cy="4892040"/>
           </a:xfrm>
           <a:prstGeom prst="rect">
             <a:avLst/>
@@ -11073,6 +9324,115 @@
         </p:nvSpPr>
         <p:spPr>
           <a:xfrm>
+            <a:off x="6309360" y="1325880"/>
+            <a:ext cx="5239512" cy="201168"/>
+          </a:xfrm>
+          <a:prstGeom prst="rect">
+            <a:avLst/>
+          </a:prstGeom>
+          <a:noFill/>
+        </p:spPr>
+        <p:txBody>
+          <a:bodyPr wrap="none" lIns="9144" rIns="9144" tIns="9144" bIns="9144" anchor="t">
+            <a:spAutoFit/>
+          </a:bodyPr>
+          <a:lstStyle/>
+          <a:p>
+            <a:pPr algn="l">
+              <a:spcAft>
+                <a:spcPts val="0"/>
+              </a:spcAft>
+              <a:defRPr sz="720" b="1">
+                <a:solidFill>
+                  <a:srgbClr val="4A5563"/>
+                </a:solidFill>
+                <a:latin typeface="Inter"/>
+              </a:defRPr>
+            </a:pPr>
+            <a:r>
+              <a:rPr>
+                <a:latin typeface="Inter"/>
+              </a:rPr>
+              <a:t>FINDINGS BY SEVERITY</a:t>
+            </a:r>
+          </a:p>
+        </p:txBody>
+      </p:sp>
+      <p:graphicFrame>
+        <p:nvGraphicFramePr>
+          <p:cNvPr id="12" name="Chart 11"/>
+          <p:cNvGraphicFramePr>
+            <a:graphicFrameLocks noGrp="1"/>
+          </p:cNvGraphicFramePr>
+          <p:nvPr/>
+        </p:nvGraphicFramePr>
+        <p:xfrm>
+          <a:off x="6309360" y="1600200"/>
+          <a:ext cx="5239512" cy="4617720"/>
+        </p:xfrm>
+        <a:graphic>
+          <a:graphicData uri="http://schemas.openxmlformats.org/drawingml/2006/chart">
+            <c:chart xmlns:c="http://schemas.openxmlformats.org/drawingml/2006/chart" r:id="rId3"/>
+          </a:graphicData>
+        </a:graphic>
+      </p:graphicFrame>
+      <p:sp>
+        <p:nvSpPr>
+          <p:cNvPr id="13" name="Rectangle 12"/>
+          <p:cNvSpPr/>
+          <p:nvPr/>
+        </p:nvSpPr>
+        <p:spPr>
+          <a:xfrm>
+            <a:off x="640080" y="6446520"/>
+            <a:ext cx="10908792" cy="9144"/>
+          </a:xfrm>
+          <a:prstGeom prst="rect">
+            <a:avLst/>
+          </a:prstGeom>
+          <a:solidFill>
+            <a:srgbClr val="E3E7EC"/>
+          </a:solidFill>
+          <a:ln>
+            <a:solidFill>
+              <a:srgbClr val="E3E7EC"/>
+            </a:solidFill>
+          </a:ln>
+        </p:spPr>
+        <p:style>
+          <a:lnRef idx="1">
+            <a:schemeClr val="accent1"/>
+          </a:lnRef>
+          <a:fillRef idx="3">
+            <a:schemeClr val="accent1"/>
+          </a:fillRef>
+          <a:effectRef idx="2">
+            <a:schemeClr val="accent1"/>
+          </a:effectRef>
+          <a:fontRef idx="minor">
+            <a:schemeClr val="lt1"/>
+          </a:fontRef>
+        </p:style>
+        <p:txBody>
+          <a:bodyPr rtlCol="0" anchor="ctr"/>
+          <a:lstStyle/>
+          <a:p>
+            <a:pPr algn="ctr">
+              <a:defRPr>
+                <a:latin typeface="Inter"/>
+              </a:defRPr>
+            </a:pPr>
+          </a:p>
+        </p:txBody>
+      </p:sp>
+      <p:sp>
+        <p:nvSpPr>
+          <p:cNvPr id="14" name="TextBox 13"/>
+          <p:cNvSpPr txBox="1"/>
+          <p:nvPr/>
+        </p:nvSpPr>
+        <p:spPr>
+          <a:xfrm>
             <a:off x="640080" y="6501384"/>
             <a:ext cx="4297680" cy="146304"/>
           </a:xfrm>
@@ -11109,7 +9469,7 @@
       </p:sp>
       <p:sp>
         <p:nvSpPr>
-          <p:cNvPr id="12" name="TextBox 11"/>
+          <p:cNvPr id="15" name="TextBox 14"/>
           <p:cNvSpPr txBox="1"/>
           <p:nvPr/>
         </p:nvSpPr>
@@ -11151,7 +9511,7 @@
       </p:sp>
       <p:sp>
         <p:nvSpPr>
-          <p:cNvPr id="13" name="TextBox 12"/>
+          <p:cNvPr id="16" name="TextBox 15"/>
           <p:cNvSpPr txBox="1"/>
           <p:nvPr/>
         </p:nvSpPr>
@@ -11519,532 +9879,6 @@
               <a:rPr>
                 <a:latin typeface="Inter"/>
               </a:rPr>
-              <a:t>FINDINGS BY SEVERITY</a:t>
-            </a:r>
-          </a:p>
-        </p:txBody>
-      </p:sp>
-      <p:graphicFrame>
-        <p:nvGraphicFramePr>
-          <p:cNvPr id="9" name="Chart 8"/>
-          <p:cNvGraphicFramePr>
-            <a:graphicFrameLocks noGrp="1"/>
-          </p:cNvGraphicFramePr>
-          <p:nvPr/>
-        </p:nvGraphicFramePr>
-        <p:xfrm>
-          <a:off x="640080" y="1600200"/>
-          <a:ext cx="10908792" cy="4617720"/>
-        </p:xfrm>
-        <a:graphic>
-          <a:graphicData uri="http://schemas.openxmlformats.org/drawingml/2006/chart">
-            <c:chart xmlns:c="http://schemas.openxmlformats.org/drawingml/2006/chart" r:id="rId2"/>
-          </a:graphicData>
-        </a:graphic>
-      </p:graphicFrame>
-      <p:sp>
-        <p:nvSpPr>
-          <p:cNvPr id="10" name="Rectangle 9"/>
-          <p:cNvSpPr/>
-          <p:nvPr/>
-        </p:nvSpPr>
-        <p:spPr>
-          <a:xfrm>
-            <a:off x="640080" y="6446520"/>
-            <a:ext cx="10908792" cy="9144"/>
-          </a:xfrm>
-          <a:prstGeom prst="rect">
-            <a:avLst/>
-          </a:prstGeom>
-          <a:solidFill>
-            <a:srgbClr val="E3E7EC"/>
-          </a:solidFill>
-          <a:ln>
-            <a:solidFill>
-              <a:srgbClr val="E3E7EC"/>
-            </a:solidFill>
-          </a:ln>
-        </p:spPr>
-        <p:style>
-          <a:lnRef idx="1">
-            <a:schemeClr val="accent1"/>
-          </a:lnRef>
-          <a:fillRef idx="3">
-            <a:schemeClr val="accent1"/>
-          </a:fillRef>
-          <a:effectRef idx="2">
-            <a:schemeClr val="accent1"/>
-          </a:effectRef>
-          <a:fontRef idx="minor">
-            <a:schemeClr val="lt1"/>
-          </a:fontRef>
-        </p:style>
-        <p:txBody>
-          <a:bodyPr rtlCol="0" anchor="ctr"/>
-          <a:lstStyle/>
-          <a:p>
-            <a:pPr algn="ctr">
-              <a:defRPr>
-                <a:latin typeface="Inter"/>
-              </a:defRPr>
-            </a:pPr>
-          </a:p>
-        </p:txBody>
-      </p:sp>
-      <p:sp>
-        <p:nvSpPr>
-          <p:cNvPr id="11" name="TextBox 10"/>
-          <p:cNvSpPr txBox="1"/>
-          <p:nvPr/>
-        </p:nvSpPr>
-        <p:spPr>
-          <a:xfrm>
-            <a:off x="640080" y="6501384"/>
-            <a:ext cx="4297680" cy="146304"/>
-          </a:xfrm>
-          <a:prstGeom prst="rect">
-            <a:avLst/>
-          </a:prstGeom>
-          <a:noFill/>
-        </p:spPr>
-        <p:txBody>
-          <a:bodyPr wrap="none" lIns="9144" rIns="9144" tIns="9144" bIns="9144" anchor="t">
-            <a:spAutoFit/>
-          </a:bodyPr>
-          <a:lstStyle/>
-          <a:p>
-            <a:pPr algn="l">
-              <a:spcAft>
-                <a:spcPts val="0"/>
-              </a:spcAft>
-              <a:defRPr sz="650" b="0">
-                <a:solidFill>
-                  <a:srgbClr val="8A94A1"/>
-                </a:solidFill>
-                <a:latin typeface="Inter"/>
-              </a:defRPr>
-            </a:pPr>
-            <a:r>
-              <a:rPr>
-                <a:latin typeface="Inter"/>
-              </a:rPr>
-              <a:t>Sources: none cited</a:t>
-            </a:r>
-          </a:p>
-        </p:txBody>
-      </p:sp>
-      <p:sp>
-        <p:nvSpPr>
-          <p:cNvPr id="12" name="TextBox 11"/>
-          <p:cNvSpPr txBox="1"/>
-          <p:nvPr/>
-        </p:nvSpPr>
-        <p:spPr>
-          <a:xfrm>
-            <a:off x="4480560" y="6501384"/>
-            <a:ext cx="5303520" cy="146304"/>
-          </a:xfrm>
-          <a:prstGeom prst="rect">
-            <a:avLst/>
-          </a:prstGeom>
-          <a:noFill/>
-        </p:spPr>
-        <p:txBody>
-          <a:bodyPr wrap="none" lIns="9144" rIns="9144" tIns="9144" bIns="9144" anchor="t">
-            <a:spAutoFit/>
-          </a:bodyPr>
-          <a:lstStyle/>
-          <a:p>
-            <a:pPr algn="ctr">
-              <a:spcAft>
-                <a:spcPts val="0"/>
-              </a:spcAft>
-              <a:defRPr sz="650" b="0">
-                <a:solidFill>
-                  <a:srgbClr val="8A94A1"/>
-                </a:solidFill>
-                <a:latin typeface="Inter"/>
-              </a:defRPr>
-            </a:pPr>
-            <a:r>
-              <a:rPr>
-                <a:latin typeface="Inter"/>
-              </a:rPr>
-              <a:t>Confidential — performance standards review · Data as of 2026-06-30</a:t>
-            </a:r>
-          </a:p>
-        </p:txBody>
-      </p:sp>
-      <p:sp>
-        <p:nvSpPr>
-          <p:cNvPr id="13" name="TextBox 12"/>
-          <p:cNvSpPr txBox="1"/>
-          <p:nvPr/>
-        </p:nvSpPr>
-        <p:spPr>
-          <a:xfrm>
-            <a:off x="10287000" y="6501384"/>
-            <a:ext cx="1261872" cy="146304"/>
-          </a:xfrm>
-          <a:prstGeom prst="rect">
-            <a:avLst/>
-          </a:prstGeom>
-          <a:noFill/>
-        </p:spPr>
-        <p:txBody>
-          <a:bodyPr wrap="none" lIns="9144" rIns="9144" tIns="9144" bIns="9144" anchor="t">
-            <a:spAutoFit/>
-          </a:bodyPr>
-          <a:lstStyle/>
-          <a:p>
-            <a:pPr algn="r">
-              <a:spcAft>
-                <a:spcPts val="0"/>
-              </a:spcAft>
-              <a:defRPr sz="650" b="0">
-                <a:solidFill>
-                  <a:srgbClr val="8A94A1"/>
-                </a:solidFill>
-                <a:latin typeface="Inter"/>
-              </a:defRPr>
-            </a:pPr>
-            <a:r>
-              <a:rPr>
-                <a:latin typeface="Inter"/>
-              </a:rPr>
-              <a:t>6</a:t>
-            </a:r>
-          </a:p>
-        </p:txBody>
-      </p:sp>
-    </p:spTree>
-  </p:cSld>
-  <p:clrMapOvr>
-    <a:masterClrMapping/>
-  </p:clrMapOvr>
-</p:sld>
-</file>
-
-<file path=ppt/slides/slide7.xml><?xml version="1.0" encoding="utf-8"?>
-<p:sld xmlns:a="http://schemas.openxmlformats.org/drawingml/2006/main" xmlns:p="http://schemas.openxmlformats.org/presentationml/2006/main" xmlns:r="http://schemas.openxmlformats.org/officeDocument/2006/relationships">
-  <p:cSld>
-    <p:spTree>
-      <p:nvGrpSpPr>
-        <p:cNvPr id="1" name=""/>
-        <p:cNvGrpSpPr/>
-        <p:nvPr/>
-      </p:nvGrpSpPr>
-      <p:grpSpPr/>
-      <p:sp>
-        <p:nvSpPr>
-          <p:cNvPr id="2" name="Rectangle 1"/>
-          <p:cNvSpPr/>
-          <p:nvPr/>
-        </p:nvSpPr>
-        <p:spPr>
-          <a:xfrm>
-            <a:off x="0" y="0"/>
-            <a:ext cx="12191695" cy="6858000"/>
-          </a:xfrm>
-          <a:prstGeom prst="rect">
-            <a:avLst/>
-          </a:prstGeom>
-          <a:solidFill>
-            <a:srgbClr val="FFFFFF"/>
-          </a:solidFill>
-          <a:ln>
-            <a:solidFill>
-              <a:srgbClr val="FFFFFF"/>
-            </a:solidFill>
-          </a:ln>
-        </p:spPr>
-        <p:style>
-          <a:lnRef idx="1">
-            <a:schemeClr val="accent1"/>
-          </a:lnRef>
-          <a:fillRef idx="3">
-            <a:schemeClr val="accent1"/>
-          </a:fillRef>
-          <a:effectRef idx="2">
-            <a:schemeClr val="accent1"/>
-          </a:effectRef>
-          <a:fontRef idx="minor">
-            <a:schemeClr val="lt1"/>
-          </a:fontRef>
-        </p:style>
-        <p:txBody>
-          <a:bodyPr rtlCol="0" anchor="ctr"/>
-          <a:lstStyle/>
-          <a:p>
-            <a:pPr algn="ctr">
-              <a:defRPr>
-                <a:latin typeface="Inter"/>
-              </a:defRPr>
-            </a:pPr>
-          </a:p>
-        </p:txBody>
-      </p:sp>
-      <p:sp>
-        <p:nvSpPr>
-          <p:cNvPr id="3" name="TextBox 2"/>
-          <p:cNvSpPr txBox="1"/>
-          <p:nvPr/>
-        </p:nvSpPr>
-        <p:spPr>
-          <a:xfrm>
-            <a:off x="5897880" y="310896"/>
-            <a:ext cx="4800600" cy="256032"/>
-          </a:xfrm>
-          <a:prstGeom prst="rect">
-            <a:avLst/>
-          </a:prstGeom>
-          <a:noFill/>
-        </p:spPr>
-        <p:txBody>
-          <a:bodyPr wrap="none" lIns="9144" rIns="9144" tIns="9144" bIns="9144" anchor="t">
-            <a:spAutoFit/>
-          </a:bodyPr>
-          <a:lstStyle/>
-          <a:p>
-            <a:pPr algn="r">
-              <a:spcAft>
-                <a:spcPts val="0"/>
-              </a:spcAft>
-              <a:defRPr sz="680" b="1">
-                <a:solidFill>
-                  <a:srgbClr val="4F6B00"/>
-                </a:solidFill>
-                <a:latin typeface="Inter"/>
-              </a:defRPr>
-            </a:pPr>
-            <a:r>
-              <a:rPr>
-                <a:latin typeface="Inter"/>
-              </a:rPr>
-              <a:t>Illustrative, Gradient Maintained — demo data, not the client's holdings or managers</a:t>
-            </a:r>
-          </a:p>
-        </p:txBody>
-      </p:sp>
-      <p:sp>
-        <p:nvSpPr>
-          <p:cNvPr id="4" name="TextBox 3"/>
-          <p:cNvSpPr txBox="1"/>
-          <p:nvPr/>
-        </p:nvSpPr>
-        <p:spPr>
-          <a:xfrm>
-            <a:off x="640080" y="566928"/>
-            <a:ext cx="10058400" cy="530352"/>
-          </a:xfrm>
-          <a:prstGeom prst="rect">
-            <a:avLst/>
-          </a:prstGeom>
-          <a:noFill/>
-        </p:spPr>
-        <p:txBody>
-          <a:bodyPr wrap="none" lIns="9144" rIns="9144" tIns="9144" bIns="9144" anchor="t">
-            <a:spAutoFit/>
-          </a:bodyPr>
-          <a:lstStyle/>
-          <a:p>
-            <a:pPr algn="l">
-              <a:spcAft>
-                <a:spcPts val="0"/>
-              </a:spcAft>
-              <a:defRPr sz="2300" b="1">
-                <a:solidFill>
-                  <a:srgbClr val="0D1117"/>
-                </a:solidFill>
-                <a:latin typeface="Inter"/>
-              </a:defRPr>
-            </a:pPr>
-            <a:r>
-              <a:rPr>
-                <a:latin typeface="Inter"/>
-              </a:rPr>
-              <a:t>Findings — continued</a:t>
-            </a:r>
-          </a:p>
-        </p:txBody>
-      </p:sp>
-      <p:sp>
-        <p:nvSpPr>
-          <p:cNvPr id="5" name="Rectangle 4"/>
-          <p:cNvSpPr/>
-          <p:nvPr/>
-        </p:nvSpPr>
-        <p:spPr>
-          <a:xfrm>
-            <a:off x="640080" y="1115568"/>
-            <a:ext cx="10908792" cy="18288"/>
-          </a:xfrm>
-          <a:prstGeom prst="rect">
-            <a:avLst/>
-          </a:prstGeom>
-          <a:solidFill>
-            <a:srgbClr val="0D1117"/>
-          </a:solidFill>
-          <a:ln>
-            <a:solidFill>
-              <a:srgbClr val="0D1117"/>
-            </a:solidFill>
-          </a:ln>
-        </p:spPr>
-        <p:style>
-          <a:lnRef idx="1">
-            <a:schemeClr val="accent1"/>
-          </a:lnRef>
-          <a:fillRef idx="3">
-            <a:schemeClr val="accent1"/>
-          </a:fillRef>
-          <a:effectRef idx="2">
-            <a:schemeClr val="accent1"/>
-          </a:effectRef>
-          <a:fontRef idx="minor">
-            <a:schemeClr val="lt1"/>
-          </a:fontRef>
-        </p:style>
-        <p:txBody>
-          <a:bodyPr rtlCol="0" anchor="ctr"/>
-          <a:lstStyle/>
-          <a:p>
-            <a:pPr algn="ctr">
-              <a:defRPr>
-                <a:latin typeface="Inter"/>
-              </a:defRPr>
-            </a:pPr>
-          </a:p>
-        </p:txBody>
-      </p:sp>
-      <p:sp>
-        <p:nvSpPr>
-          <p:cNvPr id="6" name="Rectangle 5"/>
-          <p:cNvSpPr/>
-          <p:nvPr/>
-        </p:nvSpPr>
-        <p:spPr>
-          <a:xfrm>
-            <a:off x="11018520" y="502920"/>
-            <a:ext cx="530352" cy="393192"/>
-          </a:xfrm>
-          <a:prstGeom prst="rect">
-            <a:avLst/>
-          </a:prstGeom>
-          <a:solidFill>
-            <a:srgbClr val="C6F432"/>
-          </a:solidFill>
-          <a:ln>
-            <a:solidFill>
-              <a:srgbClr val="C6F432"/>
-            </a:solidFill>
-          </a:ln>
-        </p:spPr>
-        <p:style>
-          <a:lnRef idx="1">
-            <a:schemeClr val="accent1"/>
-          </a:lnRef>
-          <a:fillRef idx="3">
-            <a:schemeClr val="accent1"/>
-          </a:fillRef>
-          <a:effectRef idx="2">
-            <a:schemeClr val="accent1"/>
-          </a:effectRef>
-          <a:fontRef idx="minor">
-            <a:schemeClr val="lt1"/>
-          </a:fontRef>
-        </p:style>
-        <p:txBody>
-          <a:bodyPr rtlCol="0" anchor="ctr"/>
-          <a:lstStyle/>
-          <a:p>
-            <a:pPr algn="ctr">
-              <a:defRPr>
-                <a:latin typeface="Inter"/>
-              </a:defRPr>
-            </a:pPr>
-          </a:p>
-        </p:txBody>
-      </p:sp>
-      <p:sp>
-        <p:nvSpPr>
-          <p:cNvPr id="7" name="TextBox 6"/>
-          <p:cNvSpPr txBox="1"/>
-          <p:nvPr/>
-        </p:nvSpPr>
-        <p:spPr>
-          <a:xfrm>
-            <a:off x="11045952" y="557784"/>
-            <a:ext cx="475488" cy="182880"/>
-          </a:xfrm>
-          <a:prstGeom prst="rect">
-            <a:avLst/>
-          </a:prstGeom>
-          <a:noFill/>
-        </p:spPr>
-        <p:txBody>
-          <a:bodyPr wrap="none" lIns="9144" rIns="9144" tIns="9144" bIns="9144" anchor="t">
-            <a:spAutoFit/>
-          </a:bodyPr>
-          <a:lstStyle/>
-          <a:p>
-            <a:pPr algn="ctr">
-              <a:spcAft>
-                <a:spcPts val="0"/>
-              </a:spcAft>
-              <a:defRPr sz="1000" b="1">
-                <a:solidFill>
-                  <a:srgbClr val="0D1117"/>
-                </a:solidFill>
-                <a:latin typeface="Inter"/>
-              </a:defRPr>
-            </a:pPr>
-            <a:r>
-              <a:rPr>
-                <a:latin typeface="Inter"/>
-              </a:rPr>
-              <a:t>02</a:t>
-            </a:r>
-          </a:p>
-        </p:txBody>
-      </p:sp>
-      <p:sp>
-        <p:nvSpPr>
-          <p:cNvPr id="8" name="TextBox 7"/>
-          <p:cNvSpPr txBox="1"/>
-          <p:nvPr/>
-        </p:nvSpPr>
-        <p:spPr>
-          <a:xfrm>
-            <a:off x="640080" y="1325880"/>
-            <a:ext cx="10908792" cy="201168"/>
-          </a:xfrm>
-          <a:prstGeom prst="rect">
-            <a:avLst/>
-          </a:prstGeom>
-          <a:noFill/>
-        </p:spPr>
-        <p:txBody>
-          <a:bodyPr wrap="none" lIns="9144" rIns="9144" tIns="9144" bIns="9144" anchor="t">
-            <a:spAutoFit/>
-          </a:bodyPr>
-          <a:lstStyle/>
-          <a:p>
-            <a:pPr algn="l">
-              <a:spcAft>
-                <a:spcPts val="0"/>
-              </a:spcAft>
-              <a:defRPr sz="720" b="1">
-                <a:solidFill>
-                  <a:srgbClr val="4A5563"/>
-                </a:solidFill>
-                <a:latin typeface="Inter"/>
-              </a:defRPr>
-            </a:pPr>
-            <a:r>
-              <a:rPr>
-                <a:latin typeface="Inter"/>
-              </a:rPr>
               <a:t>PRIORITY FINDINGS</a:t>
             </a:r>
           </a:p>
@@ -12060,7 +9894,7 @@
         </p:nvGraphicFramePr>
         <p:xfrm>
           <a:off x="640080" y="1600200"/>
-          <a:ext cx="10908792" cy="2105660"/>
+          <a:ext cx="10908792" cy="1843833"/>
         </p:xfrm>
         <a:graphic>
           <a:graphicData uri="http://schemas.openxmlformats.org/drawingml/2006/table">
@@ -12073,7 +9907,7 @@
                 <a:gridCol w="4448556"/>
                 <a:gridCol w="4448556"/>
               </a:tblGrid>
-              <a:tr h="526415">
+              <a:tr h="460958">
                 <a:tc>
                   <a:txBody>
                     <a:bodyPr/>
@@ -12156,7 +9990,7 @@
                   </a:tcPr>
                 </a:tc>
               </a:tr>
-              <a:tr h="526415">
+              <a:tr h="460958">
                 <a:tc>
                   <a:txBody>
                     <a:bodyPr/>
@@ -12239,7 +10073,7 @@
                   </a:tcPr>
                 </a:tc>
               </a:tr>
-              <a:tr h="526415">
+              <a:tr h="460958">
                 <a:tc>
                   <a:txBody>
                     <a:bodyPr/>
@@ -12322,7 +10156,7 @@
                   </a:tcPr>
                 </a:tc>
               </a:tr>
-              <a:tr h="526415">
+              <a:tr h="460959">
                 <a:tc>
                   <a:txBody>
                     <a:bodyPr/>
@@ -12417,8 +10251,8 @@
         </p:nvSpPr>
         <p:spPr>
           <a:xfrm>
-            <a:off x="640080" y="3815588"/>
-            <a:ext cx="10908792" cy="1081809"/>
+            <a:off x="640080" y="3553761"/>
+            <a:ext cx="10908792" cy="661923"/>
           </a:xfrm>
           <a:prstGeom prst="rect">
             <a:avLst/>
@@ -12467,8 +10301,8 @@
         </p:nvSpPr>
         <p:spPr>
           <a:xfrm>
-            <a:off x="640080" y="5007125"/>
-            <a:ext cx="10908792" cy="1210794"/>
+            <a:off x="640080" y="4325412"/>
+            <a:ext cx="10908792" cy="891389"/>
           </a:xfrm>
           <a:prstGeom prst="rect">
             <a:avLst/>
@@ -12516,8 +10350,8 @@
         </p:nvSpPr>
         <p:spPr>
           <a:xfrm>
-            <a:off x="640080" y="5007125"/>
-            <a:ext cx="54864" cy="1210794"/>
+            <a:off x="640080" y="4325412"/>
+            <a:ext cx="54864" cy="891389"/>
           </a:xfrm>
           <a:prstGeom prst="rect">
             <a:avLst/>
@@ -12565,7 +10399,7 @@
         </p:nvSpPr>
         <p:spPr>
           <a:xfrm>
-            <a:off x="804671" y="5116853"/>
+            <a:off x="804671" y="4435140"/>
             <a:ext cx="10616184" cy="228600"/>
           </a:xfrm>
           <a:prstGeom prst="rect">
@@ -12607,8 +10441,8 @@
         </p:nvSpPr>
         <p:spPr>
           <a:xfrm>
-            <a:off x="804671" y="5400317"/>
-            <a:ext cx="10616184" cy="726162"/>
+            <a:off x="804671" y="4718604"/>
+            <a:ext cx="10616184" cy="406757"/>
           </a:xfrm>
           <a:prstGeom prst="rect">
             <a:avLst/>
@@ -12644,6 +10478,188 @@
       <p:sp>
         <p:nvSpPr>
           <p:cNvPr id="15" name="Rectangle 14"/>
+          <p:cNvSpPr/>
+          <p:nvPr/>
+        </p:nvSpPr>
+        <p:spPr>
+          <a:xfrm>
+            <a:off x="640080" y="5326530"/>
+            <a:ext cx="10908792" cy="891389"/>
+          </a:xfrm>
+          <a:prstGeom prst="rect">
+            <a:avLst/>
+          </a:prstGeom>
+          <a:solidFill>
+            <a:srgbClr val="F5F7F9"/>
+          </a:solidFill>
+          <a:ln>
+            <a:solidFill>
+              <a:srgbClr val="E3E7EC"/>
+            </a:solidFill>
+          </a:ln>
+        </p:spPr>
+        <p:style>
+          <a:lnRef idx="1">
+            <a:schemeClr val="accent1"/>
+          </a:lnRef>
+          <a:fillRef idx="3">
+            <a:schemeClr val="accent1"/>
+          </a:fillRef>
+          <a:effectRef idx="2">
+            <a:schemeClr val="accent1"/>
+          </a:effectRef>
+          <a:fontRef idx="minor">
+            <a:schemeClr val="lt1"/>
+          </a:fontRef>
+        </p:style>
+        <p:txBody>
+          <a:bodyPr rtlCol="0" anchor="ctr"/>
+          <a:lstStyle/>
+          <a:p>
+            <a:pPr algn="ctr">
+              <a:defRPr>
+                <a:latin typeface="Inter"/>
+              </a:defRPr>
+            </a:pPr>
+          </a:p>
+        </p:txBody>
+      </p:sp>
+      <p:sp>
+        <p:nvSpPr>
+          <p:cNvPr id="16" name="Rectangle 15"/>
+          <p:cNvSpPr/>
+          <p:nvPr/>
+        </p:nvSpPr>
+        <p:spPr>
+          <a:xfrm>
+            <a:off x="640080" y="5326530"/>
+            <a:ext cx="54864" cy="891389"/>
+          </a:xfrm>
+          <a:prstGeom prst="rect">
+            <a:avLst/>
+          </a:prstGeom>
+          <a:solidFill>
+            <a:srgbClr val="F2A93B"/>
+          </a:solidFill>
+          <a:ln>
+            <a:solidFill>
+              <a:srgbClr val="F2A93B"/>
+            </a:solidFill>
+          </a:ln>
+        </p:spPr>
+        <p:style>
+          <a:lnRef idx="1">
+            <a:schemeClr val="accent1"/>
+          </a:lnRef>
+          <a:fillRef idx="3">
+            <a:schemeClr val="accent1"/>
+          </a:fillRef>
+          <a:effectRef idx="2">
+            <a:schemeClr val="accent1"/>
+          </a:effectRef>
+          <a:fontRef idx="minor">
+            <a:schemeClr val="lt1"/>
+          </a:fontRef>
+        </p:style>
+        <p:txBody>
+          <a:bodyPr rtlCol="0" anchor="ctr"/>
+          <a:lstStyle/>
+          <a:p>
+            <a:pPr algn="ctr">
+              <a:defRPr>
+                <a:latin typeface="Inter"/>
+              </a:defRPr>
+            </a:pPr>
+          </a:p>
+        </p:txBody>
+      </p:sp>
+      <p:sp>
+        <p:nvSpPr>
+          <p:cNvPr id="17" name="TextBox 16"/>
+          <p:cNvSpPr txBox="1"/>
+          <p:nvPr/>
+        </p:nvSpPr>
+        <p:spPr>
+          <a:xfrm>
+            <a:off x="804671" y="5436258"/>
+            <a:ext cx="10616184" cy="228600"/>
+          </a:xfrm>
+          <a:prstGeom prst="rect">
+            <a:avLst/>
+          </a:prstGeom>
+          <a:noFill/>
+        </p:spPr>
+        <p:txBody>
+          <a:bodyPr wrap="none" lIns="9144" rIns="9144" tIns="9144" bIns="9144" anchor="t">
+            <a:spAutoFit/>
+          </a:bodyPr>
+          <a:lstStyle/>
+          <a:p>
+            <a:pPr algn="l">
+              <a:spcAft>
+                <a:spcPts val="0"/>
+              </a:spcAft>
+              <a:defRPr sz="1000" b="1">
+                <a:solidFill>
+                  <a:srgbClr val="0D1117"/>
+                </a:solidFill>
+                <a:latin typeface="Inter"/>
+              </a:defRPr>
+            </a:pPr>
+            <a:r>
+              <a:rPr>
+                <a:latin typeface="Inter"/>
+              </a:rPr>
+              <a:t>Analysis — oversight controls are not evidenced</a:t>
+            </a:r>
+          </a:p>
+        </p:txBody>
+      </p:sp>
+      <p:sp>
+        <p:nvSpPr>
+          <p:cNvPr id="18" name="TextBox 17"/>
+          <p:cNvSpPr txBox="1"/>
+          <p:nvPr/>
+        </p:nvSpPr>
+        <p:spPr>
+          <a:xfrm>
+            <a:off x="804671" y="5719722"/>
+            <a:ext cx="10616184" cy="406757"/>
+          </a:xfrm>
+          <a:prstGeom prst="rect">
+            <a:avLst/>
+          </a:prstGeom>
+          <a:noFill/>
+        </p:spPr>
+        <p:txBody>
+          <a:bodyPr wrap="none" lIns="9144" rIns="9144" tIns="9144" bIns="9144" anchor="t">
+            <a:spAutoFit/>
+          </a:bodyPr>
+          <a:lstStyle/>
+          <a:p>
+            <a:pPr algn="l">
+              <a:spcAft>
+                <a:spcPts val="0"/>
+              </a:spcAft>
+              <a:defRPr sz="950" b="0">
+                <a:solidFill>
+                  <a:srgbClr val="4A5563"/>
+                </a:solidFill>
+                <a:latin typeface="Inter"/>
+              </a:defRPr>
+            </a:pPr>
+            <a:r>
+              <a:rPr>
+                <a:latin typeface="Inter"/>
+              </a:rPr>
+              <a:t>Observation: Two control policies, valuation and error correction, are absent [S3]. Why it matters: Reporting oversight cannot be assessed without both policies. Uncertainty: The reviewed custodian package may…</a:t>
+            </a:r>
+          </a:p>
+        </p:txBody>
+      </p:sp>
+      <p:sp>
+        <p:nvSpPr>
+          <p:cNvPr id="19" name="Rectangle 18"/>
           <p:cNvSpPr/>
           <p:nvPr/>
         </p:nvSpPr>
@@ -12692,7 +10708,7 @@
       </p:sp>
       <p:sp>
         <p:nvSpPr>
-          <p:cNvPr id="16" name="TextBox 15"/>
+          <p:cNvPr id="20" name="TextBox 19"/>
           <p:cNvSpPr txBox="1"/>
           <p:nvPr/>
         </p:nvSpPr>
@@ -12734,7 +10750,7 @@
       </p:sp>
       <p:sp>
         <p:nvSpPr>
-          <p:cNvPr id="17" name="TextBox 16"/>
+          <p:cNvPr id="21" name="TextBox 20"/>
           <p:cNvSpPr txBox="1"/>
           <p:nvPr/>
         </p:nvSpPr>
@@ -12776,7 +10792,7 @@
       </p:sp>
       <p:sp>
         <p:nvSpPr>
-          <p:cNvPr id="18" name="TextBox 17"/>
+          <p:cNvPr id="22" name="TextBox 21"/>
           <p:cNvSpPr txBox="1"/>
           <p:nvPr/>
         </p:nvSpPr>
@@ -12811,7 +10827,7 @@
               <a:rPr>
                 <a:latin typeface="Inter"/>
               </a:rPr>
-              <a:t>7</a:t>
+              <a:t>6</a:t>
             </a:r>
           </a:p>
         </p:txBody>
@@ -12824,7 +10840,7 @@
 </p:sld>
 </file>
 
-<file path=ppt/slides/slide8.xml><?xml version="1.0" encoding="utf-8"?>
+<file path=ppt/slides/slide7.xml><?xml version="1.0" encoding="utf-8"?>
 <p:sld xmlns:a="http://schemas.openxmlformats.org/drawingml/2006/main" xmlns:p="http://schemas.openxmlformats.org/presentationml/2006/main" xmlns:r="http://schemas.openxmlformats.org/officeDocument/2006/relationships">
   <p:cSld>
     <p:spTree>
@@ -12962,7 +10978,7 @@
               <a:rPr>
                 <a:latin typeface="Inter"/>
               </a:rPr>
-              <a:t>Findings — continued</a:t>
+              <a:t>Oversight summary</a:t>
             </a:r>
           </a:p>
         </p:txBody>
@@ -13102,654 +11118,6 @@
               <a:rPr>
                 <a:latin typeface="Inter"/>
               </a:rPr>
-              <a:t>02</a:t>
-            </a:r>
-          </a:p>
-        </p:txBody>
-      </p:sp>
-      <p:sp>
-        <p:nvSpPr>
-          <p:cNvPr id="8" name="Rectangle 7"/>
-          <p:cNvSpPr/>
-          <p:nvPr/>
-        </p:nvSpPr>
-        <p:spPr>
-          <a:xfrm>
-            <a:off x="640080" y="1325880"/>
-            <a:ext cx="10908792" cy="4892040"/>
-          </a:xfrm>
-          <a:prstGeom prst="rect">
-            <a:avLst/>
-          </a:prstGeom>
-          <a:solidFill>
-            <a:srgbClr val="F5F7F9"/>
-          </a:solidFill>
-          <a:ln>
-            <a:solidFill>
-              <a:srgbClr val="E3E7EC"/>
-            </a:solidFill>
-          </a:ln>
-        </p:spPr>
-        <p:style>
-          <a:lnRef idx="1">
-            <a:schemeClr val="accent1"/>
-          </a:lnRef>
-          <a:fillRef idx="3">
-            <a:schemeClr val="accent1"/>
-          </a:fillRef>
-          <a:effectRef idx="2">
-            <a:schemeClr val="accent1"/>
-          </a:effectRef>
-          <a:fontRef idx="minor">
-            <a:schemeClr val="lt1"/>
-          </a:fontRef>
-        </p:style>
-        <p:txBody>
-          <a:bodyPr rtlCol="0" anchor="ctr"/>
-          <a:lstStyle/>
-          <a:p>
-            <a:pPr algn="ctr">
-              <a:defRPr>
-                <a:latin typeface="Inter"/>
-              </a:defRPr>
-            </a:pPr>
-          </a:p>
-        </p:txBody>
-      </p:sp>
-      <p:sp>
-        <p:nvSpPr>
-          <p:cNvPr id="9" name="Rectangle 8"/>
-          <p:cNvSpPr/>
-          <p:nvPr/>
-        </p:nvSpPr>
-        <p:spPr>
-          <a:xfrm>
-            <a:off x="640080" y="1325880"/>
-            <a:ext cx="54864" cy="4892040"/>
-          </a:xfrm>
-          <a:prstGeom prst="rect">
-            <a:avLst/>
-          </a:prstGeom>
-          <a:solidFill>
-            <a:srgbClr val="F2A93B"/>
-          </a:solidFill>
-          <a:ln>
-            <a:solidFill>
-              <a:srgbClr val="F2A93B"/>
-            </a:solidFill>
-          </a:ln>
-        </p:spPr>
-        <p:style>
-          <a:lnRef idx="1">
-            <a:schemeClr val="accent1"/>
-          </a:lnRef>
-          <a:fillRef idx="3">
-            <a:schemeClr val="accent1"/>
-          </a:fillRef>
-          <a:effectRef idx="2">
-            <a:schemeClr val="accent1"/>
-          </a:effectRef>
-          <a:fontRef idx="minor">
-            <a:schemeClr val="lt1"/>
-          </a:fontRef>
-        </p:style>
-        <p:txBody>
-          <a:bodyPr rtlCol="0" anchor="ctr"/>
-          <a:lstStyle/>
-          <a:p>
-            <a:pPr algn="ctr">
-              <a:defRPr>
-                <a:latin typeface="Inter"/>
-              </a:defRPr>
-            </a:pPr>
-          </a:p>
-        </p:txBody>
-      </p:sp>
-      <p:sp>
-        <p:nvSpPr>
-          <p:cNvPr id="10" name="TextBox 9"/>
-          <p:cNvSpPr txBox="1"/>
-          <p:nvPr/>
-        </p:nvSpPr>
-        <p:spPr>
-          <a:xfrm>
-            <a:off x="804671" y="1435607"/>
-            <a:ext cx="10616184" cy="228600"/>
-          </a:xfrm>
-          <a:prstGeom prst="rect">
-            <a:avLst/>
-          </a:prstGeom>
-          <a:noFill/>
-        </p:spPr>
-        <p:txBody>
-          <a:bodyPr wrap="none" lIns="9144" rIns="9144" tIns="9144" bIns="9144" anchor="t">
-            <a:spAutoFit/>
-          </a:bodyPr>
-          <a:lstStyle/>
-          <a:p>
-            <a:pPr algn="l">
-              <a:spcAft>
-                <a:spcPts val="0"/>
-              </a:spcAft>
-              <a:defRPr sz="1000" b="1">
-                <a:solidFill>
-                  <a:srgbClr val="0D1117"/>
-                </a:solidFill>
-                <a:latin typeface="Inter"/>
-              </a:defRPr>
-            </a:pPr>
-            <a:r>
-              <a:rPr>
-                <a:latin typeface="Inter"/>
-              </a:rPr>
-              <a:t>Analysis — oversight controls are not evidenced</a:t>
-            </a:r>
-          </a:p>
-        </p:txBody>
-      </p:sp>
-      <p:sp>
-        <p:nvSpPr>
-          <p:cNvPr id="11" name="TextBox 10"/>
-          <p:cNvSpPr txBox="1"/>
-          <p:nvPr/>
-        </p:nvSpPr>
-        <p:spPr>
-          <a:xfrm>
-            <a:off x="804671" y="1719072"/>
-            <a:ext cx="10616184" cy="4407408"/>
-          </a:xfrm>
-          <a:prstGeom prst="rect">
-            <a:avLst/>
-          </a:prstGeom>
-          <a:noFill/>
-        </p:spPr>
-        <p:txBody>
-          <a:bodyPr wrap="none" lIns="9144" rIns="9144" tIns="9144" bIns="9144" anchor="t">
-            <a:spAutoFit/>
-          </a:bodyPr>
-          <a:lstStyle/>
-          <a:p>
-            <a:pPr algn="l">
-              <a:spcAft>
-                <a:spcPts val="0"/>
-              </a:spcAft>
-              <a:defRPr sz="950" b="0">
-                <a:solidFill>
-                  <a:srgbClr val="4A5563"/>
-                </a:solidFill>
-                <a:latin typeface="Inter"/>
-              </a:defRPr>
-            </a:pPr>
-            <a:r>
-              <a:rPr>
-                <a:latin typeface="Inter"/>
-              </a:rPr>
-              <a:t>Observation: Two control policies, valuation and error correction, are absent [S3]. Why it matters: Reporting oversight cannot be assessed without both policies. Uncertainty: The reviewed custodian package may…</a:t>
-            </a:r>
-          </a:p>
-        </p:txBody>
-      </p:sp>
-      <p:sp>
-        <p:nvSpPr>
-          <p:cNvPr id="12" name="Rectangle 11"/>
-          <p:cNvSpPr/>
-          <p:nvPr/>
-        </p:nvSpPr>
-        <p:spPr>
-          <a:xfrm>
-            <a:off x="640080" y="6446520"/>
-            <a:ext cx="10908792" cy="9144"/>
-          </a:xfrm>
-          <a:prstGeom prst="rect">
-            <a:avLst/>
-          </a:prstGeom>
-          <a:solidFill>
-            <a:srgbClr val="E3E7EC"/>
-          </a:solidFill>
-          <a:ln>
-            <a:solidFill>
-              <a:srgbClr val="E3E7EC"/>
-            </a:solidFill>
-          </a:ln>
-        </p:spPr>
-        <p:style>
-          <a:lnRef idx="1">
-            <a:schemeClr val="accent1"/>
-          </a:lnRef>
-          <a:fillRef idx="3">
-            <a:schemeClr val="accent1"/>
-          </a:fillRef>
-          <a:effectRef idx="2">
-            <a:schemeClr val="accent1"/>
-          </a:effectRef>
-          <a:fontRef idx="minor">
-            <a:schemeClr val="lt1"/>
-          </a:fontRef>
-        </p:style>
-        <p:txBody>
-          <a:bodyPr rtlCol="0" anchor="ctr"/>
-          <a:lstStyle/>
-          <a:p>
-            <a:pPr algn="ctr">
-              <a:defRPr>
-                <a:latin typeface="Inter"/>
-              </a:defRPr>
-            </a:pPr>
-          </a:p>
-        </p:txBody>
-      </p:sp>
-      <p:sp>
-        <p:nvSpPr>
-          <p:cNvPr id="13" name="TextBox 12"/>
-          <p:cNvSpPr txBox="1"/>
-          <p:nvPr/>
-        </p:nvSpPr>
-        <p:spPr>
-          <a:xfrm>
-            <a:off x="640080" y="6501384"/>
-            <a:ext cx="4297680" cy="146304"/>
-          </a:xfrm>
-          <a:prstGeom prst="rect">
-            <a:avLst/>
-          </a:prstGeom>
-          <a:noFill/>
-        </p:spPr>
-        <p:txBody>
-          <a:bodyPr wrap="none" lIns="9144" rIns="9144" tIns="9144" bIns="9144" anchor="t">
-            <a:spAutoFit/>
-          </a:bodyPr>
-          <a:lstStyle/>
-          <a:p>
-            <a:pPr algn="l">
-              <a:spcAft>
-                <a:spcPts val="0"/>
-              </a:spcAft>
-              <a:defRPr sz="650" b="0">
-                <a:solidFill>
-                  <a:srgbClr val="8A94A1"/>
-                </a:solidFill>
-                <a:latin typeface="Inter"/>
-              </a:defRPr>
-            </a:pPr>
-            <a:r>
-              <a:rPr>
-                <a:latin typeface="Inter"/>
-              </a:rPr>
-              <a:t>Sources: S3</a:t>
-            </a:r>
-          </a:p>
-        </p:txBody>
-      </p:sp>
-      <p:sp>
-        <p:nvSpPr>
-          <p:cNvPr id="14" name="TextBox 13"/>
-          <p:cNvSpPr txBox="1"/>
-          <p:nvPr/>
-        </p:nvSpPr>
-        <p:spPr>
-          <a:xfrm>
-            <a:off x="4480560" y="6501384"/>
-            <a:ext cx="5303520" cy="146304"/>
-          </a:xfrm>
-          <a:prstGeom prst="rect">
-            <a:avLst/>
-          </a:prstGeom>
-          <a:noFill/>
-        </p:spPr>
-        <p:txBody>
-          <a:bodyPr wrap="none" lIns="9144" rIns="9144" tIns="9144" bIns="9144" anchor="t">
-            <a:spAutoFit/>
-          </a:bodyPr>
-          <a:lstStyle/>
-          <a:p>
-            <a:pPr algn="ctr">
-              <a:spcAft>
-                <a:spcPts val="0"/>
-              </a:spcAft>
-              <a:defRPr sz="650" b="0">
-                <a:solidFill>
-                  <a:srgbClr val="8A94A1"/>
-                </a:solidFill>
-                <a:latin typeface="Inter"/>
-              </a:defRPr>
-            </a:pPr>
-            <a:r>
-              <a:rPr>
-                <a:latin typeface="Inter"/>
-              </a:rPr>
-              <a:t>Confidential — performance standards review · Data as of 2026-06-30</a:t>
-            </a:r>
-          </a:p>
-        </p:txBody>
-      </p:sp>
-      <p:sp>
-        <p:nvSpPr>
-          <p:cNvPr id="15" name="TextBox 14"/>
-          <p:cNvSpPr txBox="1"/>
-          <p:nvPr/>
-        </p:nvSpPr>
-        <p:spPr>
-          <a:xfrm>
-            <a:off x="10287000" y="6501384"/>
-            <a:ext cx="1261872" cy="146304"/>
-          </a:xfrm>
-          <a:prstGeom prst="rect">
-            <a:avLst/>
-          </a:prstGeom>
-          <a:noFill/>
-        </p:spPr>
-        <p:txBody>
-          <a:bodyPr wrap="none" lIns="9144" rIns="9144" tIns="9144" bIns="9144" anchor="t">
-            <a:spAutoFit/>
-          </a:bodyPr>
-          <a:lstStyle/>
-          <a:p>
-            <a:pPr algn="r">
-              <a:spcAft>
-                <a:spcPts val="0"/>
-              </a:spcAft>
-              <a:defRPr sz="650" b="0">
-                <a:solidFill>
-                  <a:srgbClr val="8A94A1"/>
-                </a:solidFill>
-                <a:latin typeface="Inter"/>
-              </a:defRPr>
-            </a:pPr>
-            <a:r>
-              <a:rPr>
-                <a:latin typeface="Inter"/>
-              </a:rPr>
-              <a:t>8</a:t>
-            </a:r>
-          </a:p>
-        </p:txBody>
-      </p:sp>
-    </p:spTree>
-  </p:cSld>
-  <p:clrMapOvr>
-    <a:masterClrMapping/>
-  </p:clrMapOvr>
-</p:sld>
-</file>
-
-<file path=ppt/slides/slide9.xml><?xml version="1.0" encoding="utf-8"?>
-<p:sld xmlns:a="http://schemas.openxmlformats.org/drawingml/2006/main" xmlns:p="http://schemas.openxmlformats.org/presentationml/2006/main" xmlns:r="http://schemas.openxmlformats.org/officeDocument/2006/relationships">
-  <p:cSld>
-    <p:spTree>
-      <p:nvGrpSpPr>
-        <p:cNvPr id="1" name=""/>
-        <p:cNvGrpSpPr/>
-        <p:nvPr/>
-      </p:nvGrpSpPr>
-      <p:grpSpPr/>
-      <p:sp>
-        <p:nvSpPr>
-          <p:cNvPr id="2" name="Rectangle 1"/>
-          <p:cNvSpPr/>
-          <p:nvPr/>
-        </p:nvSpPr>
-        <p:spPr>
-          <a:xfrm>
-            <a:off x="0" y="0"/>
-            <a:ext cx="12191695" cy="6858000"/>
-          </a:xfrm>
-          <a:prstGeom prst="rect">
-            <a:avLst/>
-          </a:prstGeom>
-          <a:solidFill>
-            <a:srgbClr val="FFFFFF"/>
-          </a:solidFill>
-          <a:ln>
-            <a:solidFill>
-              <a:srgbClr val="FFFFFF"/>
-            </a:solidFill>
-          </a:ln>
-        </p:spPr>
-        <p:style>
-          <a:lnRef idx="1">
-            <a:schemeClr val="accent1"/>
-          </a:lnRef>
-          <a:fillRef idx="3">
-            <a:schemeClr val="accent1"/>
-          </a:fillRef>
-          <a:effectRef idx="2">
-            <a:schemeClr val="accent1"/>
-          </a:effectRef>
-          <a:fontRef idx="minor">
-            <a:schemeClr val="lt1"/>
-          </a:fontRef>
-        </p:style>
-        <p:txBody>
-          <a:bodyPr rtlCol="0" anchor="ctr"/>
-          <a:lstStyle/>
-          <a:p>
-            <a:pPr algn="ctr">
-              <a:defRPr>
-                <a:latin typeface="Inter"/>
-              </a:defRPr>
-            </a:pPr>
-          </a:p>
-        </p:txBody>
-      </p:sp>
-      <p:sp>
-        <p:nvSpPr>
-          <p:cNvPr id="3" name="TextBox 2"/>
-          <p:cNvSpPr txBox="1"/>
-          <p:nvPr/>
-        </p:nvSpPr>
-        <p:spPr>
-          <a:xfrm>
-            <a:off x="5897880" y="310896"/>
-            <a:ext cx="4800600" cy="256032"/>
-          </a:xfrm>
-          <a:prstGeom prst="rect">
-            <a:avLst/>
-          </a:prstGeom>
-          <a:noFill/>
-        </p:spPr>
-        <p:txBody>
-          <a:bodyPr wrap="none" lIns="9144" rIns="9144" tIns="9144" bIns="9144" anchor="t">
-            <a:spAutoFit/>
-          </a:bodyPr>
-          <a:lstStyle/>
-          <a:p>
-            <a:pPr algn="r">
-              <a:spcAft>
-                <a:spcPts val="0"/>
-              </a:spcAft>
-              <a:defRPr sz="680" b="1">
-                <a:solidFill>
-                  <a:srgbClr val="4F6B00"/>
-                </a:solidFill>
-                <a:latin typeface="Inter"/>
-              </a:defRPr>
-            </a:pPr>
-            <a:r>
-              <a:rPr>
-                <a:latin typeface="Inter"/>
-              </a:rPr>
-              <a:t>Illustrative, Gradient Maintained — demo data, not the client's holdings or managers</a:t>
-            </a:r>
-          </a:p>
-        </p:txBody>
-      </p:sp>
-      <p:sp>
-        <p:nvSpPr>
-          <p:cNvPr id="4" name="TextBox 3"/>
-          <p:cNvSpPr txBox="1"/>
-          <p:nvPr/>
-        </p:nvSpPr>
-        <p:spPr>
-          <a:xfrm>
-            <a:off x="640080" y="566928"/>
-            <a:ext cx="10058400" cy="530352"/>
-          </a:xfrm>
-          <a:prstGeom prst="rect">
-            <a:avLst/>
-          </a:prstGeom>
-          <a:noFill/>
-        </p:spPr>
-        <p:txBody>
-          <a:bodyPr wrap="none" lIns="9144" rIns="9144" tIns="9144" bIns="9144" anchor="t">
-            <a:spAutoFit/>
-          </a:bodyPr>
-          <a:lstStyle/>
-          <a:p>
-            <a:pPr algn="l">
-              <a:spcAft>
-                <a:spcPts val="0"/>
-              </a:spcAft>
-              <a:defRPr sz="2300" b="1">
-                <a:solidFill>
-                  <a:srgbClr val="0D1117"/>
-                </a:solidFill>
-                <a:latin typeface="Inter"/>
-              </a:defRPr>
-            </a:pPr>
-            <a:r>
-              <a:rPr>
-                <a:latin typeface="Inter"/>
-              </a:rPr>
-              <a:t>Oversight summary</a:t>
-            </a:r>
-          </a:p>
-        </p:txBody>
-      </p:sp>
-      <p:sp>
-        <p:nvSpPr>
-          <p:cNvPr id="5" name="Rectangle 4"/>
-          <p:cNvSpPr/>
-          <p:nvPr/>
-        </p:nvSpPr>
-        <p:spPr>
-          <a:xfrm>
-            <a:off x="640080" y="1115568"/>
-            <a:ext cx="10908792" cy="18288"/>
-          </a:xfrm>
-          <a:prstGeom prst="rect">
-            <a:avLst/>
-          </a:prstGeom>
-          <a:solidFill>
-            <a:srgbClr val="0D1117"/>
-          </a:solidFill>
-          <a:ln>
-            <a:solidFill>
-              <a:srgbClr val="0D1117"/>
-            </a:solidFill>
-          </a:ln>
-        </p:spPr>
-        <p:style>
-          <a:lnRef idx="1">
-            <a:schemeClr val="accent1"/>
-          </a:lnRef>
-          <a:fillRef idx="3">
-            <a:schemeClr val="accent1"/>
-          </a:fillRef>
-          <a:effectRef idx="2">
-            <a:schemeClr val="accent1"/>
-          </a:effectRef>
-          <a:fontRef idx="minor">
-            <a:schemeClr val="lt1"/>
-          </a:fontRef>
-        </p:style>
-        <p:txBody>
-          <a:bodyPr rtlCol="0" anchor="ctr"/>
-          <a:lstStyle/>
-          <a:p>
-            <a:pPr algn="ctr">
-              <a:defRPr>
-                <a:latin typeface="Inter"/>
-              </a:defRPr>
-            </a:pPr>
-          </a:p>
-        </p:txBody>
-      </p:sp>
-      <p:sp>
-        <p:nvSpPr>
-          <p:cNvPr id="6" name="Rectangle 5"/>
-          <p:cNvSpPr/>
-          <p:nvPr/>
-        </p:nvSpPr>
-        <p:spPr>
-          <a:xfrm>
-            <a:off x="11018520" y="502920"/>
-            <a:ext cx="530352" cy="393192"/>
-          </a:xfrm>
-          <a:prstGeom prst="rect">
-            <a:avLst/>
-          </a:prstGeom>
-          <a:solidFill>
-            <a:srgbClr val="C6F432"/>
-          </a:solidFill>
-          <a:ln>
-            <a:solidFill>
-              <a:srgbClr val="C6F432"/>
-            </a:solidFill>
-          </a:ln>
-        </p:spPr>
-        <p:style>
-          <a:lnRef idx="1">
-            <a:schemeClr val="accent1"/>
-          </a:lnRef>
-          <a:fillRef idx="3">
-            <a:schemeClr val="accent1"/>
-          </a:fillRef>
-          <a:effectRef idx="2">
-            <a:schemeClr val="accent1"/>
-          </a:effectRef>
-          <a:fontRef idx="minor">
-            <a:schemeClr val="lt1"/>
-          </a:fontRef>
-        </p:style>
-        <p:txBody>
-          <a:bodyPr rtlCol="0" anchor="ctr"/>
-          <a:lstStyle/>
-          <a:p>
-            <a:pPr algn="ctr">
-              <a:defRPr>
-                <a:latin typeface="Inter"/>
-              </a:defRPr>
-            </a:pPr>
-          </a:p>
-        </p:txBody>
-      </p:sp>
-      <p:sp>
-        <p:nvSpPr>
-          <p:cNvPr id="7" name="TextBox 6"/>
-          <p:cNvSpPr txBox="1"/>
-          <p:nvPr/>
-        </p:nvSpPr>
-        <p:spPr>
-          <a:xfrm>
-            <a:off x="11045952" y="557784"/>
-            <a:ext cx="475488" cy="182880"/>
-          </a:xfrm>
-          <a:prstGeom prst="rect">
-            <a:avLst/>
-          </a:prstGeom>
-          <a:noFill/>
-        </p:spPr>
-        <p:txBody>
-          <a:bodyPr wrap="none" lIns="9144" rIns="9144" tIns="9144" bIns="9144" anchor="t">
-            <a:spAutoFit/>
-          </a:bodyPr>
-          <a:lstStyle/>
-          <a:p>
-            <a:pPr algn="ctr">
-              <a:spcAft>
-                <a:spcPts val="0"/>
-              </a:spcAft>
-              <a:defRPr sz="1000" b="1">
-                <a:solidFill>
-                  <a:srgbClr val="0D1117"/>
-                </a:solidFill>
-                <a:latin typeface="Inter"/>
-              </a:defRPr>
-            </a:pPr>
-            <a:r>
-              <a:rPr>
-                <a:latin typeface="Inter"/>
-              </a:rPr>
               <a:t>03</a:t>
             </a:r>
           </a:p>
@@ -13807,7 +11175,7 @@
         </p:nvGraphicFramePr>
         <p:xfrm>
           <a:off x="640080" y="1600200"/>
-          <a:ext cx="10908792" cy="4617720"/>
+          <a:ext cx="10908792" cy="3041142"/>
         </p:xfrm>
         <a:graphic>
           <a:graphicData uri="http://schemas.openxmlformats.org/drawingml/2006/table">
@@ -13821,7 +11189,7 @@
                 <a:gridCol w="2727198"/>
                 <a:gridCol w="2727198"/>
               </a:tblGrid>
-              <a:tr h="769620">
+              <a:tr h="506857">
                 <a:tc>
                   <a:txBody>
                     <a:bodyPr/>
@@ -13925,7 +11293,7 @@
                   </a:tcPr>
                 </a:tc>
               </a:tr>
-              <a:tr h="769620">
+              <a:tr h="506857">
                 <a:tc>
                   <a:txBody>
                     <a:bodyPr/>
@@ -14035,7 +11403,7 @@
                   </a:tcPr>
                 </a:tc>
               </a:tr>
-              <a:tr h="769620">
+              <a:tr h="506857">
                 <a:tc>
                   <a:txBody>
                     <a:bodyPr/>
@@ -14145,7 +11513,7 @@
                   </a:tcPr>
                 </a:tc>
               </a:tr>
-              <a:tr h="769620">
+              <a:tr h="506857">
                 <a:tc>
                   <a:txBody>
                     <a:bodyPr/>
@@ -14255,7 +11623,7 @@
                   </a:tcPr>
                 </a:tc>
               </a:tr>
-              <a:tr h="769620">
+              <a:tr h="506857">
                 <a:tc>
                   <a:txBody>
                     <a:bodyPr/>
@@ -14365,7 +11733,7 @@
                   </a:tcPr>
                 </a:tc>
               </a:tr>
-              <a:tr h="769620">
+              <a:tr h="506857">
                 <a:tc>
                   <a:txBody>
                     <a:bodyPr/>
@@ -14481,7 +11849,73 @@
       </p:graphicFrame>
       <p:sp>
         <p:nvSpPr>
-          <p:cNvPr id="10" name="Rectangle 9"/>
+          <p:cNvPr id="10" name="TextBox 9"/>
+          <p:cNvSpPr txBox="1"/>
+          <p:nvPr/>
+        </p:nvSpPr>
+        <p:spPr>
+          <a:xfrm>
+            <a:off x="640080" y="4751070"/>
+            <a:ext cx="10908792" cy="1466849"/>
+          </a:xfrm>
+          <a:prstGeom prst="rect">
+            <a:avLst/>
+          </a:prstGeom>
+          <a:noFill/>
+        </p:spPr>
+        <p:txBody>
+          <a:bodyPr wrap="none" lIns="9144" rIns="9144" tIns="9144" bIns="9144" anchor="t">
+            <a:spAutoFit/>
+          </a:bodyPr>
+          <a:lstStyle/>
+          <a:p>
+            <a:pPr algn="l">
+              <a:spcAft>
+                <a:spcPts val="0"/>
+              </a:spcAft>
+              <a:defRPr sz="1100" b="0">
+                <a:solidFill>
+                  <a:srgbClr val="4A5563"/>
+                </a:solidFill>
+                <a:latin typeface="Inter"/>
+              </a:defRPr>
+            </a:pPr>
+            <a:r>
+              <a:rPr>
+                <a:latin typeface="Inter"/>
+              </a:rPr>
+              <a:t>The board report presents total-fund returns net of external manager fees and identifies the approved policy</a:t>
+            </a:r>
+            <a:br/>
+            <a:br/>
+            <a:r>
+              <a:rPr>
+                <a:latin typeface="Inter"/>
+              </a:rPr>
+              <a:t>benchmark [S1][S2]. Oversight evidence is incomplete for the benchmark change because its effective date and</a:t>
+            </a:r>
+            <a:br/>
+            <a:br/>
+            <a:r>
+              <a:rPr>
+                <a:latin typeface="Inter"/>
+              </a:rPr>
+              <a:t>rationale are absent. The custodian package also does not include the valuation or error-correction policies</a:t>
+            </a:r>
+            <a:br/>
+            <a:br/>
+            <a:r>
+              <a:rPr>
+                <a:latin typeface="Inter"/>
+              </a:rPr>
+              <a:t>needed to understand the reporting control framework [S3].</a:t>
+            </a:r>
+          </a:p>
+        </p:txBody>
+      </p:sp>
+      <p:sp>
+        <p:nvSpPr>
+          <p:cNvPr id="11" name="Rectangle 10"/>
           <p:cNvSpPr/>
           <p:nvPr/>
         </p:nvSpPr>
@@ -14530,7 +11964,7 @@
       </p:sp>
       <p:sp>
         <p:nvSpPr>
-          <p:cNvPr id="11" name="TextBox 10"/>
+          <p:cNvPr id="12" name="TextBox 11"/>
           <p:cNvSpPr txBox="1"/>
           <p:nvPr/>
         </p:nvSpPr>
@@ -14572,7 +12006,7 @@
       </p:sp>
       <p:sp>
         <p:nvSpPr>
-          <p:cNvPr id="12" name="TextBox 11"/>
+          <p:cNvPr id="13" name="TextBox 12"/>
           <p:cNvSpPr txBox="1"/>
           <p:nvPr/>
         </p:nvSpPr>
@@ -14614,7 +12048,1157 @@
       </p:sp>
       <p:sp>
         <p:nvSpPr>
+          <p:cNvPr id="14" name="TextBox 13"/>
+          <p:cNvSpPr txBox="1"/>
+          <p:nvPr/>
+        </p:nvSpPr>
+        <p:spPr>
+          <a:xfrm>
+            <a:off x="10287000" y="6501384"/>
+            <a:ext cx="1261872" cy="146304"/>
+          </a:xfrm>
+          <a:prstGeom prst="rect">
+            <a:avLst/>
+          </a:prstGeom>
+          <a:noFill/>
+        </p:spPr>
+        <p:txBody>
+          <a:bodyPr wrap="none" lIns="9144" rIns="9144" tIns="9144" bIns="9144" anchor="t">
+            <a:spAutoFit/>
+          </a:bodyPr>
+          <a:lstStyle/>
+          <a:p>
+            <a:pPr algn="r">
+              <a:spcAft>
+                <a:spcPts val="0"/>
+              </a:spcAft>
+              <a:defRPr sz="650" b="0">
+                <a:solidFill>
+                  <a:srgbClr val="8A94A1"/>
+                </a:solidFill>
+                <a:latin typeface="Inter"/>
+              </a:defRPr>
+            </a:pPr>
+            <a:r>
+              <a:rPr>
+                <a:latin typeface="Inter"/>
+              </a:rPr>
+              <a:t>7</a:t>
+            </a:r>
+          </a:p>
+        </p:txBody>
+      </p:sp>
+    </p:spTree>
+  </p:cSld>
+  <p:clrMapOvr>
+    <a:masterClrMapping/>
+  </p:clrMapOvr>
+</p:sld>
+</file>
+
+<file path=ppt/slides/slide8.xml><?xml version="1.0" encoding="utf-8"?>
+<p:sld xmlns:a="http://schemas.openxmlformats.org/drawingml/2006/main" xmlns:p="http://schemas.openxmlformats.org/presentationml/2006/main" xmlns:r="http://schemas.openxmlformats.org/officeDocument/2006/relationships">
+  <p:cSld>
+    <p:spTree>
+      <p:nvGrpSpPr>
+        <p:cNvPr id="1" name=""/>
+        <p:cNvGrpSpPr/>
+        <p:nvPr/>
+      </p:nvGrpSpPr>
+      <p:grpSpPr/>
+      <p:sp>
+        <p:nvSpPr>
+          <p:cNvPr id="2" name="Rectangle 1"/>
+          <p:cNvSpPr/>
+          <p:nvPr/>
+        </p:nvSpPr>
+        <p:spPr>
+          <a:xfrm>
+            <a:off x="0" y="0"/>
+            <a:ext cx="12191695" cy="6858000"/>
+          </a:xfrm>
+          <a:prstGeom prst="rect">
+            <a:avLst/>
+          </a:prstGeom>
+          <a:solidFill>
+            <a:srgbClr val="FFFFFF"/>
+          </a:solidFill>
+          <a:ln>
+            <a:solidFill>
+              <a:srgbClr val="FFFFFF"/>
+            </a:solidFill>
+          </a:ln>
+        </p:spPr>
+        <p:style>
+          <a:lnRef idx="1">
+            <a:schemeClr val="accent1"/>
+          </a:lnRef>
+          <a:fillRef idx="3">
+            <a:schemeClr val="accent1"/>
+          </a:fillRef>
+          <a:effectRef idx="2">
+            <a:schemeClr val="accent1"/>
+          </a:effectRef>
+          <a:fontRef idx="minor">
+            <a:schemeClr val="lt1"/>
+          </a:fontRef>
+        </p:style>
+        <p:txBody>
+          <a:bodyPr rtlCol="0" anchor="ctr"/>
+          <a:lstStyle/>
+          <a:p>
+            <a:pPr algn="ctr">
+              <a:defRPr>
+                <a:latin typeface="Inter"/>
+              </a:defRPr>
+            </a:pPr>
+          </a:p>
+        </p:txBody>
+      </p:sp>
+      <p:sp>
+        <p:nvSpPr>
+          <p:cNvPr id="3" name="TextBox 2"/>
+          <p:cNvSpPr txBox="1"/>
+          <p:nvPr/>
+        </p:nvSpPr>
+        <p:spPr>
+          <a:xfrm>
+            <a:off x="5897880" y="310896"/>
+            <a:ext cx="4800600" cy="256032"/>
+          </a:xfrm>
+          <a:prstGeom prst="rect">
+            <a:avLst/>
+          </a:prstGeom>
+          <a:noFill/>
+        </p:spPr>
+        <p:txBody>
+          <a:bodyPr wrap="none" lIns="9144" rIns="9144" tIns="9144" bIns="9144" anchor="t">
+            <a:spAutoFit/>
+          </a:bodyPr>
+          <a:lstStyle/>
+          <a:p>
+            <a:pPr algn="r">
+              <a:spcAft>
+                <a:spcPts val="0"/>
+              </a:spcAft>
+              <a:defRPr sz="680" b="1">
+                <a:solidFill>
+                  <a:srgbClr val="4F6B00"/>
+                </a:solidFill>
+                <a:latin typeface="Inter"/>
+              </a:defRPr>
+            </a:pPr>
+            <a:r>
+              <a:rPr>
+                <a:latin typeface="Inter"/>
+              </a:rPr>
+              <a:t>Illustrative, Gradient Maintained — demo data, not the client's holdings or managers</a:t>
+            </a:r>
+          </a:p>
+        </p:txBody>
+      </p:sp>
+      <p:sp>
+        <p:nvSpPr>
+          <p:cNvPr id="4" name="TextBox 3"/>
+          <p:cNvSpPr txBox="1"/>
+          <p:nvPr/>
+        </p:nvSpPr>
+        <p:spPr>
+          <a:xfrm>
+            <a:off x="640080" y="566928"/>
+            <a:ext cx="10058400" cy="530352"/>
+          </a:xfrm>
+          <a:prstGeom prst="rect">
+            <a:avLst/>
+          </a:prstGeom>
+          <a:noFill/>
+        </p:spPr>
+        <p:txBody>
+          <a:bodyPr wrap="none" lIns="9144" rIns="9144" tIns="9144" bIns="9144" anchor="t">
+            <a:spAutoFit/>
+          </a:bodyPr>
+          <a:lstStyle/>
+          <a:p>
+            <a:pPr algn="l">
+              <a:spcAft>
+                <a:spcPts val="0"/>
+              </a:spcAft>
+              <a:defRPr sz="2300" b="1">
+                <a:solidFill>
+                  <a:srgbClr val="0D1117"/>
+                </a:solidFill>
+                <a:latin typeface="Inter"/>
+              </a:defRPr>
+            </a:pPr>
+            <a:r>
+              <a:rPr>
+                <a:latin typeface="Inter"/>
+              </a:rPr>
+              <a:t>Follow-up requests</a:t>
+            </a:r>
+          </a:p>
+        </p:txBody>
+      </p:sp>
+      <p:sp>
+        <p:nvSpPr>
+          <p:cNvPr id="5" name="Rectangle 4"/>
+          <p:cNvSpPr/>
+          <p:nvPr/>
+        </p:nvSpPr>
+        <p:spPr>
+          <a:xfrm>
+            <a:off x="640080" y="1115568"/>
+            <a:ext cx="10908792" cy="18288"/>
+          </a:xfrm>
+          <a:prstGeom prst="rect">
+            <a:avLst/>
+          </a:prstGeom>
+          <a:solidFill>
+            <a:srgbClr val="0D1117"/>
+          </a:solidFill>
+          <a:ln>
+            <a:solidFill>
+              <a:srgbClr val="0D1117"/>
+            </a:solidFill>
+          </a:ln>
+        </p:spPr>
+        <p:style>
+          <a:lnRef idx="1">
+            <a:schemeClr val="accent1"/>
+          </a:lnRef>
+          <a:fillRef idx="3">
+            <a:schemeClr val="accent1"/>
+          </a:fillRef>
+          <a:effectRef idx="2">
+            <a:schemeClr val="accent1"/>
+          </a:effectRef>
+          <a:fontRef idx="minor">
+            <a:schemeClr val="lt1"/>
+          </a:fontRef>
+        </p:style>
+        <p:txBody>
+          <a:bodyPr rtlCol="0" anchor="ctr"/>
+          <a:lstStyle/>
+          <a:p>
+            <a:pPr algn="ctr">
+              <a:defRPr>
+                <a:latin typeface="Inter"/>
+              </a:defRPr>
+            </a:pPr>
+          </a:p>
+        </p:txBody>
+      </p:sp>
+      <p:sp>
+        <p:nvSpPr>
+          <p:cNvPr id="6" name="Rectangle 5"/>
+          <p:cNvSpPr/>
+          <p:nvPr/>
+        </p:nvSpPr>
+        <p:spPr>
+          <a:xfrm>
+            <a:off x="11018520" y="502920"/>
+            <a:ext cx="530352" cy="393192"/>
+          </a:xfrm>
+          <a:prstGeom prst="rect">
+            <a:avLst/>
+          </a:prstGeom>
+          <a:solidFill>
+            <a:srgbClr val="C6F432"/>
+          </a:solidFill>
+          <a:ln>
+            <a:solidFill>
+              <a:srgbClr val="C6F432"/>
+            </a:solidFill>
+          </a:ln>
+        </p:spPr>
+        <p:style>
+          <a:lnRef idx="1">
+            <a:schemeClr val="accent1"/>
+          </a:lnRef>
+          <a:fillRef idx="3">
+            <a:schemeClr val="accent1"/>
+          </a:fillRef>
+          <a:effectRef idx="2">
+            <a:schemeClr val="accent1"/>
+          </a:effectRef>
+          <a:fontRef idx="minor">
+            <a:schemeClr val="lt1"/>
+          </a:fontRef>
+        </p:style>
+        <p:txBody>
+          <a:bodyPr rtlCol="0" anchor="ctr"/>
+          <a:lstStyle/>
+          <a:p>
+            <a:pPr algn="ctr">
+              <a:defRPr>
+                <a:latin typeface="Inter"/>
+              </a:defRPr>
+            </a:pPr>
+          </a:p>
+        </p:txBody>
+      </p:sp>
+      <p:sp>
+        <p:nvSpPr>
+          <p:cNvPr id="7" name="TextBox 6"/>
+          <p:cNvSpPr txBox="1"/>
+          <p:nvPr/>
+        </p:nvSpPr>
+        <p:spPr>
+          <a:xfrm>
+            <a:off x="11045952" y="557784"/>
+            <a:ext cx="475488" cy="182880"/>
+          </a:xfrm>
+          <a:prstGeom prst="rect">
+            <a:avLst/>
+          </a:prstGeom>
+          <a:noFill/>
+        </p:spPr>
+        <p:txBody>
+          <a:bodyPr wrap="none" lIns="9144" rIns="9144" tIns="9144" bIns="9144" anchor="t">
+            <a:spAutoFit/>
+          </a:bodyPr>
+          <a:lstStyle/>
+          <a:p>
+            <a:pPr algn="ctr">
+              <a:spcAft>
+                <a:spcPts val="0"/>
+              </a:spcAft>
+              <a:defRPr sz="1000" b="1">
+                <a:solidFill>
+                  <a:srgbClr val="0D1117"/>
+                </a:solidFill>
+                <a:latin typeface="Inter"/>
+              </a:defRPr>
+            </a:pPr>
+            <a:r>
+              <a:rPr>
+                <a:latin typeface="Inter"/>
+              </a:rPr>
+              <a:t>04</a:t>
+            </a:r>
+          </a:p>
+        </p:txBody>
+      </p:sp>
+      <p:sp>
+        <p:nvSpPr>
+          <p:cNvPr id="8" name="TextBox 7"/>
+          <p:cNvSpPr txBox="1"/>
+          <p:nvPr/>
+        </p:nvSpPr>
+        <p:spPr>
+          <a:xfrm>
+            <a:off x="640080" y="1325880"/>
+            <a:ext cx="10908792" cy="3507028"/>
+          </a:xfrm>
+          <a:prstGeom prst="rect">
+            <a:avLst/>
+          </a:prstGeom>
+          <a:noFill/>
+        </p:spPr>
+        <p:txBody>
+          <a:bodyPr wrap="none" lIns="9144" rIns="9144" tIns="9144" bIns="9144" anchor="t">
+            <a:spAutoFit/>
+          </a:bodyPr>
+          <a:lstStyle/>
+          <a:p>
+            <a:pPr algn="l">
+              <a:spcAft>
+                <a:spcPts val="500"/>
+              </a:spcAft>
+              <a:defRPr sz="1000" b="0">
+                <a:solidFill>
+                  <a:srgbClr val="0D1117"/>
+                </a:solidFill>
+                <a:latin typeface="Inter"/>
+              </a:defRPr>
+            </a:pPr>
+            <a:r>
+              <a:rPr>
+                <a:latin typeface="Inter"/>
+              </a:rPr>
+              <a:t>01  Provide the benchmark-change effective date, approval record and rationale.</a:t>
+            </a:r>
+            <a:br/>
+            <a:r>
+              <a:rPr>
+                <a:latin typeface="Inter"/>
+              </a:rPr>
+              <a:t>      Closes the 22.C.9 lineage gap [S1][S2].</a:t>
+            </a:r>
+          </a:p>
+          <a:p>
+            <a:pPr algn="l">
+              <a:spcAft>
+                <a:spcPts val="500"/>
+              </a:spcAft>
+              <a:defRPr sz="1000" b="0">
+                <a:solidFill>
+                  <a:srgbClr val="0D1117"/>
+                </a:solidFill>
+                <a:latin typeface="Inter"/>
+              </a:defRPr>
+            </a:pPr>
+            <a:r>
+              <a:rPr>
+                <a:latin typeface="Inter"/>
+              </a:rPr>
+              <a:t>02  Provide the current valuation and error-correction policies.</a:t>
+            </a:r>
+            <a:br/>
+            <a:r>
+              <a:rPr>
+                <a:latin typeface="Inter"/>
+              </a:rPr>
+              <a:t>      Closes the control-evidence gaps [S3].</a:t>
+            </a:r>
+          </a:p>
+        </p:txBody>
+      </p:sp>
+      <p:sp>
+        <p:nvSpPr>
+          <p:cNvPr id="9" name="TextBox 8"/>
+          <p:cNvSpPr txBox="1"/>
+          <p:nvPr/>
+        </p:nvSpPr>
+        <p:spPr>
+          <a:xfrm>
+            <a:off x="640080" y="4942636"/>
+            <a:ext cx="10908792" cy="1275283"/>
+          </a:xfrm>
+          <a:prstGeom prst="rect">
+            <a:avLst/>
+          </a:prstGeom>
+          <a:noFill/>
+        </p:spPr>
+        <p:txBody>
+          <a:bodyPr wrap="none" lIns="9144" rIns="9144" tIns="9144" bIns="9144" anchor="t">
+            <a:spAutoFit/>
+          </a:bodyPr>
+          <a:lstStyle/>
+          <a:p>
+            <a:pPr algn="l">
+              <a:spcAft>
+                <a:spcPts val="500"/>
+              </a:spcAft>
+              <a:defRPr sz="1050" b="0">
+                <a:solidFill>
+                  <a:srgbClr val="0D1117"/>
+                </a:solidFill>
+                <a:latin typeface="Inter"/>
+              </a:defRPr>
+            </a:pPr>
+            <a:r>
+              <a:rPr>
+                <a:latin typeface="Inter"/>
+              </a:rPr>
+              <a:t>•  Provide the benchmark-change effective date, approval record and rationale (22.C.9) [S1][S2].</a:t>
+            </a:r>
+          </a:p>
+          <a:p>
+            <a:pPr algn="l">
+              <a:spcAft>
+                <a:spcPts val="500"/>
+              </a:spcAft>
+              <a:defRPr sz="1050" b="0">
+                <a:solidFill>
+                  <a:srgbClr val="0D1117"/>
+                </a:solidFill>
+                <a:latin typeface="Inter"/>
+              </a:defRPr>
+            </a:pPr>
+            <a:r>
+              <a:rPr>
+                <a:latin typeface="Inter"/>
+              </a:rPr>
+              <a:t>•  Provide the current valuation and error-correction policies (21.A.6; 22.C.20) [S3].</a:t>
+            </a:r>
+          </a:p>
+        </p:txBody>
+      </p:sp>
+      <p:sp>
+        <p:nvSpPr>
+          <p:cNvPr id="10" name="Rectangle 9"/>
+          <p:cNvSpPr/>
+          <p:nvPr/>
+        </p:nvSpPr>
+        <p:spPr>
+          <a:xfrm>
+            <a:off x="640080" y="6446520"/>
+            <a:ext cx="10908792" cy="9144"/>
+          </a:xfrm>
+          <a:prstGeom prst="rect">
+            <a:avLst/>
+          </a:prstGeom>
+          <a:solidFill>
+            <a:srgbClr val="E3E7EC"/>
+          </a:solidFill>
+          <a:ln>
+            <a:solidFill>
+              <a:srgbClr val="E3E7EC"/>
+            </a:solidFill>
+          </a:ln>
+        </p:spPr>
+        <p:style>
+          <a:lnRef idx="1">
+            <a:schemeClr val="accent1"/>
+          </a:lnRef>
+          <a:fillRef idx="3">
+            <a:schemeClr val="accent1"/>
+          </a:fillRef>
+          <a:effectRef idx="2">
+            <a:schemeClr val="accent1"/>
+          </a:effectRef>
+          <a:fontRef idx="minor">
+            <a:schemeClr val="lt1"/>
+          </a:fontRef>
+        </p:style>
+        <p:txBody>
+          <a:bodyPr rtlCol="0" anchor="ctr"/>
+          <a:lstStyle/>
+          <a:p>
+            <a:pPr algn="ctr">
+              <a:defRPr>
+                <a:latin typeface="Inter"/>
+              </a:defRPr>
+            </a:pPr>
+          </a:p>
+        </p:txBody>
+      </p:sp>
+      <p:sp>
+        <p:nvSpPr>
+          <p:cNvPr id="11" name="TextBox 10"/>
+          <p:cNvSpPr txBox="1"/>
+          <p:nvPr/>
+        </p:nvSpPr>
+        <p:spPr>
+          <a:xfrm>
+            <a:off x="640080" y="6501384"/>
+            <a:ext cx="4297680" cy="146304"/>
+          </a:xfrm>
+          <a:prstGeom prst="rect">
+            <a:avLst/>
+          </a:prstGeom>
+          <a:noFill/>
+        </p:spPr>
+        <p:txBody>
+          <a:bodyPr wrap="none" lIns="9144" rIns="9144" tIns="9144" bIns="9144" anchor="t">
+            <a:spAutoFit/>
+          </a:bodyPr>
+          <a:lstStyle/>
+          <a:p>
+            <a:pPr algn="l">
+              <a:spcAft>
+                <a:spcPts val="0"/>
+              </a:spcAft>
+              <a:defRPr sz="650" b="0">
+                <a:solidFill>
+                  <a:srgbClr val="8A94A1"/>
+                </a:solidFill>
+                <a:latin typeface="Inter"/>
+              </a:defRPr>
+            </a:pPr>
+            <a:r>
+              <a:rPr>
+                <a:latin typeface="Inter"/>
+              </a:rPr>
+              <a:t>Sources: S1 · S2 · S3</a:t>
+            </a:r>
+          </a:p>
+        </p:txBody>
+      </p:sp>
+      <p:sp>
+        <p:nvSpPr>
+          <p:cNvPr id="12" name="TextBox 11"/>
+          <p:cNvSpPr txBox="1"/>
+          <p:nvPr/>
+        </p:nvSpPr>
+        <p:spPr>
+          <a:xfrm>
+            <a:off x="4480560" y="6501384"/>
+            <a:ext cx="5303520" cy="146304"/>
+          </a:xfrm>
+          <a:prstGeom prst="rect">
+            <a:avLst/>
+          </a:prstGeom>
+          <a:noFill/>
+        </p:spPr>
+        <p:txBody>
+          <a:bodyPr wrap="none" lIns="9144" rIns="9144" tIns="9144" bIns="9144" anchor="t">
+            <a:spAutoFit/>
+          </a:bodyPr>
+          <a:lstStyle/>
+          <a:p>
+            <a:pPr algn="ctr">
+              <a:spcAft>
+                <a:spcPts val="0"/>
+              </a:spcAft>
+              <a:defRPr sz="650" b="0">
+                <a:solidFill>
+                  <a:srgbClr val="8A94A1"/>
+                </a:solidFill>
+                <a:latin typeface="Inter"/>
+              </a:defRPr>
+            </a:pPr>
+            <a:r>
+              <a:rPr>
+                <a:latin typeface="Inter"/>
+              </a:rPr>
+              <a:t>Confidential — performance standards review · Data as of 2026-06-30</a:t>
+            </a:r>
+          </a:p>
+        </p:txBody>
+      </p:sp>
+      <p:sp>
+        <p:nvSpPr>
           <p:cNvPr id="13" name="TextBox 12"/>
+          <p:cNvSpPr txBox="1"/>
+          <p:nvPr/>
+        </p:nvSpPr>
+        <p:spPr>
+          <a:xfrm>
+            <a:off x="10287000" y="6501384"/>
+            <a:ext cx="1261872" cy="146304"/>
+          </a:xfrm>
+          <a:prstGeom prst="rect">
+            <a:avLst/>
+          </a:prstGeom>
+          <a:noFill/>
+        </p:spPr>
+        <p:txBody>
+          <a:bodyPr wrap="none" lIns="9144" rIns="9144" tIns="9144" bIns="9144" anchor="t">
+            <a:spAutoFit/>
+          </a:bodyPr>
+          <a:lstStyle/>
+          <a:p>
+            <a:pPr algn="r">
+              <a:spcAft>
+                <a:spcPts val="0"/>
+              </a:spcAft>
+              <a:defRPr sz="650" b="0">
+                <a:solidFill>
+                  <a:srgbClr val="8A94A1"/>
+                </a:solidFill>
+                <a:latin typeface="Inter"/>
+              </a:defRPr>
+            </a:pPr>
+            <a:r>
+              <a:rPr>
+                <a:latin typeface="Inter"/>
+              </a:rPr>
+              <a:t>8</a:t>
+            </a:r>
+          </a:p>
+        </p:txBody>
+      </p:sp>
+    </p:spTree>
+  </p:cSld>
+  <p:clrMapOvr>
+    <a:masterClrMapping/>
+  </p:clrMapOvr>
+</p:sld>
+</file>
+
+<file path=ppt/slides/slide9.xml><?xml version="1.0" encoding="utf-8"?>
+<p:sld xmlns:a="http://schemas.openxmlformats.org/drawingml/2006/main" xmlns:p="http://schemas.openxmlformats.org/presentationml/2006/main" xmlns:r="http://schemas.openxmlformats.org/officeDocument/2006/relationships">
+  <p:cSld>
+    <p:spTree>
+      <p:nvGrpSpPr>
+        <p:cNvPr id="1" name=""/>
+        <p:cNvGrpSpPr/>
+        <p:nvPr/>
+      </p:nvGrpSpPr>
+      <p:grpSpPr/>
+      <p:sp>
+        <p:nvSpPr>
+          <p:cNvPr id="2" name="Rectangle 1"/>
+          <p:cNvSpPr/>
+          <p:nvPr/>
+        </p:nvSpPr>
+        <p:spPr>
+          <a:xfrm>
+            <a:off x="0" y="0"/>
+            <a:ext cx="12191695" cy="6858000"/>
+          </a:xfrm>
+          <a:prstGeom prst="rect">
+            <a:avLst/>
+          </a:prstGeom>
+          <a:solidFill>
+            <a:srgbClr val="FFFFFF"/>
+          </a:solidFill>
+          <a:ln>
+            <a:solidFill>
+              <a:srgbClr val="FFFFFF"/>
+            </a:solidFill>
+          </a:ln>
+        </p:spPr>
+        <p:style>
+          <a:lnRef idx="1">
+            <a:schemeClr val="accent1"/>
+          </a:lnRef>
+          <a:fillRef idx="3">
+            <a:schemeClr val="accent1"/>
+          </a:fillRef>
+          <a:effectRef idx="2">
+            <a:schemeClr val="accent1"/>
+          </a:effectRef>
+          <a:fontRef idx="minor">
+            <a:schemeClr val="lt1"/>
+          </a:fontRef>
+        </p:style>
+        <p:txBody>
+          <a:bodyPr rtlCol="0" anchor="ctr"/>
+          <a:lstStyle/>
+          <a:p>
+            <a:pPr algn="ctr">
+              <a:defRPr>
+                <a:latin typeface="Inter"/>
+              </a:defRPr>
+            </a:pPr>
+          </a:p>
+        </p:txBody>
+      </p:sp>
+      <p:sp>
+        <p:nvSpPr>
+          <p:cNvPr id="3" name="TextBox 2"/>
+          <p:cNvSpPr txBox="1"/>
+          <p:nvPr/>
+        </p:nvSpPr>
+        <p:spPr>
+          <a:xfrm>
+            <a:off x="5897880" y="310896"/>
+            <a:ext cx="4800600" cy="256032"/>
+          </a:xfrm>
+          <a:prstGeom prst="rect">
+            <a:avLst/>
+          </a:prstGeom>
+          <a:noFill/>
+        </p:spPr>
+        <p:txBody>
+          <a:bodyPr wrap="none" lIns="9144" rIns="9144" tIns="9144" bIns="9144" anchor="t">
+            <a:spAutoFit/>
+          </a:bodyPr>
+          <a:lstStyle/>
+          <a:p>
+            <a:pPr algn="r">
+              <a:spcAft>
+                <a:spcPts val="0"/>
+              </a:spcAft>
+              <a:defRPr sz="680" b="1">
+                <a:solidFill>
+                  <a:srgbClr val="4F6B00"/>
+                </a:solidFill>
+                <a:latin typeface="Inter"/>
+              </a:defRPr>
+            </a:pPr>
+            <a:r>
+              <a:rPr>
+                <a:latin typeface="Inter"/>
+              </a:rPr>
+              <a:t>Illustrative, Gradient Maintained — demo data, not the client's holdings or managers</a:t>
+            </a:r>
+          </a:p>
+        </p:txBody>
+      </p:sp>
+      <p:sp>
+        <p:nvSpPr>
+          <p:cNvPr id="4" name="TextBox 3"/>
+          <p:cNvSpPr txBox="1"/>
+          <p:nvPr/>
+        </p:nvSpPr>
+        <p:spPr>
+          <a:xfrm>
+            <a:off x="640080" y="566928"/>
+            <a:ext cx="10058400" cy="530352"/>
+          </a:xfrm>
+          <a:prstGeom prst="rect">
+            <a:avLst/>
+          </a:prstGeom>
+          <a:noFill/>
+        </p:spPr>
+        <p:txBody>
+          <a:bodyPr wrap="none" lIns="9144" rIns="9144" tIns="9144" bIns="9144" anchor="t">
+            <a:spAutoFit/>
+          </a:bodyPr>
+          <a:lstStyle/>
+          <a:p>
+            <a:pPr algn="l">
+              <a:spcAft>
+                <a:spcPts val="0"/>
+              </a:spcAft>
+              <a:defRPr sz="2300" b="1">
+                <a:solidFill>
+                  <a:srgbClr val="0D1117"/>
+                </a:solidFill>
+                <a:latin typeface="Inter"/>
+              </a:defRPr>
+            </a:pPr>
+            <a:r>
+              <a:rPr>
+                <a:latin typeface="Inter"/>
+              </a:rPr>
+              <a:t>Appendix — Findings checklist</a:t>
+            </a:r>
+          </a:p>
+        </p:txBody>
+      </p:sp>
+      <p:sp>
+        <p:nvSpPr>
+          <p:cNvPr id="5" name="Rectangle 4"/>
+          <p:cNvSpPr/>
+          <p:nvPr/>
+        </p:nvSpPr>
+        <p:spPr>
+          <a:xfrm>
+            <a:off x="640080" y="1115568"/>
+            <a:ext cx="10908792" cy="18288"/>
+          </a:xfrm>
+          <a:prstGeom prst="rect">
+            <a:avLst/>
+          </a:prstGeom>
+          <a:solidFill>
+            <a:srgbClr val="0D1117"/>
+          </a:solidFill>
+          <a:ln>
+            <a:solidFill>
+              <a:srgbClr val="0D1117"/>
+            </a:solidFill>
+          </a:ln>
+        </p:spPr>
+        <p:style>
+          <a:lnRef idx="1">
+            <a:schemeClr val="accent1"/>
+          </a:lnRef>
+          <a:fillRef idx="3">
+            <a:schemeClr val="accent1"/>
+          </a:fillRef>
+          <a:effectRef idx="2">
+            <a:schemeClr val="accent1"/>
+          </a:effectRef>
+          <a:fontRef idx="minor">
+            <a:schemeClr val="lt1"/>
+          </a:fontRef>
+        </p:style>
+        <p:txBody>
+          <a:bodyPr rtlCol="0" anchor="ctr"/>
+          <a:lstStyle/>
+          <a:p>
+            <a:pPr algn="ctr">
+              <a:defRPr>
+                <a:latin typeface="Inter"/>
+              </a:defRPr>
+            </a:pPr>
+          </a:p>
+        </p:txBody>
+      </p:sp>
+      <p:sp>
+        <p:nvSpPr>
+          <p:cNvPr id="6" name="Rectangle 5"/>
+          <p:cNvSpPr/>
+          <p:nvPr/>
+        </p:nvSpPr>
+        <p:spPr>
+          <a:xfrm>
+            <a:off x="11018520" y="502920"/>
+            <a:ext cx="530352" cy="393192"/>
+          </a:xfrm>
+          <a:prstGeom prst="rect">
+            <a:avLst/>
+          </a:prstGeom>
+          <a:solidFill>
+            <a:srgbClr val="9AA5B1"/>
+          </a:solidFill>
+          <a:ln>
+            <a:solidFill>
+              <a:srgbClr val="9AA5B1"/>
+            </a:solidFill>
+          </a:ln>
+        </p:spPr>
+        <p:style>
+          <a:lnRef idx="1">
+            <a:schemeClr val="accent1"/>
+          </a:lnRef>
+          <a:fillRef idx="3">
+            <a:schemeClr val="accent1"/>
+          </a:fillRef>
+          <a:effectRef idx="2">
+            <a:schemeClr val="accent1"/>
+          </a:effectRef>
+          <a:fontRef idx="minor">
+            <a:schemeClr val="lt1"/>
+          </a:fontRef>
+        </p:style>
+        <p:txBody>
+          <a:bodyPr rtlCol="0" anchor="ctr"/>
+          <a:lstStyle/>
+          <a:p>
+            <a:pPr algn="ctr">
+              <a:defRPr>
+                <a:latin typeface="Inter"/>
+              </a:defRPr>
+            </a:pPr>
+          </a:p>
+        </p:txBody>
+      </p:sp>
+      <p:sp>
+        <p:nvSpPr>
+          <p:cNvPr id="7" name="TextBox 6"/>
+          <p:cNvSpPr txBox="1"/>
+          <p:nvPr/>
+        </p:nvSpPr>
+        <p:spPr>
+          <a:xfrm>
+            <a:off x="11045952" y="557784"/>
+            <a:ext cx="475488" cy="182880"/>
+          </a:xfrm>
+          <a:prstGeom prst="rect">
+            <a:avLst/>
+          </a:prstGeom>
+          <a:noFill/>
+        </p:spPr>
+        <p:txBody>
+          <a:bodyPr wrap="none" lIns="9144" rIns="9144" tIns="9144" bIns="9144" anchor="t">
+            <a:spAutoFit/>
+          </a:bodyPr>
+          <a:lstStyle/>
+          <a:p>
+            <a:pPr algn="ctr">
+              <a:spcAft>
+                <a:spcPts val="0"/>
+              </a:spcAft>
+              <a:defRPr sz="1000" b="1">
+                <a:solidFill>
+                  <a:srgbClr val="0D1117"/>
+                </a:solidFill>
+                <a:latin typeface="Inter"/>
+              </a:defRPr>
+            </a:pPr>
+            <a:r>
+              <a:rPr>
+                <a:latin typeface="Inter"/>
+              </a:rPr>
+              <a:t>B</a:t>
+            </a:r>
+          </a:p>
+        </p:txBody>
+      </p:sp>
+      <p:sp>
+        <p:nvSpPr>
+          <p:cNvPr id="8" name="TextBox 7"/>
+          <p:cNvSpPr txBox="1"/>
+          <p:nvPr/>
+        </p:nvSpPr>
+        <p:spPr>
+          <a:xfrm>
+            <a:off x="640080" y="1325880"/>
+            <a:ext cx="10908792" cy="4892040"/>
+          </a:xfrm>
+          <a:prstGeom prst="rect">
+            <a:avLst/>
+          </a:prstGeom>
+          <a:noFill/>
+        </p:spPr>
+        <p:txBody>
+          <a:bodyPr wrap="none" lIns="9144" rIns="9144" tIns="9144" bIns="9144" anchor="t">
+            <a:spAutoFit/>
+          </a:bodyPr>
+          <a:lstStyle/>
+          <a:p>
+            <a:pPr algn="l">
+              <a:spcAft>
+                <a:spcPts val="0"/>
+              </a:spcAft>
+              <a:defRPr sz="1100" b="0">
+                <a:solidFill>
+                  <a:srgbClr val="4A5563"/>
+                </a:solidFill>
+                <a:latin typeface="Inter"/>
+              </a:defRPr>
+            </a:pPr>
+            <a:r>
+              <a:rPr>
+                <a:latin typeface="Inter"/>
+              </a:rPr>
+              <a:t>·  Area  ·  Requirement  ·  Provision  ·  Status  ·  Evidence  ·  Finding / follow-up  · </a:t>
+            </a:r>
+            <a:br/>
+            <a:br/>
+            <a:r>
+              <a:rPr>
+                <a:latin typeface="Inter"/>
+              </a:rPr>
+              <a:t> ·  Returns  ·  Total-fund return basis  ·  Asset Owner 22.A.1  ·  Met  ·  Board report [S1]  ·  —  · </a:t>
+            </a:r>
+            <a:br/>
+            <a:br/>
+            <a:r>
+              <a:rPr>
+                <a:latin typeface="Inter"/>
+              </a:rPr>
+              <a:t> ·  Benchmark  ·  Policy benchmark identified  ·  Asset Owner 22.C.8  ·  Met  ·  Policy [S2]  ·  —  · </a:t>
+            </a:r>
+            <a:br/>
+            <a:br/>
+            <a:r>
+              <a:rPr>
+                <a:latin typeface="Inter"/>
+              </a:rPr>
+              <a:t> ·  Benchmark  ·  Change disclosure  ·  Asset Owner 22.C.9  ·  Partially met  ·  Board report [S1]  ·  Effective date absent  · </a:t>
+            </a:r>
+            <a:br/>
+            <a:br/>
+            <a:r>
+              <a:rPr>
+                <a:latin typeface="Inter"/>
+              </a:rPr>
+              <a:t> ·  Valuation  ·  Valuation policy availability  ·  Asset Owner 21.A.6  ·  Not met  ·  Custodian package [S3]  ·  Policy not supplied  · </a:t>
+            </a:r>
+            <a:br/>
+            <a:br/>
+            <a:r>
+              <a:rPr>
+                <a:latin typeface="Inter"/>
+              </a:rPr>
+              <a:t> ·  Oversight  ·  Error-correction policy  ·  Asset Owner 22.C.20  ·  Not found  ·  —  ·  Request  ·</a:t>
+            </a:r>
+          </a:p>
+        </p:txBody>
+      </p:sp>
+      <p:sp>
+        <p:nvSpPr>
+          <p:cNvPr id="9" name="Rectangle 8"/>
+          <p:cNvSpPr/>
+          <p:nvPr/>
+        </p:nvSpPr>
+        <p:spPr>
+          <a:xfrm>
+            <a:off x="640080" y="6446520"/>
+            <a:ext cx="10908792" cy="9144"/>
+          </a:xfrm>
+          <a:prstGeom prst="rect">
+            <a:avLst/>
+          </a:prstGeom>
+          <a:solidFill>
+            <a:srgbClr val="E3E7EC"/>
+          </a:solidFill>
+          <a:ln>
+            <a:solidFill>
+              <a:srgbClr val="E3E7EC"/>
+            </a:solidFill>
+          </a:ln>
+        </p:spPr>
+        <p:style>
+          <a:lnRef idx="1">
+            <a:schemeClr val="accent1"/>
+          </a:lnRef>
+          <a:fillRef idx="3">
+            <a:schemeClr val="accent1"/>
+          </a:fillRef>
+          <a:effectRef idx="2">
+            <a:schemeClr val="accent1"/>
+          </a:effectRef>
+          <a:fontRef idx="minor">
+            <a:schemeClr val="lt1"/>
+          </a:fontRef>
+        </p:style>
+        <p:txBody>
+          <a:bodyPr rtlCol="0" anchor="ctr"/>
+          <a:lstStyle/>
+          <a:p>
+            <a:pPr algn="ctr">
+              <a:defRPr>
+                <a:latin typeface="Inter"/>
+              </a:defRPr>
+            </a:pPr>
+          </a:p>
+        </p:txBody>
+      </p:sp>
+      <p:sp>
+        <p:nvSpPr>
+          <p:cNvPr id="10" name="TextBox 9"/>
+          <p:cNvSpPr txBox="1"/>
+          <p:nvPr/>
+        </p:nvSpPr>
+        <p:spPr>
+          <a:xfrm>
+            <a:off x="640080" y="6501384"/>
+            <a:ext cx="4297680" cy="146304"/>
+          </a:xfrm>
+          <a:prstGeom prst="rect">
+            <a:avLst/>
+          </a:prstGeom>
+          <a:noFill/>
+        </p:spPr>
+        <p:txBody>
+          <a:bodyPr wrap="none" lIns="9144" rIns="9144" tIns="9144" bIns="9144" anchor="t">
+            <a:spAutoFit/>
+          </a:bodyPr>
+          <a:lstStyle/>
+          <a:p>
+            <a:pPr algn="l">
+              <a:spcAft>
+                <a:spcPts val="0"/>
+              </a:spcAft>
+              <a:defRPr sz="650" b="0">
+                <a:solidFill>
+                  <a:srgbClr val="8A94A1"/>
+                </a:solidFill>
+                <a:latin typeface="Inter"/>
+              </a:defRPr>
+            </a:pPr>
+            <a:r>
+              <a:rPr>
+                <a:latin typeface="Inter"/>
+              </a:rPr>
+              <a:t>Sources: S1 · S2 · S3</a:t>
+            </a:r>
+          </a:p>
+        </p:txBody>
+      </p:sp>
+      <p:sp>
+        <p:nvSpPr>
+          <p:cNvPr id="11" name="TextBox 10"/>
+          <p:cNvSpPr txBox="1"/>
+          <p:nvPr/>
+        </p:nvSpPr>
+        <p:spPr>
+          <a:xfrm>
+            <a:off x="4480560" y="6501384"/>
+            <a:ext cx="5303520" cy="146304"/>
+          </a:xfrm>
+          <a:prstGeom prst="rect">
+            <a:avLst/>
+          </a:prstGeom>
+          <a:noFill/>
+        </p:spPr>
+        <p:txBody>
+          <a:bodyPr wrap="none" lIns="9144" rIns="9144" tIns="9144" bIns="9144" anchor="t">
+            <a:spAutoFit/>
+          </a:bodyPr>
+          <a:lstStyle/>
+          <a:p>
+            <a:pPr algn="ctr">
+              <a:spcAft>
+                <a:spcPts val="0"/>
+              </a:spcAft>
+              <a:defRPr sz="650" b="0">
+                <a:solidFill>
+                  <a:srgbClr val="8A94A1"/>
+                </a:solidFill>
+                <a:latin typeface="Inter"/>
+              </a:defRPr>
+            </a:pPr>
+            <a:r>
+              <a:rPr>
+                <a:latin typeface="Inter"/>
+              </a:rPr>
+              <a:t>Confidential — performance standards review · Data as of 2026-06-30</a:t>
+            </a:r>
+          </a:p>
+        </p:txBody>
+      </p:sp>
+      <p:sp>
+        <p:nvSpPr>
+          <p:cNvPr id="12" name="TextBox 11"/>
           <p:cNvSpPr txBox="1"/>
           <p:nvPr/>
         </p:nvSpPr>

--- a/plugins/gradient-cio/assets/examples/internal-gips-review-asset-owner.pptx
+++ b/plugins/gradient-cio/assets/examples/internal-gips-review-asset-owner.pptx
@@ -3571,7 +3571,7 @@
               <a:rPr>
                 <a:latin typeface="Inter"/>
               </a:rPr>
-              <a:t>SUBJECT</a:t>
+              <a:t>ASSET OWNER</a:t>
             </a:r>
           </a:p>
         </p:txBody>
@@ -3872,224 +3872,7 @@
       </p:sp>
       <p:sp>
         <p:nvSpPr>
-          <p:cNvPr id="17" name="Rectangle 16"/>
-          <p:cNvSpPr/>
-          <p:nvPr/>
-        </p:nvSpPr>
-        <p:spPr>
-          <a:xfrm>
-            <a:off x="685800" y="5687568"/>
-            <a:ext cx="3337560" cy="530352"/>
-          </a:xfrm>
-          <a:prstGeom prst="rect">
-            <a:avLst/>
-          </a:prstGeom>
-          <a:solidFill>
-            <a:srgbClr val="F2A93B"/>
-          </a:solidFill>
-          <a:ln>
-            <a:solidFill>
-              <a:srgbClr val="F2A93B"/>
-            </a:solidFill>
-          </a:ln>
-        </p:spPr>
-        <p:style>
-          <a:lnRef idx="1">
-            <a:schemeClr val="accent1"/>
-          </a:lnRef>
-          <a:fillRef idx="3">
-            <a:schemeClr val="accent1"/>
-          </a:fillRef>
-          <a:effectRef idx="2">
-            <a:schemeClr val="accent1"/>
-          </a:effectRef>
-          <a:fontRef idx="minor">
-            <a:schemeClr val="lt1"/>
-          </a:fontRef>
-        </p:style>
-        <p:txBody>
-          <a:bodyPr rtlCol="0" anchor="ctr"/>
-          <a:lstStyle/>
-          <a:p>
-            <a:pPr algn="ctr">
-              <a:defRPr>
-                <a:latin typeface="Inter"/>
-              </a:defRPr>
-            </a:pPr>
-          </a:p>
-        </p:txBody>
-      </p:sp>
-      <p:sp>
-        <p:nvSpPr>
-          <p:cNvPr id="18" name="TextBox 17"/>
-          <p:cNvSpPr txBox="1"/>
-          <p:nvPr/>
-        </p:nvSpPr>
-        <p:spPr>
-          <a:xfrm>
-            <a:off x="822960" y="5760720"/>
-            <a:ext cx="3063240" cy="128016"/>
-          </a:xfrm>
-          <a:prstGeom prst="rect">
-            <a:avLst/>
-          </a:prstGeom>
-          <a:noFill/>
-        </p:spPr>
-        <p:txBody>
-          <a:bodyPr wrap="none" lIns="9144" rIns="9144" tIns="9144" bIns="9144" anchor="t">
-            <a:spAutoFit/>
-          </a:bodyPr>
-          <a:lstStyle/>
-          <a:p>
-            <a:pPr algn="l">
-              <a:spcAft>
-                <a:spcPts val="0"/>
-              </a:spcAft>
-              <a:defRPr sz="620" b="1">
-                <a:solidFill>
-                  <a:srgbClr val="0D1117"/>
-                </a:solidFill>
-                <a:latin typeface="Inter"/>
-              </a:defRPr>
-            </a:pPr>
-            <a:r>
-              <a:rPr>
-                <a:latin typeface="Inter"/>
-              </a:rPr>
-              <a:t>OVERALL VIEW</a:t>
-            </a:r>
-          </a:p>
-        </p:txBody>
-      </p:sp>
-      <p:sp>
-        <p:nvSpPr>
-          <p:cNvPr id="19" name="TextBox 18"/>
-          <p:cNvSpPr txBox="1"/>
-          <p:nvPr/>
-        </p:nvSpPr>
-        <p:spPr>
-          <a:xfrm>
-            <a:off x="822960" y="5916168"/>
-            <a:ext cx="3063240" cy="182880"/>
-          </a:xfrm>
-          <a:prstGeom prst="rect">
-            <a:avLst/>
-          </a:prstGeom>
-          <a:noFill/>
-        </p:spPr>
-        <p:txBody>
-          <a:bodyPr wrap="none" lIns="9144" rIns="9144" tIns="9144" bIns="9144" anchor="t">
-            <a:spAutoFit/>
-          </a:bodyPr>
-          <a:lstStyle/>
-          <a:p>
-            <a:pPr algn="l">
-              <a:spcAft>
-                <a:spcPts val="0"/>
-              </a:spcAft>
-              <a:defRPr sz="900" b="1">
-                <a:solidFill>
-                  <a:srgbClr val="0D1117"/>
-                </a:solidFill>
-                <a:latin typeface="Inter"/>
-              </a:defRPr>
-            </a:pPr>
-            <a:r>
-              <a:rPr>
-                <a:latin typeface="Inter"/>
-              </a:rPr>
-              <a:t>Satisfactory with follow-ups</a:t>
-            </a:r>
-          </a:p>
-        </p:txBody>
-      </p:sp>
-      <p:sp>
-        <p:nvSpPr>
-          <p:cNvPr id="20" name="TextBox 19"/>
-          <p:cNvSpPr txBox="1"/>
-          <p:nvPr/>
-        </p:nvSpPr>
-        <p:spPr>
-          <a:xfrm>
-            <a:off x="4297680" y="5733288"/>
-            <a:ext cx="3108960" cy="164592"/>
-          </a:xfrm>
-          <a:prstGeom prst="rect">
-            <a:avLst/>
-          </a:prstGeom>
-          <a:noFill/>
-        </p:spPr>
-        <p:txBody>
-          <a:bodyPr wrap="none" lIns="9144" rIns="9144" tIns="9144" bIns="9144" anchor="t">
-            <a:spAutoFit/>
-          </a:bodyPr>
-          <a:lstStyle/>
-          <a:p>
-            <a:pPr algn="l">
-              <a:spcAft>
-                <a:spcPts val="0"/>
-              </a:spcAft>
-              <a:defRPr sz="650" b="1">
-                <a:solidFill>
-                  <a:srgbClr val="8A94A1"/>
-                </a:solidFill>
-                <a:latin typeface="Inter"/>
-              </a:defRPr>
-            </a:pPr>
-            <a:r>
-              <a:rPr>
-                <a:latin typeface="Inter"/>
-              </a:rPr>
-              <a:t>SCOPE REVIEWED</a:t>
-            </a:r>
-          </a:p>
-        </p:txBody>
-      </p:sp>
-      <p:sp>
-        <p:nvSpPr>
-          <p:cNvPr id="21" name="TextBox 20"/>
-          <p:cNvSpPr txBox="1"/>
-          <p:nvPr/>
-        </p:nvSpPr>
-        <p:spPr>
-          <a:xfrm>
-            <a:off x="4297680" y="5934456"/>
-            <a:ext cx="3108960" cy="201168"/>
-          </a:xfrm>
-          <a:prstGeom prst="rect">
-            <a:avLst/>
-          </a:prstGeom>
-          <a:noFill/>
-        </p:spPr>
-        <p:txBody>
-          <a:bodyPr wrap="none" lIns="9144" rIns="9144" tIns="9144" bIns="9144" anchor="t">
-            <a:spAutoFit/>
-          </a:bodyPr>
-          <a:lstStyle/>
-          <a:p>
-            <a:pPr algn="l">
-              <a:spcAft>
-                <a:spcPts val="0"/>
-              </a:spcAft>
-              <a:defRPr sz="800" b="1">
-                <a:solidFill>
-                  <a:srgbClr val="FFFFFF"/>
-                </a:solidFill>
-                <a:latin typeface="Inter"/>
-              </a:defRPr>
-            </a:pPr>
-            <a:r>
-              <a:rPr>
-                <a:latin typeface="Inter"/>
-              </a:rPr>
-              <a:t>4 of 5 · Partial</a:t>
-            </a:r>
-          </a:p>
-        </p:txBody>
-      </p:sp>
-      <p:sp>
-        <p:nvSpPr>
-          <p:cNvPr id="22" name="TextBox 21"/>
+          <p:cNvPr id="17" name="TextBox 16"/>
           <p:cNvSpPr txBox="1"/>
           <p:nvPr/>
         </p:nvSpPr>
@@ -4131,7 +3914,7 @@
       </p:sp>
       <p:sp>
         <p:nvSpPr>
-          <p:cNvPr id="23" name="TextBox 22"/>
+          <p:cNvPr id="18" name="TextBox 17"/>
           <p:cNvSpPr txBox="1"/>
           <p:nvPr/>
         </p:nvSpPr>
@@ -4173,7 +3956,7 @@
       </p:sp>
       <p:sp>
         <p:nvSpPr>
-          <p:cNvPr id="24" name="TextBox 23"/>
+          <p:cNvPr id="19" name="TextBox 18"/>
           <p:cNvSpPr txBox="1"/>
           <p:nvPr/>
         </p:nvSpPr>
@@ -4288,48 +4071,6 @@
         </p:nvSpPr>
         <p:spPr>
           <a:xfrm>
-            <a:off x="5897880" y="310896"/>
-            <a:ext cx="4800600" cy="256032"/>
-          </a:xfrm>
-          <a:prstGeom prst="rect">
-            <a:avLst/>
-          </a:prstGeom>
-          <a:noFill/>
-        </p:spPr>
-        <p:txBody>
-          <a:bodyPr wrap="none" lIns="9144" rIns="9144" tIns="9144" bIns="9144" anchor="t">
-            <a:spAutoFit/>
-          </a:bodyPr>
-          <a:lstStyle/>
-          <a:p>
-            <a:pPr algn="r">
-              <a:spcAft>
-                <a:spcPts val="0"/>
-              </a:spcAft>
-              <a:defRPr sz="680" b="1">
-                <a:solidFill>
-                  <a:srgbClr val="4F6B00"/>
-                </a:solidFill>
-                <a:latin typeface="Inter"/>
-              </a:defRPr>
-            </a:pPr>
-            <a:r>
-              <a:rPr>
-                <a:latin typeface="Inter"/>
-              </a:rPr>
-              <a:t>Illustrative, Gradient Maintained — demo data, not the client's holdings or managers</a:t>
-            </a:r>
-          </a:p>
-        </p:txBody>
-      </p:sp>
-      <p:sp>
-        <p:nvSpPr>
-          <p:cNvPr id="4" name="TextBox 3"/>
-          <p:cNvSpPr txBox="1"/>
-          <p:nvPr/>
-        </p:nvSpPr>
-        <p:spPr>
-          <a:xfrm>
             <a:off x="640080" y="566928"/>
             <a:ext cx="10058400" cy="530352"/>
           </a:xfrm>
@@ -4366,7 +4107,7 @@
       </p:sp>
       <p:sp>
         <p:nvSpPr>
-          <p:cNvPr id="5" name="Rectangle 4"/>
+          <p:cNvPr id="4" name="Rectangle 3"/>
           <p:cNvSpPr/>
           <p:nvPr/>
         </p:nvSpPr>
@@ -4415,7 +4156,7 @@
       </p:sp>
       <p:sp>
         <p:nvSpPr>
-          <p:cNvPr id="6" name="Rectangle 5"/>
+          <p:cNvPr id="5" name="Rectangle 4"/>
           <p:cNvSpPr/>
           <p:nvPr/>
         </p:nvSpPr>
@@ -4464,7 +4205,7 @@
       </p:sp>
       <p:sp>
         <p:nvSpPr>
-          <p:cNvPr id="7" name="TextBox 6"/>
+          <p:cNvPr id="6" name="TextBox 5"/>
           <p:cNvSpPr txBox="1"/>
           <p:nvPr/>
         </p:nvSpPr>
@@ -4506,7 +4247,7 @@
       </p:sp>
       <p:sp>
         <p:nvSpPr>
-          <p:cNvPr id="8" name="TextBox 7"/>
+          <p:cNvPr id="7" name="TextBox 6"/>
           <p:cNvSpPr txBox="1"/>
           <p:nvPr/>
         </p:nvSpPr>
@@ -4588,7 +4329,7 @@
       </p:sp>
       <p:sp>
         <p:nvSpPr>
-          <p:cNvPr id="9" name="Rectangle 8"/>
+          <p:cNvPr id="8" name="Rectangle 7"/>
           <p:cNvSpPr/>
           <p:nvPr/>
         </p:nvSpPr>
@@ -4637,7 +4378,7 @@
       </p:sp>
       <p:sp>
         <p:nvSpPr>
-          <p:cNvPr id="10" name="TextBox 9"/>
+          <p:cNvPr id="9" name="TextBox 8"/>
           <p:cNvSpPr txBox="1"/>
           <p:nvPr/>
         </p:nvSpPr>
@@ -4679,7 +4420,7 @@
       </p:sp>
       <p:sp>
         <p:nvSpPr>
-          <p:cNvPr id="11" name="TextBox 10"/>
+          <p:cNvPr id="10" name="TextBox 9"/>
           <p:cNvSpPr txBox="1"/>
           <p:nvPr/>
         </p:nvSpPr>
@@ -4721,7 +4462,7 @@
       </p:sp>
       <p:sp>
         <p:nvSpPr>
-          <p:cNvPr id="12" name="TextBox 11"/>
+          <p:cNvPr id="11" name="TextBox 10"/>
           <p:cNvSpPr txBox="1"/>
           <p:nvPr/>
         </p:nvSpPr>
@@ -4836,48 +4577,6 @@
         </p:nvSpPr>
         <p:spPr>
           <a:xfrm>
-            <a:off x="5897880" y="310896"/>
-            <a:ext cx="4800600" cy="256032"/>
-          </a:xfrm>
-          <a:prstGeom prst="rect">
-            <a:avLst/>
-          </a:prstGeom>
-          <a:noFill/>
-        </p:spPr>
-        <p:txBody>
-          <a:bodyPr wrap="none" lIns="9144" rIns="9144" tIns="9144" bIns="9144" anchor="t">
-            <a:spAutoFit/>
-          </a:bodyPr>
-          <a:lstStyle/>
-          <a:p>
-            <a:pPr algn="r">
-              <a:spcAft>
-                <a:spcPts val="0"/>
-              </a:spcAft>
-              <a:defRPr sz="680" b="1">
-                <a:solidFill>
-                  <a:srgbClr val="4F6B00"/>
-                </a:solidFill>
-                <a:latin typeface="Inter"/>
-              </a:defRPr>
-            </a:pPr>
-            <a:r>
-              <a:rPr>
-                <a:latin typeface="Inter"/>
-              </a:rPr>
-              <a:t>Illustrative, Gradient Maintained — demo data, not the client's holdings or managers</a:t>
-            </a:r>
-          </a:p>
-        </p:txBody>
-      </p:sp>
-      <p:sp>
-        <p:nvSpPr>
-          <p:cNvPr id="4" name="TextBox 3"/>
-          <p:cNvSpPr txBox="1"/>
-          <p:nvPr/>
-        </p:nvSpPr>
-        <p:spPr>
-          <a:xfrm>
             <a:off x="640080" y="566928"/>
             <a:ext cx="10058400" cy="530352"/>
           </a:xfrm>
@@ -4914,7 +4613,7 @@
       </p:sp>
       <p:sp>
         <p:nvSpPr>
-          <p:cNvPr id="5" name="Rectangle 4"/>
+          <p:cNvPr id="4" name="Rectangle 3"/>
           <p:cNvSpPr/>
           <p:nvPr/>
         </p:nvSpPr>
@@ -4963,7 +4662,7 @@
       </p:sp>
       <p:sp>
         <p:nvSpPr>
-          <p:cNvPr id="6" name="Rectangle 5"/>
+          <p:cNvPr id="5" name="Rectangle 4"/>
           <p:cNvSpPr/>
           <p:nvPr/>
         </p:nvSpPr>
@@ -5012,7 +4711,7 @@
       </p:sp>
       <p:sp>
         <p:nvSpPr>
-          <p:cNvPr id="7" name="TextBox 6"/>
+          <p:cNvPr id="6" name="TextBox 5"/>
           <p:cNvSpPr txBox="1"/>
           <p:nvPr/>
         </p:nvSpPr>
@@ -5054,7 +4753,7 @@
       </p:sp>
       <p:sp>
         <p:nvSpPr>
-          <p:cNvPr id="8" name="TextBox 7"/>
+          <p:cNvPr id="7" name="TextBox 6"/>
           <p:cNvSpPr txBox="1"/>
           <p:nvPr/>
         </p:nvSpPr>
@@ -5096,7 +4795,7 @@
       </p:sp>
       <p:sp>
         <p:nvSpPr>
-          <p:cNvPr id="9" name="Rectangle 8"/>
+          <p:cNvPr id="8" name="Rectangle 7"/>
           <p:cNvSpPr/>
           <p:nvPr/>
         </p:nvSpPr>
@@ -5145,7 +4844,7 @@
       </p:sp>
       <p:sp>
         <p:nvSpPr>
-          <p:cNvPr id="10" name="TextBox 9"/>
+          <p:cNvPr id="9" name="TextBox 8"/>
           <p:cNvSpPr txBox="1"/>
           <p:nvPr/>
         </p:nvSpPr>
@@ -5187,7 +4886,7 @@
       </p:sp>
       <p:sp>
         <p:nvSpPr>
-          <p:cNvPr id="11" name="TextBox 10"/>
+          <p:cNvPr id="10" name="TextBox 9"/>
           <p:cNvSpPr txBox="1"/>
           <p:nvPr/>
         </p:nvSpPr>
@@ -5229,7 +4928,7 @@
       </p:sp>
       <p:sp>
         <p:nvSpPr>
-          <p:cNvPr id="12" name="TextBox 11"/>
+          <p:cNvPr id="11" name="TextBox 10"/>
           <p:cNvSpPr txBox="1"/>
           <p:nvPr/>
         </p:nvSpPr>
@@ -5344,48 +5043,6 @@
         </p:nvSpPr>
         <p:spPr>
           <a:xfrm>
-            <a:off x="5897880" y="310896"/>
-            <a:ext cx="4800600" cy="256032"/>
-          </a:xfrm>
-          <a:prstGeom prst="rect">
-            <a:avLst/>
-          </a:prstGeom>
-          <a:noFill/>
-        </p:spPr>
-        <p:txBody>
-          <a:bodyPr wrap="none" lIns="9144" rIns="9144" tIns="9144" bIns="9144" anchor="t">
-            <a:spAutoFit/>
-          </a:bodyPr>
-          <a:lstStyle/>
-          <a:p>
-            <a:pPr algn="r">
-              <a:spcAft>
-                <a:spcPts val="0"/>
-              </a:spcAft>
-              <a:defRPr sz="680" b="1">
-                <a:solidFill>
-                  <a:srgbClr val="4F6B00"/>
-                </a:solidFill>
-                <a:latin typeface="Inter"/>
-              </a:defRPr>
-            </a:pPr>
-            <a:r>
-              <a:rPr>
-                <a:latin typeface="Inter"/>
-              </a:rPr>
-              <a:t>Illustrative, Gradient Maintained — demo data, not the client's holdings or managers</a:t>
-            </a:r>
-          </a:p>
-        </p:txBody>
-      </p:sp>
-      <p:sp>
-        <p:nvSpPr>
-          <p:cNvPr id="4" name="TextBox 3"/>
-          <p:cNvSpPr txBox="1"/>
-          <p:nvPr/>
-        </p:nvSpPr>
-        <p:spPr>
-          <a:xfrm>
             <a:off x="640080" y="566928"/>
             <a:ext cx="10058400" cy="530352"/>
           </a:xfrm>
@@ -5422,7 +5079,7 @@
       </p:sp>
       <p:sp>
         <p:nvSpPr>
-          <p:cNvPr id="5" name="Rectangle 4"/>
+          <p:cNvPr id="4" name="Rectangle 3"/>
           <p:cNvSpPr/>
           <p:nvPr/>
         </p:nvSpPr>
@@ -5471,7 +5128,7 @@
       </p:sp>
       <p:sp>
         <p:nvSpPr>
-          <p:cNvPr id="6" name="Rectangle 5"/>
+          <p:cNvPr id="5" name="Rectangle 4"/>
           <p:cNvSpPr/>
           <p:nvPr/>
         </p:nvSpPr>
@@ -5520,7 +5177,7 @@
       </p:sp>
       <p:sp>
         <p:nvSpPr>
-          <p:cNvPr id="7" name="TextBox 6"/>
+          <p:cNvPr id="6" name="TextBox 5"/>
           <p:cNvSpPr txBox="1"/>
           <p:nvPr/>
         </p:nvSpPr>
@@ -5562,14 +5219,105 @@
       </p:sp>
       <p:sp>
         <p:nvSpPr>
-          <p:cNvPr id="8" name="Rectangle 7"/>
+          <p:cNvPr id="7" name="Rectangle 6"/>
           <p:cNvSpPr/>
           <p:nvPr/>
         </p:nvSpPr>
         <p:spPr>
           <a:xfrm>
-            <a:off x="640080" y="1325880"/>
-            <a:ext cx="10908792" cy="1793366"/>
+            <a:off x="640080" y="1399032"/>
+            <a:ext cx="73152" cy="1188720"/>
+          </a:xfrm>
+          <a:prstGeom prst="rect">
+            <a:avLst/>
+          </a:prstGeom>
+          <a:solidFill>
+            <a:srgbClr val="F2A93B"/>
+          </a:solidFill>
+          <a:ln>
+            <a:solidFill>
+              <a:srgbClr val="F2A93B"/>
+            </a:solidFill>
+          </a:ln>
+        </p:spPr>
+        <p:style>
+          <a:lnRef idx="1">
+            <a:schemeClr val="accent1"/>
+          </a:lnRef>
+          <a:fillRef idx="3">
+            <a:schemeClr val="accent1"/>
+          </a:fillRef>
+          <a:effectRef idx="2">
+            <a:schemeClr val="accent1"/>
+          </a:effectRef>
+          <a:fontRef idx="minor">
+            <a:schemeClr val="lt1"/>
+          </a:fontRef>
+        </p:style>
+        <p:txBody>
+          <a:bodyPr rtlCol="0" anchor="ctr"/>
+          <a:lstStyle/>
+          <a:p>
+            <a:pPr algn="ctr">
+              <a:defRPr>
+                <a:latin typeface="Inter"/>
+              </a:defRPr>
+            </a:pPr>
+          </a:p>
+        </p:txBody>
+      </p:sp>
+      <p:sp>
+        <p:nvSpPr>
+          <p:cNvPr id="8" name="TextBox 7"/>
+          <p:cNvSpPr txBox="1"/>
+          <p:nvPr/>
+        </p:nvSpPr>
+        <p:spPr>
+          <a:xfrm>
+            <a:off x="896112" y="1371600"/>
+            <a:ext cx="10588752" cy="774313"/>
+          </a:xfrm>
+          <a:prstGeom prst="rect">
+            <a:avLst/>
+          </a:prstGeom>
+          <a:noFill/>
+        </p:spPr>
+        <p:txBody>
+          <a:bodyPr wrap="none" lIns="9144" rIns="9144" tIns="9144" bIns="9144" anchor="t">
+            <a:spAutoFit/>
+          </a:bodyPr>
+          <a:lstStyle/>
+          <a:p>
+            <a:pPr algn="l">
+              <a:spcAft>
+                <a:spcPts val="0"/>
+              </a:spcAft>
+              <a:defRPr sz="1800" b="1">
+                <a:solidFill>
+                  <a:srgbClr val="0D1117"/>
+                </a:solidFill>
+                <a:latin typeface="Inter"/>
+              </a:defRPr>
+            </a:pPr>
+            <a:r>
+              <a:rPr>
+                <a:latin typeface="Inter"/>
+              </a:rPr>
+              <a:t>Satisfactory with follow-ups</a:t>
+            </a:r>
+          </a:p>
+        </p:txBody>
+      </p:sp>
+      <p:sp>
+        <p:nvSpPr>
+          <p:cNvPr id="9" name="Rectangle 8"/>
+          <p:cNvSpPr/>
+          <p:nvPr/>
+        </p:nvSpPr>
+        <p:spPr>
+          <a:xfrm>
+            <a:off x="640080" y="2770632"/>
+            <a:ext cx="10908792" cy="1251585"/>
           </a:xfrm>
           <a:prstGeom prst="rect">
             <a:avLst/>
@@ -5611,14 +5359,14 @@
       </p:sp>
       <p:sp>
         <p:nvSpPr>
-          <p:cNvPr id="9" name="Rectangle 8"/>
+          <p:cNvPr id="10" name="Rectangle 9"/>
           <p:cNvSpPr/>
           <p:nvPr/>
         </p:nvSpPr>
         <p:spPr>
           <a:xfrm>
-            <a:off x="640080" y="1325880"/>
-            <a:ext cx="54864" cy="1793366"/>
+            <a:off x="640080" y="2770632"/>
+            <a:ext cx="54864" cy="1251585"/>
           </a:xfrm>
           <a:prstGeom prst="rect">
             <a:avLst/>
@@ -5660,13 +5408,13 @@
       </p:sp>
       <p:sp>
         <p:nvSpPr>
-          <p:cNvPr id="10" name="TextBox 9"/>
+          <p:cNvPr id="11" name="TextBox 10"/>
           <p:cNvSpPr txBox="1"/>
           <p:nvPr/>
         </p:nvSpPr>
         <p:spPr>
           <a:xfrm>
-            <a:off x="804671" y="1435607"/>
+            <a:off x="804671" y="2880360"/>
             <a:ext cx="10616184" cy="228600"/>
           </a:xfrm>
           <a:prstGeom prst="rect">
@@ -5702,14 +5450,14 @@
       </p:sp>
       <p:sp>
         <p:nvSpPr>
-          <p:cNvPr id="11" name="TextBox 10"/>
+          <p:cNvPr id="12" name="TextBox 11"/>
           <p:cNvSpPr txBox="1"/>
           <p:nvPr/>
         </p:nvSpPr>
         <p:spPr>
           <a:xfrm>
-            <a:off x="804671" y="1719072"/>
-            <a:ext cx="10616184" cy="1308734"/>
+            <a:off x="804671" y="3163824"/>
+            <a:ext cx="10616184" cy="766952"/>
           </a:xfrm>
           <a:prstGeom prst="rect">
             <a:avLst/>
@@ -5744,14 +5492,14 @@
       </p:sp>
       <p:sp>
         <p:nvSpPr>
-          <p:cNvPr id="12" name="Rectangle 11"/>
+          <p:cNvPr id="13" name="Rectangle 12"/>
           <p:cNvSpPr/>
           <p:nvPr/>
         </p:nvSpPr>
         <p:spPr>
           <a:xfrm>
-            <a:off x="640080" y="3228975"/>
-            <a:ext cx="2644902" cy="2988945"/>
+            <a:off x="640080" y="4131945"/>
+            <a:ext cx="2644902" cy="2085975"/>
           </a:xfrm>
           <a:prstGeom prst="rect">
             <a:avLst/>
@@ -5793,13 +5541,13 @@
       </p:sp>
       <p:sp>
         <p:nvSpPr>
-          <p:cNvPr id="13" name="Rectangle 12"/>
+          <p:cNvPr id="14" name="Rectangle 13"/>
           <p:cNvSpPr/>
           <p:nvPr/>
         </p:nvSpPr>
         <p:spPr>
           <a:xfrm>
-            <a:off x="640080" y="3228975"/>
+            <a:off x="640080" y="4131945"/>
             <a:ext cx="2644902" cy="45720"/>
           </a:xfrm>
           <a:prstGeom prst="rect">
@@ -5842,13 +5590,13 @@
       </p:sp>
       <p:sp>
         <p:nvSpPr>
-          <p:cNvPr id="14" name="TextBox 13"/>
+          <p:cNvPr id="15" name="TextBox 14"/>
           <p:cNvSpPr txBox="1"/>
           <p:nvPr/>
         </p:nvSpPr>
         <p:spPr>
           <a:xfrm>
-            <a:off x="749808" y="3356991"/>
+            <a:off x="749808" y="4259961"/>
             <a:ext cx="2425446" cy="201168"/>
           </a:xfrm>
           <a:prstGeom prst="rect">
@@ -5884,13 +5632,13 @@
       </p:sp>
       <p:sp>
         <p:nvSpPr>
-          <p:cNvPr id="15" name="TextBox 14"/>
+          <p:cNvPr id="16" name="TextBox 15"/>
           <p:cNvSpPr txBox="1"/>
           <p:nvPr/>
         </p:nvSpPr>
         <p:spPr>
           <a:xfrm>
-            <a:off x="749808" y="3613023"/>
+            <a:off x="749808" y="4515993"/>
             <a:ext cx="2425446" cy="475488"/>
           </a:xfrm>
           <a:prstGeom prst="rect">
@@ -5926,7 +5674,7 @@
       </p:sp>
       <p:sp>
         <p:nvSpPr>
-          <p:cNvPr id="16" name="TextBox 15"/>
+          <p:cNvPr id="17" name="TextBox 16"/>
           <p:cNvSpPr txBox="1"/>
           <p:nvPr/>
         </p:nvSpPr>
@@ -5968,14 +5716,14 @@
       </p:sp>
       <p:sp>
         <p:nvSpPr>
-          <p:cNvPr id="17" name="Rectangle 16"/>
+          <p:cNvPr id="18" name="Rectangle 17"/>
           <p:cNvSpPr/>
           <p:nvPr/>
         </p:nvSpPr>
         <p:spPr>
           <a:xfrm>
-            <a:off x="3394710" y="3228975"/>
-            <a:ext cx="2644902" cy="2988945"/>
+            <a:off x="3394710" y="4131945"/>
+            <a:ext cx="2644902" cy="2085975"/>
           </a:xfrm>
           <a:prstGeom prst="rect">
             <a:avLst/>
@@ -6017,13 +5765,13 @@
       </p:sp>
       <p:sp>
         <p:nvSpPr>
-          <p:cNvPr id="18" name="Rectangle 17"/>
+          <p:cNvPr id="19" name="Rectangle 18"/>
           <p:cNvSpPr/>
           <p:nvPr/>
         </p:nvSpPr>
         <p:spPr>
           <a:xfrm>
-            <a:off x="3394710" y="3228975"/>
+            <a:off x="3394710" y="4131945"/>
             <a:ext cx="2644902" cy="45720"/>
           </a:xfrm>
           <a:prstGeom prst="rect">
@@ -6066,13 +5814,13 @@
       </p:sp>
       <p:sp>
         <p:nvSpPr>
-          <p:cNvPr id="19" name="TextBox 18"/>
+          <p:cNvPr id="20" name="TextBox 19"/>
           <p:cNvSpPr txBox="1"/>
           <p:nvPr/>
         </p:nvSpPr>
         <p:spPr>
           <a:xfrm>
-            <a:off x="3504438" y="3356991"/>
+            <a:off x="3504438" y="4259961"/>
             <a:ext cx="2425446" cy="201168"/>
           </a:xfrm>
           <a:prstGeom prst="rect">
@@ -6108,13 +5856,13 @@
       </p:sp>
       <p:sp>
         <p:nvSpPr>
-          <p:cNvPr id="20" name="TextBox 19"/>
+          <p:cNvPr id="21" name="TextBox 20"/>
           <p:cNvSpPr txBox="1"/>
           <p:nvPr/>
         </p:nvSpPr>
         <p:spPr>
           <a:xfrm>
-            <a:off x="3504438" y="3613023"/>
+            <a:off x="3504438" y="4515993"/>
             <a:ext cx="2425446" cy="475488"/>
           </a:xfrm>
           <a:prstGeom prst="rect">
@@ -6150,7 +5898,7 @@
       </p:sp>
       <p:sp>
         <p:nvSpPr>
-          <p:cNvPr id="21" name="TextBox 20"/>
+          <p:cNvPr id="22" name="TextBox 21"/>
           <p:cNvSpPr txBox="1"/>
           <p:nvPr/>
         </p:nvSpPr>
@@ -6192,14 +5940,14 @@
       </p:sp>
       <p:sp>
         <p:nvSpPr>
-          <p:cNvPr id="22" name="Rectangle 21"/>
+          <p:cNvPr id="23" name="Rectangle 22"/>
           <p:cNvSpPr/>
           <p:nvPr/>
         </p:nvSpPr>
         <p:spPr>
           <a:xfrm>
-            <a:off x="6149340" y="3228975"/>
-            <a:ext cx="2644902" cy="2988945"/>
+            <a:off x="6149340" y="4131945"/>
+            <a:ext cx="2644902" cy="2085975"/>
           </a:xfrm>
           <a:prstGeom prst="rect">
             <a:avLst/>
@@ -6241,13 +5989,13 @@
       </p:sp>
       <p:sp>
         <p:nvSpPr>
-          <p:cNvPr id="23" name="Rectangle 22"/>
+          <p:cNvPr id="24" name="Rectangle 23"/>
           <p:cNvSpPr/>
           <p:nvPr/>
         </p:nvSpPr>
         <p:spPr>
           <a:xfrm>
-            <a:off x="6149340" y="3228975"/>
+            <a:off x="6149340" y="4131945"/>
             <a:ext cx="2644902" cy="45720"/>
           </a:xfrm>
           <a:prstGeom prst="rect">
@@ -6290,13 +6038,13 @@
       </p:sp>
       <p:sp>
         <p:nvSpPr>
-          <p:cNvPr id="24" name="TextBox 23"/>
+          <p:cNvPr id="25" name="TextBox 24"/>
           <p:cNvSpPr txBox="1"/>
           <p:nvPr/>
         </p:nvSpPr>
         <p:spPr>
           <a:xfrm>
-            <a:off x="6259068" y="3356991"/>
+            <a:off x="6259068" y="4259961"/>
             <a:ext cx="2425446" cy="201168"/>
           </a:xfrm>
           <a:prstGeom prst="rect">
@@ -6332,13 +6080,13 @@
       </p:sp>
       <p:sp>
         <p:nvSpPr>
-          <p:cNvPr id="25" name="TextBox 24"/>
+          <p:cNvPr id="26" name="TextBox 25"/>
           <p:cNvSpPr txBox="1"/>
           <p:nvPr/>
         </p:nvSpPr>
         <p:spPr>
           <a:xfrm>
-            <a:off x="6259068" y="3613023"/>
+            <a:off x="6259068" y="4515993"/>
             <a:ext cx="2425446" cy="475488"/>
           </a:xfrm>
           <a:prstGeom prst="rect">
@@ -6374,7 +6122,7 @@
       </p:sp>
       <p:sp>
         <p:nvSpPr>
-          <p:cNvPr id="26" name="TextBox 25"/>
+          <p:cNvPr id="27" name="TextBox 26"/>
           <p:cNvSpPr txBox="1"/>
           <p:nvPr/>
         </p:nvSpPr>
@@ -6416,14 +6164,14 @@
       </p:sp>
       <p:sp>
         <p:nvSpPr>
-          <p:cNvPr id="27" name="Rectangle 26"/>
+          <p:cNvPr id="28" name="Rectangle 27"/>
           <p:cNvSpPr/>
           <p:nvPr/>
         </p:nvSpPr>
         <p:spPr>
           <a:xfrm>
-            <a:off x="8903970" y="3228975"/>
-            <a:ext cx="2644902" cy="2988945"/>
+            <a:off x="8903970" y="4131945"/>
+            <a:ext cx="2644902" cy="2085975"/>
           </a:xfrm>
           <a:prstGeom prst="rect">
             <a:avLst/>
@@ -6465,13 +6213,13 @@
       </p:sp>
       <p:sp>
         <p:nvSpPr>
-          <p:cNvPr id="28" name="Rectangle 27"/>
+          <p:cNvPr id="29" name="Rectangle 28"/>
           <p:cNvSpPr/>
           <p:nvPr/>
         </p:nvSpPr>
         <p:spPr>
           <a:xfrm>
-            <a:off x="8903970" y="3228975"/>
+            <a:off x="8903970" y="4131945"/>
             <a:ext cx="2644902" cy="45720"/>
           </a:xfrm>
           <a:prstGeom prst="rect">
@@ -6514,13 +6262,13 @@
       </p:sp>
       <p:sp>
         <p:nvSpPr>
-          <p:cNvPr id="29" name="TextBox 28"/>
+          <p:cNvPr id="30" name="TextBox 29"/>
           <p:cNvSpPr txBox="1"/>
           <p:nvPr/>
         </p:nvSpPr>
         <p:spPr>
           <a:xfrm>
-            <a:off x="9013698" y="3356991"/>
+            <a:off x="9013698" y="4259961"/>
             <a:ext cx="2425446" cy="201168"/>
           </a:xfrm>
           <a:prstGeom prst="rect">
@@ -6556,13 +6304,13 @@
       </p:sp>
       <p:sp>
         <p:nvSpPr>
-          <p:cNvPr id="30" name="TextBox 29"/>
+          <p:cNvPr id="31" name="TextBox 30"/>
           <p:cNvSpPr txBox="1"/>
           <p:nvPr/>
         </p:nvSpPr>
         <p:spPr>
           <a:xfrm>
-            <a:off x="9013698" y="3613023"/>
+            <a:off x="9013698" y="4515993"/>
             <a:ext cx="2425446" cy="475488"/>
           </a:xfrm>
           <a:prstGeom prst="rect">
@@ -6598,7 +6346,7 @@
       </p:sp>
       <p:sp>
         <p:nvSpPr>
-          <p:cNvPr id="31" name="TextBox 30"/>
+          <p:cNvPr id="32" name="TextBox 31"/>
           <p:cNvSpPr txBox="1"/>
           <p:nvPr/>
         </p:nvSpPr>
@@ -6640,7 +6388,7 @@
       </p:sp>
       <p:sp>
         <p:nvSpPr>
-          <p:cNvPr id="32" name="Rectangle 31"/>
+          <p:cNvPr id="33" name="Rectangle 32"/>
           <p:cNvSpPr/>
           <p:nvPr/>
         </p:nvSpPr>
@@ -6689,7 +6437,7 @@
       </p:sp>
       <p:sp>
         <p:nvSpPr>
-          <p:cNvPr id="33" name="TextBox 32"/>
+          <p:cNvPr id="34" name="TextBox 33"/>
           <p:cNvSpPr txBox="1"/>
           <p:nvPr/>
         </p:nvSpPr>
@@ -6731,7 +6479,7 @@
       </p:sp>
       <p:sp>
         <p:nvSpPr>
-          <p:cNvPr id="34" name="TextBox 33"/>
+          <p:cNvPr id="35" name="TextBox 34"/>
           <p:cNvSpPr txBox="1"/>
           <p:nvPr/>
         </p:nvSpPr>
@@ -6773,7 +6521,7 @@
       </p:sp>
       <p:sp>
         <p:nvSpPr>
-          <p:cNvPr id="35" name="TextBox 34"/>
+          <p:cNvPr id="36" name="TextBox 35"/>
           <p:cNvSpPr txBox="1"/>
           <p:nvPr/>
         </p:nvSpPr>
@@ -6888,48 +6636,6 @@
         </p:nvSpPr>
         <p:spPr>
           <a:xfrm>
-            <a:off x="5897880" y="310896"/>
-            <a:ext cx="4800600" cy="256032"/>
-          </a:xfrm>
-          <a:prstGeom prst="rect">
-            <a:avLst/>
-          </a:prstGeom>
-          <a:noFill/>
-        </p:spPr>
-        <p:txBody>
-          <a:bodyPr wrap="none" lIns="9144" rIns="9144" tIns="9144" bIns="9144" anchor="t">
-            <a:spAutoFit/>
-          </a:bodyPr>
-          <a:lstStyle/>
-          <a:p>
-            <a:pPr algn="r">
-              <a:spcAft>
-                <a:spcPts val="0"/>
-              </a:spcAft>
-              <a:defRPr sz="680" b="1">
-                <a:solidFill>
-                  <a:srgbClr val="4F6B00"/>
-                </a:solidFill>
-                <a:latin typeface="Inter"/>
-              </a:defRPr>
-            </a:pPr>
-            <a:r>
-              <a:rPr>
-                <a:latin typeface="Inter"/>
-              </a:rPr>
-              <a:t>Illustrative, Gradient Maintained — demo data, not the client's holdings or managers</a:t>
-            </a:r>
-          </a:p>
-        </p:txBody>
-      </p:sp>
-      <p:sp>
-        <p:nvSpPr>
-          <p:cNvPr id="4" name="TextBox 3"/>
-          <p:cNvSpPr txBox="1"/>
-          <p:nvPr/>
-        </p:nvSpPr>
-        <p:spPr>
-          <a:xfrm>
             <a:off x="640080" y="566928"/>
             <a:ext cx="10058400" cy="530352"/>
           </a:xfrm>
@@ -6966,7 +6672,7 @@
       </p:sp>
       <p:sp>
         <p:nvSpPr>
-          <p:cNvPr id="5" name="Rectangle 4"/>
+          <p:cNvPr id="4" name="Rectangle 3"/>
           <p:cNvSpPr/>
           <p:nvPr/>
         </p:nvSpPr>
@@ -7015,7 +6721,7 @@
       </p:sp>
       <p:sp>
         <p:nvSpPr>
-          <p:cNvPr id="6" name="Rectangle 5"/>
+          <p:cNvPr id="5" name="Rectangle 4"/>
           <p:cNvSpPr/>
           <p:nvPr/>
         </p:nvSpPr>
@@ -7064,7 +6770,7 @@
       </p:sp>
       <p:sp>
         <p:nvSpPr>
-          <p:cNvPr id="7" name="TextBox 6"/>
+          <p:cNvPr id="6" name="TextBox 5"/>
           <p:cNvSpPr txBox="1"/>
           <p:nvPr/>
         </p:nvSpPr>
@@ -7106,7 +6812,7 @@
       </p:sp>
       <p:sp>
         <p:nvSpPr>
-          <p:cNvPr id="8" name="TextBox 7"/>
+          <p:cNvPr id="7" name="TextBox 6"/>
           <p:cNvSpPr txBox="1"/>
           <p:nvPr/>
         </p:nvSpPr>
@@ -7148,7 +6854,7 @@
       </p:sp>
       <p:graphicFrame>
         <p:nvGraphicFramePr>
-          <p:cNvPr id="9" name="Table 8"/>
+          <p:cNvPr id="8" name="Table 7"/>
           <p:cNvGraphicFramePr>
             <a:graphicFrameLocks noGrp="1"/>
           </p:cNvGraphicFramePr>
@@ -7297,7 +7003,7 @@
                         <a:rPr>
                           <a:latin typeface="Inter"/>
                         </a:rPr>
-                        <a:t>● available</a:t>
+                        <a:t>● Available</a:t>
                       </a:r>
                     </a:p>
                   </a:txBody>
@@ -7380,7 +7086,7 @@
                         <a:rPr>
                           <a:latin typeface="Inter"/>
                         </a:rPr>
-                        <a:t>● available</a:t>
+                        <a:t>● Available</a:t>
                       </a:r>
                     </a:p>
                   </a:txBody>
@@ -7463,7 +7169,7 @@
                         <a:rPr>
                           <a:latin typeface="Inter"/>
                         </a:rPr>
-                        <a:t>● degraded</a:t>
+                        <a:t>● Incomplete</a:t>
                       </a:r>
                     </a:p>
                   </a:txBody>
@@ -7507,7 +7213,7 @@
       </p:graphicFrame>
       <p:sp>
         <p:nvSpPr>
-          <p:cNvPr id="10" name="TextBox 9"/>
+          <p:cNvPr id="9" name="TextBox 8"/>
           <p:cNvSpPr txBox="1"/>
           <p:nvPr/>
         </p:nvSpPr>
@@ -7549,7 +7255,7 @@
       </p:sp>
       <p:sp>
         <p:nvSpPr>
-          <p:cNvPr id="11" name="Rectangle 10"/>
+          <p:cNvPr id="10" name="Rectangle 9"/>
           <p:cNvSpPr/>
           <p:nvPr/>
         </p:nvSpPr>
@@ -7598,7 +7304,7 @@
       </p:sp>
       <p:sp>
         <p:nvSpPr>
-          <p:cNvPr id="12" name="Rectangle 11"/>
+          <p:cNvPr id="11" name="Rectangle 10"/>
           <p:cNvSpPr/>
           <p:nvPr/>
         </p:nvSpPr>
@@ -7647,7 +7353,7 @@
       </p:sp>
       <p:sp>
         <p:nvSpPr>
-          <p:cNvPr id="13" name="TextBox 12"/>
+          <p:cNvPr id="12" name="TextBox 11"/>
           <p:cNvSpPr txBox="1"/>
           <p:nvPr/>
         </p:nvSpPr>
@@ -7689,7 +7395,7 @@
       </p:sp>
       <p:sp>
         <p:nvSpPr>
-          <p:cNvPr id="14" name="TextBox 13"/>
+          <p:cNvPr id="13" name="TextBox 12"/>
           <p:cNvSpPr txBox="1"/>
           <p:nvPr/>
         </p:nvSpPr>
@@ -7731,7 +7437,7 @@
       </p:sp>
       <p:sp>
         <p:nvSpPr>
-          <p:cNvPr id="15" name="Rectangle 14"/>
+          <p:cNvPr id="14" name="Rectangle 13"/>
           <p:cNvSpPr/>
           <p:nvPr/>
         </p:nvSpPr>
@@ -7780,7 +7486,7 @@
       </p:sp>
       <p:sp>
         <p:nvSpPr>
-          <p:cNvPr id="16" name="Rectangle 15"/>
+          <p:cNvPr id="15" name="Rectangle 14"/>
           <p:cNvSpPr/>
           <p:nvPr/>
         </p:nvSpPr>
@@ -7829,7 +7535,7 @@
       </p:sp>
       <p:sp>
         <p:nvSpPr>
-          <p:cNvPr id="17" name="TextBox 16"/>
+          <p:cNvPr id="16" name="TextBox 15"/>
           <p:cNvSpPr txBox="1"/>
           <p:nvPr/>
         </p:nvSpPr>
@@ -7871,7 +7577,7 @@
       </p:sp>
       <p:sp>
         <p:nvSpPr>
-          <p:cNvPr id="18" name="TextBox 17"/>
+          <p:cNvPr id="17" name="TextBox 16"/>
           <p:cNvSpPr txBox="1"/>
           <p:nvPr/>
         </p:nvSpPr>
@@ -7913,7 +7619,7 @@
       </p:sp>
       <p:sp>
         <p:nvSpPr>
-          <p:cNvPr id="19" name="Rectangle 18"/>
+          <p:cNvPr id="18" name="Rectangle 17"/>
           <p:cNvSpPr/>
           <p:nvPr/>
         </p:nvSpPr>
@@ -7962,7 +7668,7 @@
       </p:sp>
       <p:sp>
         <p:nvSpPr>
-          <p:cNvPr id="20" name="TextBox 19"/>
+          <p:cNvPr id="19" name="TextBox 18"/>
           <p:cNvSpPr txBox="1"/>
           <p:nvPr/>
         </p:nvSpPr>
@@ -8004,7 +7710,7 @@
       </p:sp>
       <p:sp>
         <p:nvSpPr>
-          <p:cNvPr id="21" name="TextBox 20"/>
+          <p:cNvPr id="20" name="TextBox 19"/>
           <p:cNvSpPr txBox="1"/>
           <p:nvPr/>
         </p:nvSpPr>
@@ -8046,7 +7752,7 @@
       </p:sp>
       <p:sp>
         <p:nvSpPr>
-          <p:cNvPr id="22" name="TextBox 21"/>
+          <p:cNvPr id="21" name="TextBox 20"/>
           <p:cNvSpPr txBox="1"/>
           <p:nvPr/>
         </p:nvSpPr>
@@ -8161,48 +7867,6 @@
         </p:nvSpPr>
         <p:spPr>
           <a:xfrm>
-            <a:off x="5897880" y="310896"/>
-            <a:ext cx="4800600" cy="256032"/>
-          </a:xfrm>
-          <a:prstGeom prst="rect">
-            <a:avLst/>
-          </a:prstGeom>
-          <a:noFill/>
-        </p:spPr>
-        <p:txBody>
-          <a:bodyPr wrap="none" lIns="9144" rIns="9144" tIns="9144" bIns="9144" anchor="t">
-            <a:spAutoFit/>
-          </a:bodyPr>
-          <a:lstStyle/>
-          <a:p>
-            <a:pPr algn="r">
-              <a:spcAft>
-                <a:spcPts val="0"/>
-              </a:spcAft>
-              <a:defRPr sz="680" b="1">
-                <a:solidFill>
-                  <a:srgbClr val="4F6B00"/>
-                </a:solidFill>
-                <a:latin typeface="Inter"/>
-              </a:defRPr>
-            </a:pPr>
-            <a:r>
-              <a:rPr>
-                <a:latin typeface="Inter"/>
-              </a:rPr>
-              <a:t>Illustrative, Gradient Maintained — demo data, not the client's holdings or managers</a:t>
-            </a:r>
-          </a:p>
-        </p:txBody>
-      </p:sp>
-      <p:sp>
-        <p:nvSpPr>
-          <p:cNvPr id="4" name="TextBox 3"/>
-          <p:cNvSpPr txBox="1"/>
-          <p:nvPr/>
-        </p:nvSpPr>
-        <p:spPr>
-          <a:xfrm>
             <a:off x="640080" y="566928"/>
             <a:ext cx="10058400" cy="530352"/>
           </a:xfrm>
@@ -8239,7 +7903,7 @@
       </p:sp>
       <p:sp>
         <p:nvSpPr>
-          <p:cNvPr id="5" name="Rectangle 4"/>
+          <p:cNvPr id="4" name="Rectangle 3"/>
           <p:cNvSpPr/>
           <p:nvPr/>
         </p:nvSpPr>
@@ -8288,7 +7952,7 @@
       </p:sp>
       <p:sp>
         <p:nvSpPr>
-          <p:cNvPr id="6" name="Rectangle 5"/>
+          <p:cNvPr id="5" name="Rectangle 4"/>
           <p:cNvSpPr/>
           <p:nvPr/>
         </p:nvSpPr>
@@ -8337,7 +8001,7 @@
       </p:sp>
       <p:sp>
         <p:nvSpPr>
-          <p:cNvPr id="7" name="TextBox 6"/>
+          <p:cNvPr id="6" name="TextBox 5"/>
           <p:cNvSpPr txBox="1"/>
           <p:nvPr/>
         </p:nvSpPr>
@@ -8379,7 +8043,7 @@
       </p:sp>
       <p:sp>
         <p:nvSpPr>
-          <p:cNvPr id="8" name="Rectangle 7"/>
+          <p:cNvPr id="7" name="Rectangle 6"/>
           <p:cNvSpPr/>
           <p:nvPr/>
         </p:nvSpPr>
@@ -8428,7 +8092,7 @@
       </p:sp>
       <p:sp>
         <p:nvSpPr>
-          <p:cNvPr id="9" name="Rectangle 8"/>
+          <p:cNvPr id="8" name="Rectangle 7"/>
           <p:cNvSpPr/>
           <p:nvPr/>
         </p:nvSpPr>
@@ -8477,7 +8141,7 @@
       </p:sp>
       <p:sp>
         <p:nvSpPr>
-          <p:cNvPr id="10" name="TextBox 9"/>
+          <p:cNvPr id="9" name="TextBox 8"/>
           <p:cNvSpPr txBox="1"/>
           <p:nvPr/>
         </p:nvSpPr>
@@ -8519,7 +8183,7 @@
       </p:sp>
       <p:sp>
         <p:nvSpPr>
-          <p:cNvPr id="11" name="TextBox 10"/>
+          <p:cNvPr id="10" name="TextBox 9"/>
           <p:cNvSpPr txBox="1"/>
           <p:nvPr/>
         </p:nvSpPr>
@@ -8561,7 +8225,7 @@
       </p:sp>
       <p:sp>
         <p:nvSpPr>
-          <p:cNvPr id="12" name="Rectangle 11"/>
+          <p:cNvPr id="11" name="Rectangle 10"/>
           <p:cNvSpPr/>
           <p:nvPr/>
         </p:nvSpPr>
@@ -8610,7 +8274,7 @@
       </p:sp>
       <p:sp>
         <p:nvSpPr>
-          <p:cNvPr id="13" name="Rectangle 12"/>
+          <p:cNvPr id="12" name="Rectangle 11"/>
           <p:cNvSpPr/>
           <p:nvPr/>
         </p:nvSpPr>
@@ -8659,7 +8323,7 @@
       </p:sp>
       <p:sp>
         <p:nvSpPr>
-          <p:cNvPr id="14" name="TextBox 13"/>
+          <p:cNvPr id="13" name="TextBox 12"/>
           <p:cNvSpPr txBox="1"/>
           <p:nvPr/>
         </p:nvSpPr>
@@ -8701,7 +8365,7 @@
       </p:sp>
       <p:sp>
         <p:nvSpPr>
-          <p:cNvPr id="15" name="TextBox 14"/>
+          <p:cNvPr id="14" name="TextBox 13"/>
           <p:cNvSpPr txBox="1"/>
           <p:nvPr/>
         </p:nvSpPr>
@@ -8743,7 +8407,7 @@
       </p:sp>
       <p:sp>
         <p:nvSpPr>
-          <p:cNvPr id="16" name="Rectangle 15"/>
+          <p:cNvPr id="15" name="Rectangle 14"/>
           <p:cNvSpPr/>
           <p:nvPr/>
         </p:nvSpPr>
@@ -8792,7 +8456,7 @@
       </p:sp>
       <p:sp>
         <p:nvSpPr>
-          <p:cNvPr id="17" name="TextBox 16"/>
+          <p:cNvPr id="16" name="TextBox 15"/>
           <p:cNvSpPr txBox="1"/>
           <p:nvPr/>
         </p:nvSpPr>
@@ -8834,7 +8498,7 @@
       </p:sp>
       <p:sp>
         <p:nvSpPr>
-          <p:cNvPr id="18" name="TextBox 17"/>
+          <p:cNvPr id="17" name="TextBox 16"/>
           <p:cNvSpPr txBox="1"/>
           <p:nvPr/>
         </p:nvSpPr>
@@ -8876,7 +8540,7 @@
       </p:sp>
       <p:sp>
         <p:nvSpPr>
-          <p:cNvPr id="19" name="TextBox 18"/>
+          <p:cNvPr id="18" name="TextBox 17"/>
           <p:cNvSpPr txBox="1"/>
           <p:nvPr/>
         </p:nvSpPr>
@@ -8991,48 +8655,6 @@
         </p:nvSpPr>
         <p:spPr>
           <a:xfrm>
-            <a:off x="5897880" y="310896"/>
-            <a:ext cx="4800600" cy="256032"/>
-          </a:xfrm>
-          <a:prstGeom prst="rect">
-            <a:avLst/>
-          </a:prstGeom>
-          <a:noFill/>
-        </p:spPr>
-        <p:txBody>
-          <a:bodyPr wrap="none" lIns="9144" rIns="9144" tIns="9144" bIns="9144" anchor="t">
-            <a:spAutoFit/>
-          </a:bodyPr>
-          <a:lstStyle/>
-          <a:p>
-            <a:pPr algn="r">
-              <a:spcAft>
-                <a:spcPts val="0"/>
-              </a:spcAft>
-              <a:defRPr sz="680" b="1">
-                <a:solidFill>
-                  <a:srgbClr val="4F6B00"/>
-                </a:solidFill>
-                <a:latin typeface="Inter"/>
-              </a:defRPr>
-            </a:pPr>
-            <a:r>
-              <a:rPr>
-                <a:latin typeface="Inter"/>
-              </a:rPr>
-              <a:t>Illustrative, Gradient Maintained — demo data, not the client's holdings or managers</a:t>
-            </a:r>
-          </a:p>
-        </p:txBody>
-      </p:sp>
-      <p:sp>
-        <p:nvSpPr>
-          <p:cNvPr id="4" name="TextBox 3"/>
-          <p:cNvSpPr txBox="1"/>
-          <p:nvPr/>
-        </p:nvSpPr>
-        <p:spPr>
-          <a:xfrm>
             <a:off x="640080" y="566928"/>
             <a:ext cx="10058400" cy="530352"/>
           </a:xfrm>
@@ -9069,7 +8691,7 @@
       </p:sp>
       <p:sp>
         <p:nvSpPr>
-          <p:cNvPr id="5" name="Rectangle 4"/>
+          <p:cNvPr id="4" name="Rectangle 3"/>
           <p:cNvSpPr/>
           <p:nvPr/>
         </p:nvSpPr>
@@ -9118,7 +8740,7 @@
       </p:sp>
       <p:sp>
         <p:nvSpPr>
-          <p:cNvPr id="6" name="Rectangle 5"/>
+          <p:cNvPr id="5" name="Rectangle 4"/>
           <p:cNvSpPr/>
           <p:nvPr/>
         </p:nvSpPr>
@@ -9167,7 +8789,7 @@
       </p:sp>
       <p:sp>
         <p:nvSpPr>
-          <p:cNvPr id="7" name="TextBox 6"/>
+          <p:cNvPr id="6" name="TextBox 5"/>
           <p:cNvSpPr txBox="1"/>
           <p:nvPr/>
         </p:nvSpPr>
@@ -9209,7 +8831,7 @@
       </p:sp>
       <p:sp>
         <p:nvSpPr>
-          <p:cNvPr id="8" name="TextBox 7"/>
+          <p:cNvPr id="7" name="TextBox 6"/>
           <p:cNvSpPr txBox="1"/>
           <p:nvPr/>
         </p:nvSpPr>
@@ -9251,7 +8873,7 @@
       </p:sp>
       <p:graphicFrame>
         <p:nvGraphicFramePr>
-          <p:cNvPr id="9" name="Chart 8"/>
+          <p:cNvPr id="8" name="Chart 7"/>
           <p:cNvGraphicFramePr>
             <a:graphicFrameLocks noGrp="1"/>
           </p:cNvGraphicFramePr>
@@ -9269,7 +8891,7 @@
       </p:graphicFrame>
       <p:sp>
         <p:nvSpPr>
-          <p:cNvPr id="10" name="Rectangle 9"/>
+          <p:cNvPr id="9" name="Rectangle 8"/>
           <p:cNvSpPr/>
           <p:nvPr/>
         </p:nvSpPr>
@@ -9318,7 +8940,7 @@
       </p:sp>
       <p:sp>
         <p:nvSpPr>
-          <p:cNvPr id="11" name="TextBox 10"/>
+          <p:cNvPr id="10" name="TextBox 9"/>
           <p:cNvSpPr txBox="1"/>
           <p:nvPr/>
         </p:nvSpPr>
@@ -9360,7 +8982,7 @@
       </p:sp>
       <p:graphicFrame>
         <p:nvGraphicFramePr>
-          <p:cNvPr id="12" name="Chart 11"/>
+          <p:cNvPr id="11" name="Chart 10"/>
           <p:cNvGraphicFramePr>
             <a:graphicFrameLocks noGrp="1"/>
           </p:cNvGraphicFramePr>
@@ -9378,7 +9000,7 @@
       </p:graphicFrame>
       <p:sp>
         <p:nvSpPr>
-          <p:cNvPr id="13" name="Rectangle 12"/>
+          <p:cNvPr id="12" name="Rectangle 11"/>
           <p:cNvSpPr/>
           <p:nvPr/>
         </p:nvSpPr>
@@ -9427,7 +9049,7 @@
       </p:sp>
       <p:sp>
         <p:nvSpPr>
-          <p:cNvPr id="14" name="TextBox 13"/>
+          <p:cNvPr id="13" name="TextBox 12"/>
           <p:cNvSpPr txBox="1"/>
           <p:nvPr/>
         </p:nvSpPr>
@@ -9469,7 +9091,7 @@
       </p:sp>
       <p:sp>
         <p:nvSpPr>
-          <p:cNvPr id="15" name="TextBox 14"/>
+          <p:cNvPr id="14" name="TextBox 13"/>
           <p:cNvSpPr txBox="1"/>
           <p:nvPr/>
         </p:nvSpPr>
@@ -9511,7 +9133,7 @@
       </p:sp>
       <p:sp>
         <p:nvSpPr>
-          <p:cNvPr id="16" name="TextBox 15"/>
+          <p:cNvPr id="15" name="TextBox 14"/>
           <p:cNvSpPr txBox="1"/>
           <p:nvPr/>
         </p:nvSpPr>
@@ -9626,48 +9248,6 @@
         </p:nvSpPr>
         <p:spPr>
           <a:xfrm>
-            <a:off x="5897880" y="310896"/>
-            <a:ext cx="4800600" cy="256032"/>
-          </a:xfrm>
-          <a:prstGeom prst="rect">
-            <a:avLst/>
-          </a:prstGeom>
-          <a:noFill/>
-        </p:spPr>
-        <p:txBody>
-          <a:bodyPr wrap="none" lIns="9144" rIns="9144" tIns="9144" bIns="9144" anchor="t">
-            <a:spAutoFit/>
-          </a:bodyPr>
-          <a:lstStyle/>
-          <a:p>
-            <a:pPr algn="r">
-              <a:spcAft>
-                <a:spcPts val="0"/>
-              </a:spcAft>
-              <a:defRPr sz="680" b="1">
-                <a:solidFill>
-                  <a:srgbClr val="4F6B00"/>
-                </a:solidFill>
-                <a:latin typeface="Inter"/>
-              </a:defRPr>
-            </a:pPr>
-            <a:r>
-              <a:rPr>
-                <a:latin typeface="Inter"/>
-              </a:rPr>
-              <a:t>Illustrative, Gradient Maintained — demo data, not the client's holdings or managers</a:t>
-            </a:r>
-          </a:p>
-        </p:txBody>
-      </p:sp>
-      <p:sp>
-        <p:nvSpPr>
-          <p:cNvPr id="4" name="TextBox 3"/>
-          <p:cNvSpPr txBox="1"/>
-          <p:nvPr/>
-        </p:nvSpPr>
-        <p:spPr>
-          <a:xfrm>
             <a:off x="640080" y="566928"/>
             <a:ext cx="10058400" cy="530352"/>
           </a:xfrm>
@@ -9704,7 +9284,7 @@
       </p:sp>
       <p:sp>
         <p:nvSpPr>
-          <p:cNvPr id="5" name="Rectangle 4"/>
+          <p:cNvPr id="4" name="Rectangle 3"/>
           <p:cNvSpPr/>
           <p:nvPr/>
         </p:nvSpPr>
@@ -9753,7 +9333,7 @@
       </p:sp>
       <p:sp>
         <p:nvSpPr>
-          <p:cNvPr id="6" name="Rectangle 5"/>
+          <p:cNvPr id="5" name="Rectangle 4"/>
           <p:cNvSpPr/>
           <p:nvPr/>
         </p:nvSpPr>
@@ -9802,7 +9382,7 @@
       </p:sp>
       <p:sp>
         <p:nvSpPr>
-          <p:cNvPr id="7" name="TextBox 6"/>
+          <p:cNvPr id="6" name="TextBox 5"/>
           <p:cNvSpPr txBox="1"/>
           <p:nvPr/>
         </p:nvSpPr>
@@ -9844,7 +9424,7 @@
       </p:sp>
       <p:sp>
         <p:nvSpPr>
-          <p:cNvPr id="8" name="TextBox 7"/>
+          <p:cNvPr id="7" name="TextBox 6"/>
           <p:cNvSpPr txBox="1"/>
           <p:nvPr/>
         </p:nvSpPr>
@@ -9886,7 +9466,7 @@
       </p:sp>
       <p:graphicFrame>
         <p:nvGraphicFramePr>
-          <p:cNvPr id="9" name="Table 8"/>
+          <p:cNvPr id="8" name="Table 7"/>
           <p:cNvGraphicFramePr>
             <a:graphicFrameLocks noGrp="1"/>
           </p:cNvGraphicFramePr>
@@ -10008,7 +9588,7 @@
                         <a:rPr>
                           <a:latin typeface="Inter"/>
                         </a:rPr>
-                        <a:t>● MEDIUM</a:t>
+                        <a:t>● Medium</a:t>
                       </a:r>
                     </a:p>
                   </a:txBody>
@@ -10091,7 +9671,7 @@
                         <a:rPr>
                           <a:latin typeface="Inter"/>
                         </a:rPr>
-                        <a:t>● MEDIUM</a:t>
+                        <a:t>● Medium</a:t>
                       </a:r>
                     </a:p>
                   </a:txBody>
@@ -10174,7 +9754,7 @@
                         <a:rPr>
                           <a:latin typeface="Inter"/>
                         </a:rPr>
-                        <a:t>● LOW</a:t>
+                        <a:t>● Low</a:t>
                       </a:r>
                     </a:p>
                   </a:txBody>
@@ -10245,7 +9825,7 @@
       </p:graphicFrame>
       <p:sp>
         <p:nvSpPr>
-          <p:cNvPr id="10" name="TextBox 9"/>
+          <p:cNvPr id="9" name="TextBox 8"/>
           <p:cNvSpPr txBox="1"/>
           <p:nvPr/>
         </p:nvSpPr>
@@ -10295,7 +9875,7 @@
       </p:sp>
       <p:sp>
         <p:nvSpPr>
-          <p:cNvPr id="11" name="Rectangle 10"/>
+          <p:cNvPr id="10" name="Rectangle 9"/>
           <p:cNvSpPr/>
           <p:nvPr/>
         </p:nvSpPr>
@@ -10344,7 +9924,7 @@
       </p:sp>
       <p:sp>
         <p:nvSpPr>
-          <p:cNvPr id="12" name="Rectangle 11"/>
+          <p:cNvPr id="11" name="Rectangle 10"/>
           <p:cNvSpPr/>
           <p:nvPr/>
         </p:nvSpPr>
@@ -10393,7 +9973,7 @@
       </p:sp>
       <p:sp>
         <p:nvSpPr>
-          <p:cNvPr id="13" name="TextBox 12"/>
+          <p:cNvPr id="12" name="TextBox 11"/>
           <p:cNvSpPr txBox="1"/>
           <p:nvPr/>
         </p:nvSpPr>
@@ -10435,7 +10015,7 @@
       </p:sp>
       <p:sp>
         <p:nvSpPr>
-          <p:cNvPr id="14" name="TextBox 13"/>
+          <p:cNvPr id="13" name="TextBox 12"/>
           <p:cNvSpPr txBox="1"/>
           <p:nvPr/>
         </p:nvSpPr>
@@ -10477,7 +10057,7 @@
       </p:sp>
       <p:sp>
         <p:nvSpPr>
-          <p:cNvPr id="15" name="Rectangle 14"/>
+          <p:cNvPr id="14" name="Rectangle 13"/>
           <p:cNvSpPr/>
           <p:nvPr/>
         </p:nvSpPr>
@@ -10526,7 +10106,7 @@
       </p:sp>
       <p:sp>
         <p:nvSpPr>
-          <p:cNvPr id="16" name="Rectangle 15"/>
+          <p:cNvPr id="15" name="Rectangle 14"/>
           <p:cNvSpPr/>
           <p:nvPr/>
         </p:nvSpPr>
@@ -10575,7 +10155,7 @@
       </p:sp>
       <p:sp>
         <p:nvSpPr>
-          <p:cNvPr id="17" name="TextBox 16"/>
+          <p:cNvPr id="16" name="TextBox 15"/>
           <p:cNvSpPr txBox="1"/>
           <p:nvPr/>
         </p:nvSpPr>
@@ -10617,7 +10197,7 @@
       </p:sp>
       <p:sp>
         <p:nvSpPr>
-          <p:cNvPr id="18" name="TextBox 17"/>
+          <p:cNvPr id="17" name="TextBox 16"/>
           <p:cNvSpPr txBox="1"/>
           <p:nvPr/>
         </p:nvSpPr>
@@ -10659,7 +10239,7 @@
       </p:sp>
       <p:sp>
         <p:nvSpPr>
-          <p:cNvPr id="19" name="Rectangle 18"/>
+          <p:cNvPr id="18" name="Rectangle 17"/>
           <p:cNvSpPr/>
           <p:nvPr/>
         </p:nvSpPr>
@@ -10708,7 +10288,7 @@
       </p:sp>
       <p:sp>
         <p:nvSpPr>
-          <p:cNvPr id="20" name="TextBox 19"/>
+          <p:cNvPr id="19" name="TextBox 18"/>
           <p:cNvSpPr txBox="1"/>
           <p:nvPr/>
         </p:nvSpPr>
@@ -10750,7 +10330,7 @@
       </p:sp>
       <p:sp>
         <p:nvSpPr>
-          <p:cNvPr id="21" name="TextBox 20"/>
+          <p:cNvPr id="20" name="TextBox 19"/>
           <p:cNvSpPr txBox="1"/>
           <p:nvPr/>
         </p:nvSpPr>
@@ -10792,7 +10372,7 @@
       </p:sp>
       <p:sp>
         <p:nvSpPr>
-          <p:cNvPr id="22" name="TextBox 21"/>
+          <p:cNvPr id="21" name="TextBox 20"/>
           <p:cNvSpPr txBox="1"/>
           <p:nvPr/>
         </p:nvSpPr>
@@ -10907,48 +10487,6 @@
         </p:nvSpPr>
         <p:spPr>
           <a:xfrm>
-            <a:off x="5897880" y="310896"/>
-            <a:ext cx="4800600" cy="256032"/>
-          </a:xfrm>
-          <a:prstGeom prst="rect">
-            <a:avLst/>
-          </a:prstGeom>
-          <a:noFill/>
-        </p:spPr>
-        <p:txBody>
-          <a:bodyPr wrap="none" lIns="9144" rIns="9144" tIns="9144" bIns="9144" anchor="t">
-            <a:spAutoFit/>
-          </a:bodyPr>
-          <a:lstStyle/>
-          <a:p>
-            <a:pPr algn="r">
-              <a:spcAft>
-                <a:spcPts val="0"/>
-              </a:spcAft>
-              <a:defRPr sz="680" b="1">
-                <a:solidFill>
-                  <a:srgbClr val="4F6B00"/>
-                </a:solidFill>
-                <a:latin typeface="Inter"/>
-              </a:defRPr>
-            </a:pPr>
-            <a:r>
-              <a:rPr>
-                <a:latin typeface="Inter"/>
-              </a:rPr>
-              <a:t>Illustrative, Gradient Maintained — demo data, not the client's holdings or managers</a:t>
-            </a:r>
-          </a:p>
-        </p:txBody>
-      </p:sp>
-      <p:sp>
-        <p:nvSpPr>
-          <p:cNvPr id="4" name="TextBox 3"/>
-          <p:cNvSpPr txBox="1"/>
-          <p:nvPr/>
-        </p:nvSpPr>
-        <p:spPr>
-          <a:xfrm>
             <a:off x="640080" y="566928"/>
             <a:ext cx="10058400" cy="530352"/>
           </a:xfrm>
@@ -10985,7 +10523,7 @@
       </p:sp>
       <p:sp>
         <p:nvSpPr>
-          <p:cNvPr id="5" name="Rectangle 4"/>
+          <p:cNvPr id="4" name="Rectangle 3"/>
           <p:cNvSpPr/>
           <p:nvPr/>
         </p:nvSpPr>
@@ -11034,7 +10572,7 @@
       </p:sp>
       <p:sp>
         <p:nvSpPr>
-          <p:cNvPr id="6" name="Rectangle 5"/>
+          <p:cNvPr id="5" name="Rectangle 4"/>
           <p:cNvSpPr/>
           <p:nvPr/>
         </p:nvSpPr>
@@ -11083,7 +10621,7 @@
       </p:sp>
       <p:sp>
         <p:nvSpPr>
-          <p:cNvPr id="7" name="TextBox 6"/>
+          <p:cNvPr id="6" name="TextBox 5"/>
           <p:cNvSpPr txBox="1"/>
           <p:nvPr/>
         </p:nvSpPr>
@@ -11125,7 +10663,7 @@
       </p:sp>
       <p:sp>
         <p:nvSpPr>
-          <p:cNvPr id="8" name="TextBox 7"/>
+          <p:cNvPr id="7" name="TextBox 6"/>
           <p:cNvSpPr txBox="1"/>
           <p:nvPr/>
         </p:nvSpPr>
@@ -11167,7 +10705,7 @@
       </p:sp>
       <p:graphicFrame>
         <p:nvGraphicFramePr>
-          <p:cNvPr id="9" name="Table 8"/>
+          <p:cNvPr id="8" name="Table 7"/>
           <p:cNvGraphicFramePr>
             <a:graphicFrameLocks noGrp="1"/>
           </p:cNvGraphicFramePr>
@@ -11849,7 +11387,7 @@
       </p:graphicFrame>
       <p:sp>
         <p:nvSpPr>
-          <p:cNvPr id="10" name="TextBox 9"/>
+          <p:cNvPr id="9" name="TextBox 8"/>
           <p:cNvSpPr txBox="1"/>
           <p:nvPr/>
         </p:nvSpPr>
@@ -11915,7 +11453,7 @@
       </p:sp>
       <p:sp>
         <p:nvSpPr>
-          <p:cNvPr id="11" name="Rectangle 10"/>
+          <p:cNvPr id="10" name="Rectangle 9"/>
           <p:cNvSpPr/>
           <p:nvPr/>
         </p:nvSpPr>
@@ -11964,7 +11502,7 @@
       </p:sp>
       <p:sp>
         <p:nvSpPr>
-          <p:cNvPr id="12" name="TextBox 11"/>
+          <p:cNvPr id="11" name="TextBox 10"/>
           <p:cNvSpPr txBox="1"/>
           <p:nvPr/>
         </p:nvSpPr>
@@ -12006,7 +11544,7 @@
       </p:sp>
       <p:sp>
         <p:nvSpPr>
-          <p:cNvPr id="13" name="TextBox 12"/>
+          <p:cNvPr id="12" name="TextBox 11"/>
           <p:cNvSpPr txBox="1"/>
           <p:nvPr/>
         </p:nvSpPr>
@@ -12048,7 +11586,7 @@
       </p:sp>
       <p:sp>
         <p:nvSpPr>
-          <p:cNvPr id="14" name="TextBox 13"/>
+          <p:cNvPr id="13" name="TextBox 12"/>
           <p:cNvSpPr txBox="1"/>
           <p:nvPr/>
         </p:nvSpPr>
@@ -12163,48 +11701,6 @@
         </p:nvSpPr>
         <p:spPr>
           <a:xfrm>
-            <a:off x="5897880" y="310896"/>
-            <a:ext cx="4800600" cy="256032"/>
-          </a:xfrm>
-          <a:prstGeom prst="rect">
-            <a:avLst/>
-          </a:prstGeom>
-          <a:noFill/>
-        </p:spPr>
-        <p:txBody>
-          <a:bodyPr wrap="none" lIns="9144" rIns="9144" tIns="9144" bIns="9144" anchor="t">
-            <a:spAutoFit/>
-          </a:bodyPr>
-          <a:lstStyle/>
-          <a:p>
-            <a:pPr algn="r">
-              <a:spcAft>
-                <a:spcPts val="0"/>
-              </a:spcAft>
-              <a:defRPr sz="680" b="1">
-                <a:solidFill>
-                  <a:srgbClr val="4F6B00"/>
-                </a:solidFill>
-                <a:latin typeface="Inter"/>
-              </a:defRPr>
-            </a:pPr>
-            <a:r>
-              <a:rPr>
-                <a:latin typeface="Inter"/>
-              </a:rPr>
-              <a:t>Illustrative, Gradient Maintained — demo data, not the client's holdings or managers</a:t>
-            </a:r>
-          </a:p>
-        </p:txBody>
-      </p:sp>
-      <p:sp>
-        <p:nvSpPr>
-          <p:cNvPr id="4" name="TextBox 3"/>
-          <p:cNvSpPr txBox="1"/>
-          <p:nvPr/>
-        </p:nvSpPr>
-        <p:spPr>
-          <a:xfrm>
             <a:off x="640080" y="566928"/>
             <a:ext cx="10058400" cy="530352"/>
           </a:xfrm>
@@ -12241,7 +11737,7 @@
       </p:sp>
       <p:sp>
         <p:nvSpPr>
-          <p:cNvPr id="5" name="Rectangle 4"/>
+          <p:cNvPr id="4" name="Rectangle 3"/>
           <p:cNvSpPr/>
           <p:nvPr/>
         </p:nvSpPr>
@@ -12290,7 +11786,7 @@
       </p:sp>
       <p:sp>
         <p:nvSpPr>
-          <p:cNvPr id="6" name="Rectangle 5"/>
+          <p:cNvPr id="5" name="Rectangle 4"/>
           <p:cNvSpPr/>
           <p:nvPr/>
         </p:nvSpPr>
@@ -12339,7 +11835,7 @@
       </p:sp>
       <p:sp>
         <p:nvSpPr>
-          <p:cNvPr id="7" name="TextBox 6"/>
+          <p:cNvPr id="6" name="TextBox 5"/>
           <p:cNvSpPr txBox="1"/>
           <p:nvPr/>
         </p:nvSpPr>
@@ -12381,7 +11877,7 @@
       </p:sp>
       <p:sp>
         <p:nvSpPr>
-          <p:cNvPr id="8" name="TextBox 7"/>
+          <p:cNvPr id="7" name="TextBox 6"/>
           <p:cNvSpPr txBox="1"/>
           <p:nvPr/>
         </p:nvSpPr>
@@ -12456,7 +11952,7 @@
       </p:sp>
       <p:sp>
         <p:nvSpPr>
-          <p:cNvPr id="9" name="TextBox 8"/>
+          <p:cNvPr id="8" name="TextBox 7"/>
           <p:cNvSpPr txBox="1"/>
           <p:nvPr/>
         </p:nvSpPr>
@@ -12517,7 +12013,7 @@
       </p:sp>
       <p:sp>
         <p:nvSpPr>
-          <p:cNvPr id="10" name="Rectangle 9"/>
+          <p:cNvPr id="9" name="Rectangle 8"/>
           <p:cNvSpPr/>
           <p:nvPr/>
         </p:nvSpPr>
@@ -12566,7 +12062,7 @@
       </p:sp>
       <p:sp>
         <p:nvSpPr>
-          <p:cNvPr id="11" name="TextBox 10"/>
+          <p:cNvPr id="10" name="TextBox 9"/>
           <p:cNvSpPr txBox="1"/>
           <p:nvPr/>
         </p:nvSpPr>
@@ -12608,7 +12104,7 @@
       </p:sp>
       <p:sp>
         <p:nvSpPr>
-          <p:cNvPr id="12" name="TextBox 11"/>
+          <p:cNvPr id="11" name="TextBox 10"/>
           <p:cNvSpPr txBox="1"/>
           <p:nvPr/>
         </p:nvSpPr>
@@ -12650,7 +12146,7 @@
       </p:sp>
       <p:sp>
         <p:nvSpPr>
-          <p:cNvPr id="13" name="TextBox 12"/>
+          <p:cNvPr id="12" name="TextBox 11"/>
           <p:cNvSpPr txBox="1"/>
           <p:nvPr/>
         </p:nvSpPr>
@@ -12765,48 +12261,6 @@
         </p:nvSpPr>
         <p:spPr>
           <a:xfrm>
-            <a:off x="5897880" y="310896"/>
-            <a:ext cx="4800600" cy="256032"/>
-          </a:xfrm>
-          <a:prstGeom prst="rect">
-            <a:avLst/>
-          </a:prstGeom>
-          <a:noFill/>
-        </p:spPr>
-        <p:txBody>
-          <a:bodyPr wrap="none" lIns="9144" rIns="9144" tIns="9144" bIns="9144" anchor="t">
-            <a:spAutoFit/>
-          </a:bodyPr>
-          <a:lstStyle/>
-          <a:p>
-            <a:pPr algn="r">
-              <a:spcAft>
-                <a:spcPts val="0"/>
-              </a:spcAft>
-              <a:defRPr sz="680" b="1">
-                <a:solidFill>
-                  <a:srgbClr val="4F6B00"/>
-                </a:solidFill>
-                <a:latin typeface="Inter"/>
-              </a:defRPr>
-            </a:pPr>
-            <a:r>
-              <a:rPr>
-                <a:latin typeface="Inter"/>
-              </a:rPr>
-              <a:t>Illustrative, Gradient Maintained — demo data, not the client's holdings or managers</a:t>
-            </a:r>
-          </a:p>
-        </p:txBody>
-      </p:sp>
-      <p:sp>
-        <p:nvSpPr>
-          <p:cNvPr id="4" name="TextBox 3"/>
-          <p:cNvSpPr txBox="1"/>
-          <p:nvPr/>
-        </p:nvSpPr>
-        <p:spPr>
-          <a:xfrm>
             <a:off x="640080" y="566928"/>
             <a:ext cx="10058400" cy="530352"/>
           </a:xfrm>
@@ -12843,7 +12297,7 @@
       </p:sp>
       <p:sp>
         <p:nvSpPr>
-          <p:cNvPr id="5" name="Rectangle 4"/>
+          <p:cNvPr id="4" name="Rectangle 3"/>
           <p:cNvSpPr/>
           <p:nvPr/>
         </p:nvSpPr>
@@ -12892,7 +12346,7 @@
       </p:sp>
       <p:sp>
         <p:nvSpPr>
-          <p:cNvPr id="6" name="Rectangle 5"/>
+          <p:cNvPr id="5" name="Rectangle 4"/>
           <p:cNvSpPr/>
           <p:nvPr/>
         </p:nvSpPr>
@@ -12941,7 +12395,7 @@
       </p:sp>
       <p:sp>
         <p:nvSpPr>
-          <p:cNvPr id="7" name="TextBox 6"/>
+          <p:cNvPr id="6" name="TextBox 5"/>
           <p:cNvSpPr txBox="1"/>
           <p:nvPr/>
         </p:nvSpPr>
@@ -12983,7 +12437,7 @@
       </p:sp>
       <p:sp>
         <p:nvSpPr>
-          <p:cNvPr id="8" name="TextBox 7"/>
+          <p:cNvPr id="7" name="TextBox 6"/>
           <p:cNvSpPr txBox="1"/>
           <p:nvPr/>
         </p:nvSpPr>
@@ -13065,7 +12519,7 @@
       </p:sp>
       <p:sp>
         <p:nvSpPr>
-          <p:cNvPr id="9" name="Rectangle 8"/>
+          <p:cNvPr id="8" name="Rectangle 7"/>
           <p:cNvSpPr/>
           <p:nvPr/>
         </p:nvSpPr>
@@ -13114,7 +12568,7 @@
       </p:sp>
       <p:sp>
         <p:nvSpPr>
-          <p:cNvPr id="10" name="TextBox 9"/>
+          <p:cNvPr id="9" name="TextBox 8"/>
           <p:cNvSpPr txBox="1"/>
           <p:nvPr/>
         </p:nvSpPr>
@@ -13156,7 +12610,7 @@
       </p:sp>
       <p:sp>
         <p:nvSpPr>
-          <p:cNvPr id="11" name="TextBox 10"/>
+          <p:cNvPr id="10" name="TextBox 9"/>
           <p:cNvSpPr txBox="1"/>
           <p:nvPr/>
         </p:nvSpPr>
@@ -13198,7 +12652,7 @@
       </p:sp>
       <p:sp>
         <p:nvSpPr>
-          <p:cNvPr id="12" name="TextBox 11"/>
+          <p:cNvPr id="11" name="TextBox 10"/>
           <p:cNvSpPr txBox="1"/>
           <p:nvPr/>
         </p:nvSpPr>
